--- a/decks/Day 1/Section3-IDE-Integration-MCP.pptx
+++ b/decks/Day 1/Section3-IDE-Integration-MCP.pptx
@@ -18,10 +18,7 @@
     <p:sldId id="266" r:id="rId12"/>
     <p:sldId id="267" r:id="rId13"/>
   </p:sldIdLst>
-  <p:notesMasterIdLst>
-    <p:notesMasterId r:id="rId14"/>
-  </p:notesMasterIdLst>
-  <p:sldSz cx="9144000" cy="5143500"/>
+  <p:sldSz cx="9144000" cy="5143500" type="screen16x9"/>
   <p:notesSz cx="5143500" cy="9144000"/>
   <p:defaultTextStyle>
     <a:lvl1pPr marL="0" algn="l" defTabSz="914400" rtl="0" eaLnBrk="1" latinLnBrk="0" hangingPunct="1">
@@ -115,356 +112,12 @@
       </a:defRPr>
     </a:lvl9pPr>
   </p:defaultTextStyle>
+  <p:extLst>
+    <p:ext uri="{EFAFB233-063F-42B5-8137-9DF3F51BA10A}">
+      <p15:sldGuideLst xmlns:p15="http://schemas.microsoft.com/office/powerpoint/2012/main"/>
+    </p:ext>
+  </p:extLst>
 </p:presentation>
-</file>
-
-<file path=ppt/notesMasters/notesMaster1.xml><?xml version="1.0" encoding="utf-8"?>
-<p:notesMaster xmlns:a="http://schemas.openxmlformats.org/drawingml/2006/main" xmlns:r="http://schemas.openxmlformats.org/officeDocument/2006/relationships" xmlns:p="http://schemas.openxmlformats.org/presentationml/2006/main">
-  <p:cSld>
-    <p:bg>
-      <p:bgRef idx="1001">
-        <a:schemeClr val="bg1"/>
-      </p:bgRef>
-    </p:bg>
-    <p:spTree>
-      <p:nvGrpSpPr>
-        <p:cNvPr id="1" name=""/>
-        <p:cNvGrpSpPr/>
-        <p:nvPr/>
-      </p:nvGrpSpPr>
-      <p:grpSpPr>
-        <a:xfrm>
-          <a:off x="0" y="0"/>
-          <a:ext cx="0" cy="0"/>
-          <a:chOff x="0" y="0"/>
-          <a:chExt cx="0" cy="0"/>
-        </a:xfrm>
-      </p:grpSpPr>
-      <p:sp>
-        <p:nvSpPr>
-          <p:cNvPr id="2" name="Header Placeholder 1"/>
-          <p:cNvSpPr>
-            <a:spLocks noGrp="1"/>
-          </p:cNvSpPr>
-          <p:nvPr>
-            <p:ph type="hdr" sz="quarter"/>
-          </p:nvPr>
-        </p:nvSpPr>
-        <p:spPr>
-          <a:xfrm>
-            <a:off x="0" y="0"/>
-            <a:ext cx="2971800" cy="458788"/>
-          </a:xfrm>
-          <a:prstGeom prst="rect">
-            <a:avLst/>
-          </a:prstGeom>
-        </p:spPr>
-        <p:txBody>
-          <a:bodyPr vert="horz" lIns="91440" tIns="45720" rIns="91440" bIns="45720" rtlCol="0"/>
-          <a:lstStyle>
-            <a:lvl1pPr algn="l">
-              <a:defRPr sz="1200"/>
-            </a:lvl1pPr>
-          </a:lstStyle>
-          <a:p>
-            <a:endParaRPr lang="en-US"/>
-          </a:p>
-        </p:txBody>
-      </p:sp>
-      <p:sp>
-        <p:nvSpPr>
-          <p:cNvPr id="3" name="Date Placeholder 2"/>
-          <p:cNvSpPr>
-            <a:spLocks noGrp="1"/>
-          </p:cNvSpPr>
-          <p:nvPr>
-            <p:ph type="dt" idx="1"/>
-          </p:nvPr>
-        </p:nvSpPr>
-        <p:spPr>
-          <a:xfrm>
-            <a:off x="3884613" y="0"/>
-            <a:ext cx="2971800" cy="458788"/>
-          </a:xfrm>
-          <a:prstGeom prst="rect">
-            <a:avLst/>
-          </a:prstGeom>
-        </p:spPr>
-        <p:txBody>
-          <a:bodyPr vert="horz" lIns="91440" tIns="45720" rIns="91440" bIns="45720" rtlCol="0"/>
-          <a:lstStyle>
-            <a:lvl1pPr algn="r">
-              <a:defRPr sz="1200"/>
-            </a:lvl1pPr>
-          </a:lstStyle>
-          <a:p>
-            <a:fld id="{5282F153-3F37-0F45-9E97-73ACFA13230C}" type="datetimeFigureOut">
-              <a:rPr lang="en-US"/>
-              <a:t>7/23/19</a:t>
-            </a:fld>
-            <a:endParaRPr lang="en-US"/>
-          </a:p>
-        </p:txBody>
-      </p:sp>
-      <p:sp>
-        <p:nvSpPr>
-          <p:cNvPr id="4" name="Slide Image Placeholder 3"/>
-          <p:cNvSpPr>
-            <a:spLocks noGrp="1" noRot="1" noChangeAspect="1"/>
-          </p:cNvSpPr>
-          <p:nvPr>
-            <p:ph type="sldImg" idx="2"/>
-          </p:nvPr>
-        </p:nvSpPr>
-        <p:spPr>
-          <a:xfrm>
-            <a:off x="685800" y="1143000"/>
-            <a:ext cx="5486400" cy="3086100"/>
-          </a:xfrm>
-          <a:prstGeom prst="rect">
-            <a:avLst/>
-          </a:prstGeom>
-          <a:noFill/>
-          <a:ln w="12700">
-            <a:solidFill>
-              <a:prstClr val="black"/>
-            </a:solidFill>
-          </a:ln>
-        </p:spPr>
-        <p:txBody>
-          <a:bodyPr vert="horz" lIns="91440" tIns="45720" rIns="91440" bIns="45720" rtlCol="0" anchor="ctr"/>
-          <a:lstStyle/>
-          <a:p>
-            <a:endParaRPr lang="en-US"/>
-          </a:p>
-        </p:txBody>
-      </p:sp>
-      <p:sp>
-        <p:nvSpPr>
-          <p:cNvPr id="5" name="Notes Placeholder 4"/>
-          <p:cNvSpPr>
-            <a:spLocks noGrp="1"/>
-          </p:cNvSpPr>
-          <p:nvPr>
-            <p:ph type="body" sz="quarter" idx="3"/>
-          </p:nvPr>
-        </p:nvSpPr>
-        <p:spPr>
-          <a:xfrm>
-            <a:off x="685800" y="4400550"/>
-            <a:ext cx="5486400" cy="3600450"/>
-          </a:xfrm>
-          <a:prstGeom prst="rect">
-            <a:avLst/>
-          </a:prstGeom>
-        </p:spPr>
-        <p:txBody>
-          <a:bodyPr vert="horz" lIns="91440" tIns="45720" rIns="91440" bIns="45720" rtlCol="0"/>
-          <a:lstStyle/>
-          <a:p>
-            <a:pPr lvl="0"/>
-            <a:r>
-              <a:rPr lang="en-US"/>
-              <a:t>Click to edit Master text styles</a:t>
-            </a:r>
-          </a:p>
-          <a:p>
-            <a:pPr lvl="1"/>
-            <a:r>
-              <a:rPr lang="en-US"/>
-              <a:t>Second level</a:t>
-            </a:r>
-          </a:p>
-          <a:p>
-            <a:pPr lvl="2"/>
-            <a:r>
-              <a:rPr lang="en-US"/>
-              <a:t>Third level</a:t>
-            </a:r>
-          </a:p>
-          <a:p>
-            <a:pPr lvl="3"/>
-            <a:r>
-              <a:rPr lang="en-US"/>
-              <a:t>Fourth level</a:t>
-            </a:r>
-          </a:p>
-          <a:p>
-            <a:pPr lvl="4"/>
-            <a:r>
-              <a:rPr lang="en-US"/>
-              <a:t>Fifth level</a:t>
-            </a:r>
-          </a:p>
-        </p:txBody>
-      </p:sp>
-      <p:sp>
-        <p:nvSpPr>
-          <p:cNvPr id="6" name="Footer Placeholder 5"/>
-          <p:cNvSpPr>
-            <a:spLocks noGrp="1"/>
-          </p:cNvSpPr>
-          <p:nvPr>
-            <p:ph type="ftr" sz="quarter" idx="4"/>
-          </p:nvPr>
-        </p:nvSpPr>
-        <p:spPr>
-          <a:xfrm>
-            <a:off x="0" y="8685213"/>
-            <a:ext cx="2971800" cy="458787"/>
-          </a:xfrm>
-          <a:prstGeom prst="rect">
-            <a:avLst/>
-          </a:prstGeom>
-        </p:spPr>
-        <p:txBody>
-          <a:bodyPr vert="horz" lIns="91440" tIns="45720" rIns="91440" bIns="45720" rtlCol="0" anchor="b"/>
-          <a:lstStyle>
-            <a:lvl1pPr algn="l">
-              <a:defRPr sz="1200"/>
-            </a:lvl1pPr>
-          </a:lstStyle>
-          <a:p>
-            <a:endParaRPr lang="en-US"/>
-          </a:p>
-        </p:txBody>
-      </p:sp>
-      <p:sp>
-        <p:nvSpPr>
-          <p:cNvPr id="7" name="Slide Number Placeholder 6"/>
-          <p:cNvSpPr>
-            <a:spLocks noGrp="1"/>
-          </p:cNvSpPr>
-          <p:nvPr>
-            <p:ph type="sldNum" sz="quarter" idx="5"/>
-          </p:nvPr>
-        </p:nvSpPr>
-        <p:spPr>
-          <a:xfrm>
-            <a:off x="3884613" y="8685213"/>
-            <a:ext cx="2971800" cy="458787"/>
-          </a:xfrm>
-          <a:prstGeom prst="rect">
-            <a:avLst/>
-          </a:prstGeom>
-        </p:spPr>
-        <p:txBody>
-          <a:bodyPr vert="horz" lIns="91440" tIns="45720" rIns="91440" bIns="45720" rtlCol="0" anchor="b"/>
-          <a:lstStyle>
-            <a:lvl1pPr algn="r">
-              <a:defRPr sz="1200"/>
-            </a:lvl1pPr>
-          </a:lstStyle>
-          <a:p>
-            <a:fld id="{CE5E9CC1-C706-0F49-92D6-E571CC5EEA8F}" type="slidenum">
-              <a:rPr lang="en-US"/>
-              <a:t>‹#›</a:t>
-            </a:fld>
-            <a:endParaRPr lang="en-US"/>
-          </a:p>
-        </p:txBody>
-      </p:sp>
-    </p:spTree>
-    <p:extLst>
-      <p:ext uri="{BB962C8B-B14F-4D97-AF65-F5344CB8AC3E}">
-        <p14:creationId xmlns:p14="http://schemas.microsoft.com/office/powerpoint/2010/main" val="1024086991"/>
-      </p:ext>
-    </p:extLst>
-  </p:cSld>
-  <p:clrMap bg1="lt1" tx1="dk1" bg2="lt2" tx2="dk2" accent1="accent1" accent2="accent2" accent3="accent3" accent4="accent4" accent5="accent5" accent6="accent6" hlink="hlink" folHlink="folHlink"/>
-  <p:notesStyle>
-    <a:lvl1pPr marL="0" algn="l" defTabSz="914400" rtl="0" eaLnBrk="1" latinLnBrk="0" hangingPunct="1">
-      <a:defRPr sz="1200" kern="1200">
-        <a:solidFill>
-          <a:schemeClr val="tx1"/>
-        </a:solidFill>
-        <a:latin typeface="+mn-lt"/>
-        <a:ea typeface="+mn-ea"/>
-        <a:cs typeface="+mn-cs"/>
-      </a:defRPr>
-    </a:lvl1pPr>
-    <a:lvl2pPr marL="457200" algn="l" defTabSz="914400" rtl="0" eaLnBrk="1" latinLnBrk="0" hangingPunct="1">
-      <a:defRPr sz="1200" kern="1200">
-        <a:solidFill>
-          <a:schemeClr val="tx1"/>
-        </a:solidFill>
-        <a:latin typeface="+mn-lt"/>
-        <a:ea typeface="+mn-ea"/>
-        <a:cs typeface="+mn-cs"/>
-      </a:defRPr>
-    </a:lvl2pPr>
-    <a:lvl3pPr marL="914400" algn="l" defTabSz="914400" rtl="0" eaLnBrk="1" latinLnBrk="0" hangingPunct="1">
-      <a:defRPr sz="1200" kern="1200">
-        <a:solidFill>
-          <a:schemeClr val="tx1"/>
-        </a:solidFill>
-        <a:latin typeface="+mn-lt"/>
-        <a:ea typeface="+mn-ea"/>
-        <a:cs typeface="+mn-cs"/>
-      </a:defRPr>
-    </a:lvl3pPr>
-    <a:lvl4pPr marL="1371600" algn="l" defTabSz="914400" rtl="0" eaLnBrk="1" latinLnBrk="0" hangingPunct="1">
-      <a:defRPr sz="1200" kern="1200">
-        <a:solidFill>
-          <a:schemeClr val="tx1"/>
-        </a:solidFill>
-        <a:latin typeface="+mn-lt"/>
-        <a:ea typeface="+mn-ea"/>
-        <a:cs typeface="+mn-cs"/>
-      </a:defRPr>
-    </a:lvl4pPr>
-    <a:lvl5pPr marL="1828800" algn="l" defTabSz="914400" rtl="0" eaLnBrk="1" latinLnBrk="0" hangingPunct="1">
-      <a:defRPr sz="1200" kern="1200">
-        <a:solidFill>
-          <a:schemeClr val="tx1"/>
-        </a:solidFill>
-        <a:latin typeface="+mn-lt"/>
-        <a:ea typeface="+mn-ea"/>
-        <a:cs typeface="+mn-cs"/>
-      </a:defRPr>
-    </a:lvl5pPr>
-    <a:lvl6pPr marL="2286000" algn="l" defTabSz="914400" rtl="0" eaLnBrk="1" latinLnBrk="0" hangingPunct="1">
-      <a:defRPr sz="1200" kern="1200">
-        <a:solidFill>
-          <a:schemeClr val="tx1"/>
-        </a:solidFill>
-        <a:latin typeface="+mn-lt"/>
-        <a:ea typeface="+mn-ea"/>
-        <a:cs typeface="+mn-cs"/>
-      </a:defRPr>
-    </a:lvl6pPr>
-    <a:lvl7pPr marL="2743200" algn="l" defTabSz="914400" rtl="0" eaLnBrk="1" latinLnBrk="0" hangingPunct="1">
-      <a:defRPr sz="1200" kern="1200">
-        <a:solidFill>
-          <a:schemeClr val="tx1"/>
-        </a:solidFill>
-        <a:latin typeface="+mn-lt"/>
-        <a:ea typeface="+mn-ea"/>
-        <a:cs typeface="+mn-cs"/>
-      </a:defRPr>
-    </a:lvl7pPr>
-    <a:lvl8pPr marL="3200400" algn="l" defTabSz="914400" rtl="0" eaLnBrk="1" latinLnBrk="0" hangingPunct="1">
-      <a:defRPr sz="1200" kern="1200">
-        <a:solidFill>
-          <a:schemeClr val="tx1"/>
-        </a:solidFill>
-        <a:latin typeface="+mn-lt"/>
-        <a:ea typeface="+mn-ea"/>
-        <a:cs typeface="+mn-cs"/>
-      </a:defRPr>
-    </a:lvl8pPr>
-    <a:lvl9pPr marL="3657600" algn="l" defTabSz="914400" rtl="0" eaLnBrk="1" latinLnBrk="0" hangingPunct="1">
-      <a:defRPr sz="1200" kern="1200">
-        <a:solidFill>
-          <a:schemeClr val="tx1"/>
-        </a:solidFill>
-        <a:latin typeface="+mn-lt"/>
-        <a:ea typeface="+mn-ea"/>
-        <a:cs typeface="+mn-cs"/>
-      </a:defRPr>
-    </a:lvl9pPr>
-  </p:notesStyle>
-</p:notesMaster>
 </file>
 
 <file path=ppt/slideLayouts/slideLayout1.xml><?xml version="1.0" encoding="utf-8"?>
@@ -790,6 +443,7 @@
         <a:solidFill>
           <a:srgbClr val="F0EEE6"/>
         </a:solidFill>
+        <a:effectLst/>
       </p:bgPr>
     </p:bg>
     <p:spTree>
@@ -825,6 +479,13 @@
           </a:solidFill>
           <a:ln/>
         </p:spPr>
+        <p:txBody>
+          <a:bodyPr/>
+          <a:lstStyle/>
+          <a:p>
+            <a:endParaRPr lang="en-US"/>
+          </a:p>
+        </p:txBody>
       </p:sp>
       <p:sp>
         <p:nvSpPr>
@@ -845,17 +506,24 @@
           </a:solidFill>
           <a:ln/>
         </p:spPr>
+        <p:txBody>
+          <a:bodyPr/>
+          <a:lstStyle/>
+          <a:p>
+            <a:endParaRPr lang="en-US"/>
+          </a:p>
+        </p:txBody>
       </p:sp>
       <p:pic>
         <p:nvPicPr>
-          <p:cNvPr id="4" name="Image 0" descr="preencoded.png">    </p:cNvPr>
+          <p:cNvPr id="4" name="Image 0" descr="preencoded.png"/>
           <p:cNvPicPr>
             <a:picLocks noChangeAspect="1"/>
           </p:cNvPicPr>
           <p:nvPr/>
         </p:nvPicPr>
         <p:blipFill>
-          <a:blip r:embed="rId1"/>
+          <a:blip r:embed="rId2"/>
           <a:stretch>
             <a:fillRect/>
           </a:stretch>
@@ -891,11 +559,11 @@
           <a:bodyPr wrap="square" lIns="0" tIns="0" rIns="0" bIns="0" rtlCol="0" anchor="ctr"/>
           <a:lstStyle/>
           <a:p>
-            <a:pPr indent="0" marL="0">
-              <a:buNone/>
-            </a:pPr>
-            <a:r>
-              <a:rPr lang="en-US" sz="1400" b="1" spc="300" kern="0" dirty="0">
+            <a:pPr marL="0" indent="0">
+              <a:buNone/>
+            </a:pPr>
+            <a:r>
+              <a:rPr lang="en-US" sz="1400" b="1" kern="0" spc="300" dirty="0">
                 <a:solidFill>
                   <a:srgbClr val="D97757"/>
                 </a:solidFill>
@@ -930,7 +598,7 @@
           <a:bodyPr wrap="square" lIns="0" tIns="0" rIns="0" bIns="0" rtlCol="0" anchor="ctr"/>
           <a:lstStyle/>
           <a:p>
-            <a:pPr indent="0" marL="0">
+            <a:pPr marL="0" indent="0">
               <a:lnSpc>
                 <a:spcPct val="98000"/>
               </a:lnSpc>
@@ -950,7 +618,7 @@
             <a:endParaRPr lang="en-US" sz="4800" dirty="0"/>
           </a:p>
           <a:p>
-            <a:pPr indent="0" marL="0">
+            <a:pPr marL="0" indent="0">
               <a:lnSpc>
                 <a:spcPct val="98000"/>
               </a:lnSpc>
@@ -993,6 +661,13 @@
             <a:prstDash val="solid"/>
           </a:ln>
         </p:spPr>
+        <p:txBody>
+          <a:bodyPr/>
+          <a:lstStyle/>
+          <a:p>
+            <a:endParaRPr lang="en-US"/>
+          </a:p>
+        </p:txBody>
       </p:sp>
       <p:sp>
         <p:nvSpPr>
@@ -1015,7 +690,7 @@
           <a:bodyPr wrap="square" lIns="0" tIns="0" rIns="0" bIns="0" rtlCol="0" anchor="ctr"/>
           <a:lstStyle/>
           <a:p>
-            <a:pPr indent="0" marL="0">
+            <a:pPr marL="0" indent="0">
               <a:buNone/>
             </a:pPr>
             <a:r>
@@ -1030,45 +705,6 @@
               <a:t>105 min  ·  40 lecture / demo  +  65 lab</a:t>
             </a:r>
             <a:endParaRPr lang="en-US" sz="1700" dirty="0"/>
-          </a:p>
-        </p:txBody>
-      </p:sp>
-      <p:sp>
-        <p:nvSpPr>
-          <p:cNvPr id="9" name="Text 6"/>
-          <p:cNvSpPr/>
-          <p:nvPr/>
-        </p:nvSpPr>
-        <p:spPr>
-          <a:xfrm>
-            <a:off x="640080" y="4462272"/>
-            <a:ext cx="8046720" cy="292608"/>
-          </a:xfrm>
-          <a:prstGeom prst="rect">
-            <a:avLst/>
-          </a:prstGeom>
-          <a:noFill/>
-          <a:ln/>
-        </p:spPr>
-        <p:txBody>
-          <a:bodyPr wrap="square" lIns="0" tIns="0" rIns="0" bIns="0" rtlCol="0" anchor="ctr"/>
-          <a:lstStyle/>
-          <a:p>
-            <a:pPr indent="0" marL="0">
-              <a:buNone/>
-            </a:pPr>
-            <a:r>
-              <a:rPr lang="en-US" sz="1000" i="1" dirty="0">
-                <a:solidFill>
-                  <a:srgbClr val="615C52"/>
-                </a:solidFill>
-                <a:latin typeface="Inter" pitchFamily="34" charset="0"/>
-                <a:ea typeface="Inter" pitchFamily="34" charset="-122"/>
-                <a:cs typeface="Inter" pitchFamily="34" charset="-120"/>
-              </a:rPr>
-              <a:t>dotnetclaude.com  ·  .NET AI with Claude Workshop</a:t>
-            </a:r>
-            <a:endParaRPr lang="en-US" sz="1000" dirty="0"/>
           </a:p>
         </p:txBody>
       </p:sp>
@@ -1088,6 +724,7 @@
         <a:solidFill>
           <a:srgbClr val="F0EEE6"/>
         </a:solidFill>
+        <a:effectLst/>
       </p:bgPr>
     </p:bg>
     <p:spTree>
@@ -1106,210 +743,7 @@
       </p:grpSpPr>
       <p:pic>
         <p:nvPicPr>
-          <p:cNvPr id="2" name="Image 0" descr="preencoded.png">    </p:cNvPr>
-          <p:cNvPicPr>
-            <a:picLocks noChangeAspect="1"/>
-          </p:cNvPicPr>
-          <p:nvPr/>
-        </p:nvPicPr>
-        <p:blipFill>
-          <a:blip r:embed="rId1"/>
-          <a:stretch>
-            <a:fillRect/>
-          </a:stretch>
-        </p:blipFill>
-        <p:spPr>
-          <a:xfrm>
-            <a:off x="8339328" y="402336"/>
-            <a:ext cx="310896" cy="310896"/>
-          </a:xfrm>
-          <a:prstGeom prst="rect">
-            <a:avLst/>
-          </a:prstGeom>
-        </p:spPr>
-      </p:pic>
-      <p:sp>
-        <p:nvSpPr>
-          <p:cNvPr id="3" name="Shape 0"/>
-          <p:cNvSpPr/>
-          <p:nvPr/>
-        </p:nvSpPr>
-        <p:spPr>
-          <a:xfrm>
-            <a:off x="548640" y="822960"/>
-            <a:ext cx="3200400" cy="548640"/>
-          </a:xfrm>
-          <a:prstGeom prst="roundRect">
-            <a:avLst>
-              <a:gd name="adj" fmla="val 50000"/>
-            </a:avLst>
-          </a:prstGeom>
-          <a:solidFill>
-            <a:srgbClr val="C0392B"/>
-          </a:solidFill>
-          <a:ln/>
-        </p:spPr>
-      </p:sp>
-      <p:sp>
-        <p:nvSpPr>
-          <p:cNvPr id="4" name="Shape 1"/>
-          <p:cNvSpPr/>
-          <p:nvPr/>
-        </p:nvSpPr>
-        <p:spPr>
-          <a:xfrm>
-            <a:off x="804672" y="1014984"/>
-            <a:ext cx="164592" cy="164592"/>
-          </a:xfrm>
-          <a:prstGeom prst="ellipse">
-            <a:avLst/>
-          </a:prstGeom>
-          <a:solidFill>
-            <a:srgbClr val="FFFFFF"/>
-          </a:solidFill>
-          <a:ln/>
-        </p:spPr>
-      </p:sp>
-      <p:sp>
-        <p:nvSpPr>
-          <p:cNvPr id="5" name="Text 2"/>
-          <p:cNvSpPr/>
-          <p:nvPr/>
-        </p:nvSpPr>
-        <p:spPr>
-          <a:xfrm>
-            <a:off x="1051560" y="822960"/>
-            <a:ext cx="2560320" cy="548640"/>
-          </a:xfrm>
-          <a:prstGeom prst="rect">
-            <a:avLst/>
-          </a:prstGeom>
-          <a:noFill/>
-          <a:ln/>
-        </p:spPr>
-        <p:txBody>
-          <a:bodyPr wrap="square" lIns="0" tIns="0" rIns="0" bIns="0" rtlCol="0" anchor="ctr"/>
-          <a:lstStyle/>
-          <a:p>
-            <a:pPr indent="0" marL="0">
-              <a:buNone/>
-            </a:pPr>
-            <a:r>
-              <a:rPr lang="en-US" sz="1700" b="1" spc="100" kern="0" dirty="0">
-                <a:solidFill>
-                  <a:srgbClr val="FFFFFF"/>
-                </a:solidFill>
-                <a:latin typeface="Inter" pitchFamily="34" charset="0"/>
-                <a:ea typeface="Inter" pitchFamily="34" charset="-122"/>
-                <a:cs typeface="Inter" pitchFamily="34" charset="-120"/>
-              </a:rPr>
-              <a:t>LIVE DEMO</a:t>
-            </a:r>
-            <a:endParaRPr lang="en-US" sz="1700" dirty="0"/>
-          </a:p>
-        </p:txBody>
-      </p:sp>
-      <p:sp>
-        <p:nvSpPr>
-          <p:cNvPr id="6" name="Text 3"/>
-          <p:cNvSpPr/>
-          <p:nvPr/>
-        </p:nvSpPr>
-        <p:spPr>
-          <a:xfrm>
-            <a:off x="548640" y="1627632"/>
-            <a:ext cx="8046720" cy="502920"/>
-          </a:xfrm>
-          <a:prstGeom prst="rect">
-            <a:avLst/>
-          </a:prstGeom>
-          <a:noFill/>
-          <a:ln/>
-        </p:spPr>
-        <p:txBody>
-          <a:bodyPr wrap="square" lIns="0" tIns="0" rIns="0" bIns="0" rtlCol="0" anchor="ctr"/>
-          <a:lstStyle/>
-          <a:p>
-            <a:pPr indent="0" marL="0">
-              <a:buNone/>
-            </a:pPr>
-            <a:r>
-              <a:rPr lang="en-US" sz="3200" b="1" dirty="0">
-                <a:solidFill>
-                  <a:srgbClr val="141413"/>
-                </a:solidFill>
-                <a:latin typeface="Georgia" pitchFamily="34" charset="0"/>
-                <a:ea typeface="Georgia" pitchFamily="34" charset="-122"/>
-                <a:cs typeface="Georgia" pitchFamily="34" charset="-120"/>
-              </a:rPr>
-              <a:t>GitHub MCP server</a:t>
-            </a:r>
-            <a:endParaRPr lang="en-US" sz="3200" dirty="0"/>
-          </a:p>
-        </p:txBody>
-      </p:sp>
-      <p:sp>
-        <p:nvSpPr>
-          <p:cNvPr id="7" name="Text 4"/>
-          <p:cNvSpPr/>
-          <p:nvPr/>
-        </p:nvSpPr>
-        <p:spPr>
-          <a:xfrm>
-            <a:off x="548640" y="2157984"/>
-            <a:ext cx="8046720" cy="365760"/>
-          </a:xfrm>
-          <a:prstGeom prst="rect">
-            <a:avLst/>
-          </a:prstGeom>
-          <a:noFill/>
-          <a:ln/>
-        </p:spPr>
-        <p:txBody>
-          <a:bodyPr wrap="square" lIns="0" tIns="0" rIns="0" bIns="0" rtlCol="0" anchor="ctr"/>
-          <a:lstStyle/>
-          <a:p>
-            <a:pPr indent="0" marL="0">
-              <a:buNone/>
-            </a:pPr>
-            <a:r>
-              <a:rPr lang="en-US" sz="1700" b="1" dirty="0">
-                <a:solidFill>
-                  <a:srgbClr val="D97757"/>
-                </a:solidFill>
-                <a:latin typeface="Inter" pitchFamily="34" charset="0"/>
-                <a:ea typeface="Inter" pitchFamily="34" charset="-122"/>
-                <a:cs typeface="Inter" pitchFamily="34" charset="-120"/>
-              </a:rPr>
-              <a:t>Config → query issues &amp; PRs → create an issue</a:t>
-            </a:r>
-            <a:endParaRPr lang="en-US" sz="1700" dirty="0"/>
-          </a:p>
-        </p:txBody>
-      </p:sp>
-      <p:sp>
-        <p:nvSpPr>
-          <p:cNvPr id="8" name="Shape 5"/>
-          <p:cNvSpPr/>
-          <p:nvPr/>
-        </p:nvSpPr>
-        <p:spPr>
-          <a:xfrm>
-            <a:off x="566928" y="2761488"/>
-            <a:ext cx="274320" cy="274320"/>
-          </a:xfrm>
-          <a:prstGeom prst="ellipse">
-            <a:avLst/>
-          </a:prstGeom>
-          <a:solidFill>
-            <a:srgbClr val="C0392B"/>
-          </a:solidFill>
-          <a:ln/>
-        </p:spPr>
-      </p:sp>
-      <p:pic>
-        <p:nvPicPr>
-          <p:cNvPr id="9" name="Image 1" descr="preencoded.png">    </p:cNvPr>
+          <p:cNvPr id="2" name="Image 0" descr="preencoded.png"/>
           <p:cNvPicPr>
             <a:picLocks noChangeAspect="1"/>
           </p:cNvPicPr>
@@ -1323,8 +757,8 @@
         </p:blipFill>
         <p:spPr>
           <a:xfrm>
-            <a:off x="638251" y="2832811"/>
-            <a:ext cx="131674" cy="131674"/>
+            <a:off x="8339328" y="402336"/>
+            <a:ext cx="310896" cy="310896"/>
           </a:xfrm>
           <a:prstGeom prst="rect">
             <a:avLst/>
@@ -1333,66 +767,207 @@
       </p:pic>
       <p:sp>
         <p:nvSpPr>
-          <p:cNvPr id="10" name="Text 6"/>
-          <p:cNvSpPr/>
-          <p:nvPr/>
-        </p:nvSpPr>
-        <p:spPr>
-          <a:xfrm>
-            <a:off x="960120" y="2743200"/>
-            <a:ext cx="7406640" cy="310896"/>
-          </a:xfrm>
-          <a:prstGeom prst="rect">
-            <a:avLst/>
-          </a:prstGeom>
-          <a:noFill/>
-          <a:ln/>
-        </p:spPr>
-        <p:txBody>
-          <a:bodyPr wrap="square" lIns="0" tIns="0" rIns="0" bIns="0" rtlCol="0" anchor="ctr"/>
-          <a:lstStyle/>
-          <a:p>
-            <a:pPr indent="0" marL="0">
-              <a:buNone/>
-            </a:pPr>
-            <a:r>
-              <a:rPr lang="en-US" sz="1450" dirty="0">
-                <a:solidFill>
-                  <a:srgbClr val="141413"/>
-                </a:solidFill>
-                <a:latin typeface="Inter" pitchFamily="34" charset="0"/>
-                <a:ea typeface="Inter" pitchFamily="34" charset="-122"/>
-                <a:cs typeface="Inter" pitchFamily="34" charset="-120"/>
-              </a:rPr>
-              <a:t>Configure the server and connect the client</a:t>
-            </a:r>
-            <a:endParaRPr lang="en-US" sz="1450" dirty="0"/>
-          </a:p>
-        </p:txBody>
-      </p:sp>
-      <p:sp>
-        <p:nvSpPr>
-          <p:cNvPr id="11" name="Shape 7"/>
-          <p:cNvSpPr/>
-          <p:nvPr/>
-        </p:nvSpPr>
-        <p:spPr>
-          <a:xfrm>
-            <a:off x="566928" y="3127248"/>
-            <a:ext cx="274320" cy="274320"/>
-          </a:xfrm>
-          <a:prstGeom prst="ellipse">
-            <a:avLst/>
+          <p:cNvPr id="3" name="Shape 0"/>
+          <p:cNvSpPr/>
+          <p:nvPr/>
+        </p:nvSpPr>
+        <p:spPr>
+          <a:xfrm>
+            <a:off x="548640" y="822960"/>
+            <a:ext cx="3200400" cy="548640"/>
+          </a:xfrm>
+          <a:prstGeom prst="roundRect">
+            <a:avLst>
+              <a:gd name="adj" fmla="val 50000"/>
+            </a:avLst>
           </a:prstGeom>
           <a:solidFill>
             <a:srgbClr val="C0392B"/>
           </a:solidFill>
           <a:ln/>
         </p:spPr>
+        <p:txBody>
+          <a:bodyPr/>
+          <a:lstStyle/>
+          <a:p>
+            <a:endParaRPr lang="en-US"/>
+          </a:p>
+        </p:txBody>
+      </p:sp>
+      <p:sp>
+        <p:nvSpPr>
+          <p:cNvPr id="4" name="Shape 1"/>
+          <p:cNvSpPr/>
+          <p:nvPr/>
+        </p:nvSpPr>
+        <p:spPr>
+          <a:xfrm>
+            <a:off x="804672" y="1014984"/>
+            <a:ext cx="164592" cy="164592"/>
+          </a:xfrm>
+          <a:prstGeom prst="ellipse">
+            <a:avLst/>
+          </a:prstGeom>
+          <a:solidFill>
+            <a:srgbClr val="FFFFFF"/>
+          </a:solidFill>
+          <a:ln/>
+        </p:spPr>
+        <p:txBody>
+          <a:bodyPr/>
+          <a:lstStyle/>
+          <a:p>
+            <a:endParaRPr lang="en-US"/>
+          </a:p>
+        </p:txBody>
+      </p:sp>
+      <p:sp>
+        <p:nvSpPr>
+          <p:cNvPr id="5" name="Text 2"/>
+          <p:cNvSpPr/>
+          <p:nvPr/>
+        </p:nvSpPr>
+        <p:spPr>
+          <a:xfrm>
+            <a:off x="1051560" y="822960"/>
+            <a:ext cx="2560320" cy="548640"/>
+          </a:xfrm>
+          <a:prstGeom prst="rect">
+            <a:avLst/>
+          </a:prstGeom>
+          <a:noFill/>
+          <a:ln/>
+        </p:spPr>
+        <p:txBody>
+          <a:bodyPr wrap="square" lIns="0" tIns="0" rIns="0" bIns="0" rtlCol="0" anchor="ctr"/>
+          <a:lstStyle/>
+          <a:p>
+            <a:pPr marL="0" indent="0">
+              <a:buNone/>
+            </a:pPr>
+            <a:r>
+              <a:rPr lang="en-US" sz="1700" b="1" kern="0" spc="100" dirty="0">
+                <a:solidFill>
+                  <a:srgbClr val="FFFFFF"/>
+                </a:solidFill>
+                <a:latin typeface="Inter" pitchFamily="34" charset="0"/>
+                <a:ea typeface="Inter" pitchFamily="34" charset="-122"/>
+                <a:cs typeface="Inter" pitchFamily="34" charset="-120"/>
+              </a:rPr>
+              <a:t>LIVE DEMO</a:t>
+            </a:r>
+            <a:endParaRPr lang="en-US" sz="1700" dirty="0"/>
+          </a:p>
+        </p:txBody>
+      </p:sp>
+      <p:sp>
+        <p:nvSpPr>
+          <p:cNvPr id="6" name="Text 3"/>
+          <p:cNvSpPr/>
+          <p:nvPr/>
+        </p:nvSpPr>
+        <p:spPr>
+          <a:xfrm>
+            <a:off x="548640" y="1627632"/>
+            <a:ext cx="8046720" cy="502920"/>
+          </a:xfrm>
+          <a:prstGeom prst="rect">
+            <a:avLst/>
+          </a:prstGeom>
+          <a:noFill/>
+          <a:ln/>
+        </p:spPr>
+        <p:txBody>
+          <a:bodyPr wrap="square" lIns="0" tIns="0" rIns="0" bIns="0" rtlCol="0" anchor="ctr"/>
+          <a:lstStyle/>
+          <a:p>
+            <a:pPr marL="0" indent="0">
+              <a:buNone/>
+            </a:pPr>
+            <a:r>
+              <a:rPr lang="en-US" sz="3200" b="1" dirty="0">
+                <a:solidFill>
+                  <a:srgbClr val="141413"/>
+                </a:solidFill>
+                <a:latin typeface="Georgia" pitchFamily="34" charset="0"/>
+                <a:ea typeface="Georgia" pitchFamily="34" charset="-122"/>
+                <a:cs typeface="Georgia" pitchFamily="34" charset="-120"/>
+              </a:rPr>
+              <a:t>GitHub MCP server</a:t>
+            </a:r>
+            <a:endParaRPr lang="en-US" sz="3200" dirty="0"/>
+          </a:p>
+        </p:txBody>
+      </p:sp>
+      <p:sp>
+        <p:nvSpPr>
+          <p:cNvPr id="7" name="Text 4"/>
+          <p:cNvSpPr/>
+          <p:nvPr/>
+        </p:nvSpPr>
+        <p:spPr>
+          <a:xfrm>
+            <a:off x="548640" y="2157984"/>
+            <a:ext cx="8046720" cy="365760"/>
+          </a:xfrm>
+          <a:prstGeom prst="rect">
+            <a:avLst/>
+          </a:prstGeom>
+          <a:noFill/>
+          <a:ln/>
+        </p:spPr>
+        <p:txBody>
+          <a:bodyPr wrap="square" lIns="0" tIns="0" rIns="0" bIns="0" rtlCol="0" anchor="ctr"/>
+          <a:lstStyle/>
+          <a:p>
+            <a:pPr marL="0" indent="0">
+              <a:buNone/>
+            </a:pPr>
+            <a:r>
+              <a:rPr lang="en-US" sz="1700" b="1" dirty="0">
+                <a:solidFill>
+                  <a:srgbClr val="D97757"/>
+                </a:solidFill>
+                <a:latin typeface="Inter" pitchFamily="34" charset="0"/>
+                <a:ea typeface="Inter" pitchFamily="34" charset="-122"/>
+                <a:cs typeface="Inter" pitchFamily="34" charset="-120"/>
+              </a:rPr>
+              <a:t>Config → query issues &amp; PRs → create an issue</a:t>
+            </a:r>
+            <a:endParaRPr lang="en-US" sz="1700" dirty="0"/>
+          </a:p>
+        </p:txBody>
+      </p:sp>
+      <p:sp>
+        <p:nvSpPr>
+          <p:cNvPr id="8" name="Shape 5"/>
+          <p:cNvSpPr/>
+          <p:nvPr/>
+        </p:nvSpPr>
+        <p:spPr>
+          <a:xfrm>
+            <a:off x="566928" y="2761488"/>
+            <a:ext cx="274320" cy="274320"/>
+          </a:xfrm>
+          <a:prstGeom prst="ellipse">
+            <a:avLst/>
+          </a:prstGeom>
+          <a:solidFill>
+            <a:srgbClr val="C0392B"/>
+          </a:solidFill>
+          <a:ln/>
+        </p:spPr>
+        <p:txBody>
+          <a:bodyPr/>
+          <a:lstStyle/>
+          <a:p>
+            <a:endParaRPr lang="en-US"/>
+          </a:p>
+        </p:txBody>
       </p:sp>
       <p:pic>
         <p:nvPicPr>
-          <p:cNvPr id="12" name="Image 2" descr="preencoded.png">    </p:cNvPr>
+          <p:cNvPr id="9" name="Image 1" descr="preencoded.png"/>
           <p:cNvPicPr>
             <a:picLocks noChangeAspect="1"/>
           </p:cNvPicPr>
@@ -1406,7 +981,7 @@
         </p:blipFill>
         <p:spPr>
           <a:xfrm>
-            <a:off x="638251" y="3198571"/>
+            <a:off x="638251" y="2832811"/>
             <a:ext cx="131674" cy="131674"/>
           </a:xfrm>
           <a:prstGeom prst="rect">
@@ -1416,13 +991,13 @@
       </p:pic>
       <p:sp>
         <p:nvSpPr>
-          <p:cNvPr id="13" name="Text 8"/>
-          <p:cNvSpPr/>
-          <p:nvPr/>
-        </p:nvSpPr>
-        <p:spPr>
-          <a:xfrm>
-            <a:off x="960120" y="3108960"/>
+          <p:cNvPr id="10" name="Text 6"/>
+          <p:cNvSpPr/>
+          <p:nvPr/>
+        </p:nvSpPr>
+        <p:spPr>
+          <a:xfrm>
+            <a:off x="960120" y="2743200"/>
             <a:ext cx="7406640" cy="310896"/>
           </a:xfrm>
           <a:prstGeom prst="rect">
@@ -1435,7 +1010,7 @@
           <a:bodyPr wrap="square" lIns="0" tIns="0" rIns="0" bIns="0" rtlCol="0" anchor="ctr"/>
           <a:lstStyle/>
           <a:p>
-            <a:pPr indent="0" marL="0">
+            <a:pPr marL="0" indent="0">
               <a:buNone/>
             </a:pPr>
             <a:r>
@@ -1447,7 +1022,7 @@
                 <a:ea typeface="Inter" pitchFamily="34" charset="-122"/>
                 <a:cs typeface="Inter" pitchFamily="34" charset="-120"/>
               </a:rPr>
-              <a:t>Query open issues and pull requests</a:t>
+              <a:t>Configure the server and connect the client</a:t>
             </a:r>
             <a:endParaRPr lang="en-US" sz="1450" dirty="0"/>
           </a:p>
@@ -1455,13 +1030,13 @@
       </p:sp>
       <p:sp>
         <p:nvSpPr>
-          <p:cNvPr id="14" name="Shape 9"/>
-          <p:cNvSpPr/>
-          <p:nvPr/>
-        </p:nvSpPr>
-        <p:spPr>
-          <a:xfrm>
-            <a:off x="566928" y="3493008"/>
+          <p:cNvPr id="11" name="Shape 7"/>
+          <p:cNvSpPr/>
+          <p:nvPr/>
+        </p:nvSpPr>
+        <p:spPr>
+          <a:xfrm>
+            <a:off x="566928" y="3127248"/>
             <a:ext cx="274320" cy="274320"/>
           </a:xfrm>
           <a:prstGeom prst="ellipse">
@@ -1472,23 +1047,120 @@
           </a:solidFill>
           <a:ln/>
         </p:spPr>
+        <p:txBody>
+          <a:bodyPr/>
+          <a:lstStyle/>
+          <a:p>
+            <a:endParaRPr lang="en-US"/>
+          </a:p>
+        </p:txBody>
       </p:sp>
       <p:pic>
         <p:nvPicPr>
-          <p:cNvPr id="15" name="Image 3" descr="preencoded.png">    </p:cNvPr>
+          <p:cNvPr id="12" name="Image 2" descr="preencoded.png"/>
           <p:cNvPicPr>
             <a:picLocks noChangeAspect="1"/>
           </p:cNvPicPr>
           <p:nvPr/>
         </p:nvPicPr>
         <p:blipFill>
-          <a:blip r:embed="rId4"/>
+          <a:blip r:embed="rId3"/>
           <a:stretch>
             <a:fillRect/>
           </a:stretch>
         </p:blipFill>
         <p:spPr>
           <a:xfrm>
+            <a:off x="638251" y="3198571"/>
+            <a:ext cx="131674" cy="131674"/>
+          </a:xfrm>
+          <a:prstGeom prst="rect">
+            <a:avLst/>
+          </a:prstGeom>
+        </p:spPr>
+      </p:pic>
+      <p:sp>
+        <p:nvSpPr>
+          <p:cNvPr id="13" name="Text 8"/>
+          <p:cNvSpPr/>
+          <p:nvPr/>
+        </p:nvSpPr>
+        <p:spPr>
+          <a:xfrm>
+            <a:off x="960120" y="3108960"/>
+            <a:ext cx="7406640" cy="310896"/>
+          </a:xfrm>
+          <a:prstGeom prst="rect">
+            <a:avLst/>
+          </a:prstGeom>
+          <a:noFill/>
+          <a:ln/>
+        </p:spPr>
+        <p:txBody>
+          <a:bodyPr wrap="square" lIns="0" tIns="0" rIns="0" bIns="0" rtlCol="0" anchor="ctr"/>
+          <a:lstStyle/>
+          <a:p>
+            <a:pPr marL="0" indent="0">
+              <a:buNone/>
+            </a:pPr>
+            <a:r>
+              <a:rPr lang="en-US" sz="1450" dirty="0">
+                <a:solidFill>
+                  <a:srgbClr val="141413"/>
+                </a:solidFill>
+                <a:latin typeface="Inter" pitchFamily="34" charset="0"/>
+                <a:ea typeface="Inter" pitchFamily="34" charset="-122"/>
+                <a:cs typeface="Inter" pitchFamily="34" charset="-120"/>
+              </a:rPr>
+              <a:t>Query open issues and pull requests</a:t>
+            </a:r>
+            <a:endParaRPr lang="en-US" sz="1450" dirty="0"/>
+          </a:p>
+        </p:txBody>
+      </p:sp>
+      <p:sp>
+        <p:nvSpPr>
+          <p:cNvPr id="14" name="Shape 9"/>
+          <p:cNvSpPr/>
+          <p:nvPr/>
+        </p:nvSpPr>
+        <p:spPr>
+          <a:xfrm>
+            <a:off x="566928" y="3493008"/>
+            <a:ext cx="274320" cy="274320"/>
+          </a:xfrm>
+          <a:prstGeom prst="ellipse">
+            <a:avLst/>
+          </a:prstGeom>
+          <a:solidFill>
+            <a:srgbClr val="C0392B"/>
+          </a:solidFill>
+          <a:ln/>
+        </p:spPr>
+        <p:txBody>
+          <a:bodyPr/>
+          <a:lstStyle/>
+          <a:p>
+            <a:endParaRPr lang="en-US"/>
+          </a:p>
+        </p:txBody>
+      </p:sp>
+      <p:pic>
+        <p:nvPicPr>
+          <p:cNvPr id="15" name="Image 3" descr="preencoded.png"/>
+          <p:cNvPicPr>
+            <a:picLocks noChangeAspect="1"/>
+          </p:cNvPicPr>
+          <p:nvPr/>
+        </p:nvPicPr>
+        <p:blipFill>
+          <a:blip r:embed="rId3"/>
+          <a:stretch>
+            <a:fillRect/>
+          </a:stretch>
+        </p:blipFill>
+        <p:spPr>
+          <a:xfrm>
             <a:off x="638251" y="3564331"/>
             <a:ext cx="131674" cy="131674"/>
           </a:xfrm>
@@ -1518,7 +1190,7 @@
           <a:bodyPr wrap="square" lIns="0" tIns="0" rIns="0" bIns="0" rtlCol="0" anchor="ctr"/>
           <a:lstStyle/>
           <a:p>
-            <a:pPr indent="0" marL="0">
+            <a:pPr marL="0" indent="0">
               <a:buNone/>
             </a:pPr>
             <a:r>
@@ -1557,6 +1229,13 @@
           </a:solidFill>
           <a:ln/>
         </p:spPr>
+        <p:txBody>
+          <a:bodyPr/>
+          <a:lstStyle/>
+          <a:p>
+            <a:endParaRPr lang="en-US"/>
+          </a:p>
+        </p:txBody>
       </p:sp>
       <p:sp>
         <p:nvSpPr>
@@ -1579,7 +1258,7 @@
           <a:bodyPr wrap="square" lIns="0" tIns="0" rIns="0" bIns="0" rtlCol="0" anchor="ctr"/>
           <a:lstStyle/>
           <a:p>
-            <a:pPr indent="0" marL="0">
+            <a:pPr marL="0" indent="0">
               <a:buNone/>
             </a:pPr>
             <a:r>
@@ -1593,9 +1272,6 @@
               </a:rPr>
               <a:t>High-risk &amp; internet-dependent  </a:t>
             </a:r>
-            <a:pPr indent="0" marL="0">
-              <a:buNone/>
-            </a:pPr>
             <a:r>
               <a:rPr lang="en-US" sz="1250" dirty="0">
                 <a:solidFill>
@@ -1632,7 +1308,7 @@
           <a:bodyPr wrap="square" rtlCol="0" anchor="ctr"/>
           <a:lstStyle/>
           <a:p>
-            <a:pPr indent="0" marL="0">
+            <a:pPr marL="0" indent="0">
               <a:buNone/>
             </a:pPr>
             <a:r>
@@ -1671,7 +1347,7 @@
           <a:bodyPr wrap="square" rtlCol="0" anchor="ctr"/>
           <a:lstStyle/>
           <a:p>
-            <a:pPr algn="r" indent="0" marL="0">
+            <a:pPr marL="0" indent="0" algn="r">
               <a:buNone/>
             </a:pPr>
             <a:r>
@@ -1686,45 +1362,6 @@
               <a:t>Section 3  ·  10/12</a:t>
             </a:r>
             <a:endParaRPr lang="en-US" sz="900" dirty="0"/>
-          </a:p>
-        </p:txBody>
-      </p:sp>
-      <p:sp>
-        <p:nvSpPr>
-          <p:cNvPr id="21" name="Text 15"/>
-          <p:cNvSpPr/>
-          <p:nvPr/>
-        </p:nvSpPr>
-        <p:spPr>
-          <a:xfrm>
-            <a:off x="548640" y="4462272"/>
-            <a:ext cx="8046720" cy="274320"/>
-          </a:xfrm>
-          <a:prstGeom prst="rect">
-            <a:avLst/>
-          </a:prstGeom>
-          <a:noFill/>
-          <a:ln/>
-        </p:spPr>
-        <p:txBody>
-          <a:bodyPr wrap="square" lIns="0" tIns="0" rIns="0" bIns="0" rtlCol="0" anchor="ctr"/>
-          <a:lstStyle/>
-          <a:p>
-            <a:pPr indent="0" marL="0">
-              <a:buNone/>
-            </a:pPr>
-            <a:r>
-              <a:rPr lang="en-US" sz="1000" i="1" dirty="0">
-                <a:solidFill>
-                  <a:srgbClr val="615C52"/>
-                </a:solidFill>
-                <a:latin typeface="Inter" pitchFamily="34" charset="0"/>
-                <a:ea typeface="Inter" pitchFamily="34" charset="-122"/>
-                <a:cs typeface="Inter" pitchFamily="34" charset="-120"/>
-              </a:rPr>
-              <a:t>▸ Test the network first; if it's flaky, switch to the recording without missing a beat.</a:t>
-            </a:r>
-            <a:endParaRPr lang="en-US" sz="1000" dirty="0"/>
           </a:p>
         </p:txBody>
       </p:sp>
@@ -1744,6 +1381,7 @@
         <a:solidFill>
           <a:srgbClr val="F0EEE6"/>
         </a:solidFill>
+        <a:effectLst/>
       </p:bgPr>
     </p:bg>
     <p:spTree>
@@ -1781,11 +1419,11 @@
           <a:bodyPr wrap="square" lIns="0" tIns="0" rIns="0" bIns="0" rtlCol="0" anchor="ctr"/>
           <a:lstStyle/>
           <a:p>
-            <a:pPr indent="0" marL="0">
-              <a:buNone/>
-            </a:pPr>
-            <a:r>
-              <a:rPr lang="en-US" sz="1100" b="1" spc="200" kern="0" dirty="0">
+            <a:pPr marL="0" indent="0">
+              <a:buNone/>
+            </a:pPr>
+            <a:r>
+              <a:rPr lang="en-US" sz="1100" b="1" kern="0" spc="200" dirty="0">
                 <a:solidFill>
                   <a:srgbClr val="D97757"/>
                 </a:solidFill>
@@ -1820,7 +1458,7 @@
           <a:bodyPr wrap="square" lIns="0" tIns="0" rIns="0" bIns="0" rtlCol="0" anchor="ctr"/>
           <a:lstStyle/>
           <a:p>
-            <a:pPr indent="0" marL="0">
+            <a:pPr marL="0" indent="0">
               <a:buNone/>
             </a:pPr>
             <a:r>
@@ -1840,14 +1478,14 @@
       </p:sp>
       <p:pic>
         <p:nvPicPr>
-          <p:cNvPr id="4" name="Image 0" descr="preencoded.png">    </p:cNvPr>
+          <p:cNvPr id="4" name="Image 0" descr="preencoded.png"/>
           <p:cNvPicPr>
             <a:picLocks noChangeAspect="1"/>
           </p:cNvPicPr>
           <p:nvPr/>
         </p:nvPicPr>
         <p:blipFill>
-          <a:blip r:embed="rId1"/>
+          <a:blip r:embed="rId2"/>
           <a:stretch>
             <a:fillRect/>
           </a:stretch>
@@ -1888,13 +1526,20 @@
             <a:prstDash val="solid"/>
           </a:ln>
           <a:effectLst>
-            <a:outerShdw sx="100000" sy="100000" kx="0" ky="0" algn="bl" rotWithShape="0" blurRad="88900" dist="38100" dir="5400000">
+            <a:outerShdw blurRad="88900" dist="38100" dir="5400000" algn="bl" rotWithShape="0">
               <a:srgbClr val="000000">
                 <a:alpha val="10000"/>
               </a:srgbClr>
             </a:outerShdw>
           </a:effectLst>
         </p:spPr>
+        <p:txBody>
+          <a:bodyPr/>
+          <a:lstStyle/>
+          <a:p>
+            <a:endParaRPr lang="en-US"/>
+          </a:p>
+        </p:txBody>
       </p:sp>
       <p:sp>
         <p:nvSpPr>
@@ -1915,17 +1560,24 @@
           </a:solidFill>
           <a:ln/>
         </p:spPr>
+        <p:txBody>
+          <a:bodyPr/>
+          <a:lstStyle/>
+          <a:p>
+            <a:endParaRPr lang="en-US"/>
+          </a:p>
+        </p:txBody>
       </p:sp>
       <p:pic>
         <p:nvPicPr>
-          <p:cNvPr id="7" name="Image 1" descr="preencoded.png">    </p:cNvPr>
+          <p:cNvPr id="7" name="Image 1" descr="preencoded.png"/>
           <p:cNvPicPr>
             <a:picLocks noChangeAspect="1"/>
           </p:cNvPicPr>
           <p:nvPr/>
         </p:nvPicPr>
         <p:blipFill>
-          <a:blip r:embed="rId2"/>
+          <a:blip r:embed="rId3"/>
           <a:stretch>
             <a:fillRect/>
           </a:stretch>
@@ -1961,7 +1613,7 @@
           <a:bodyPr wrap="square" lIns="0" tIns="0" rIns="0" bIns="0" rtlCol="0" anchor="ctr"/>
           <a:lstStyle/>
           <a:p>
-            <a:pPr indent="0" marL="0">
+            <a:pPr marL="0" indent="0">
               <a:buNone/>
             </a:pPr>
             <a:r>
@@ -2000,7 +1652,7 @@
           <a:bodyPr wrap="square" lIns="0" tIns="0" rIns="0" bIns="0" rtlCol="0" anchor="ctr"/>
           <a:lstStyle/>
           <a:p>
-            <a:pPr indent="0" marL="0">
+            <a:pPr marL="0" indent="0">
               <a:buNone/>
             </a:pPr>
             <a:r>
@@ -2039,7 +1691,7 @@
           <a:bodyPr wrap="square" lIns="0" tIns="0" rIns="0" bIns="0" rtlCol="0" anchor="ctr"/>
           <a:lstStyle/>
           <a:p>
-            <a:pPr indent="0" marL="0">
+            <a:pPr marL="0" indent="0">
               <a:buNone/>
             </a:pPr>
             <a:r>
@@ -2083,13 +1735,20 @@
             <a:prstDash val="solid"/>
           </a:ln>
           <a:effectLst>
-            <a:outerShdw sx="100000" sy="100000" kx="0" ky="0" algn="bl" rotWithShape="0" blurRad="88900" dist="38100" dir="5400000">
+            <a:outerShdw blurRad="88900" dist="38100" dir="5400000" algn="bl" rotWithShape="0">
               <a:srgbClr val="000000">
                 <a:alpha val="10000"/>
               </a:srgbClr>
             </a:outerShdw>
           </a:effectLst>
         </p:spPr>
+        <p:txBody>
+          <a:bodyPr/>
+          <a:lstStyle/>
+          <a:p>
+            <a:endParaRPr lang="en-US"/>
+          </a:p>
+        </p:txBody>
       </p:sp>
       <p:sp>
         <p:nvSpPr>
@@ -2110,17 +1769,24 @@
           </a:solidFill>
           <a:ln/>
         </p:spPr>
+        <p:txBody>
+          <a:bodyPr/>
+          <a:lstStyle/>
+          <a:p>
+            <a:endParaRPr lang="en-US"/>
+          </a:p>
+        </p:txBody>
       </p:sp>
       <p:pic>
         <p:nvPicPr>
-          <p:cNvPr id="13" name="Image 2" descr="preencoded.png">    </p:cNvPr>
+          <p:cNvPr id="13" name="Image 2" descr="preencoded.png"/>
           <p:cNvPicPr>
             <a:picLocks noChangeAspect="1"/>
           </p:cNvPicPr>
           <p:nvPr/>
         </p:nvPicPr>
         <p:blipFill>
-          <a:blip r:embed="rId3"/>
+          <a:blip r:embed="rId4"/>
           <a:stretch>
             <a:fillRect/>
           </a:stretch>
@@ -2156,7 +1822,7 @@
           <a:bodyPr wrap="square" lIns="0" tIns="0" rIns="0" bIns="0" rtlCol="0" anchor="ctr"/>
           <a:lstStyle/>
           <a:p>
-            <a:pPr indent="0" marL="0">
+            <a:pPr marL="0" indent="0">
               <a:buNone/>
             </a:pPr>
             <a:r>
@@ -2195,7 +1861,7 @@
           <a:bodyPr wrap="square" lIns="0" tIns="0" rIns="0" bIns="0" rtlCol="0" anchor="ctr"/>
           <a:lstStyle/>
           <a:p>
-            <a:pPr indent="0" marL="0">
+            <a:pPr marL="0" indent="0">
               <a:buNone/>
             </a:pPr>
             <a:r>
@@ -2234,7 +1900,7 @@
           <a:bodyPr wrap="square" lIns="0" tIns="0" rIns="0" bIns="0" rtlCol="0" anchor="ctr"/>
           <a:lstStyle/>
           <a:p>
-            <a:pPr indent="0" marL="0">
+            <a:pPr marL="0" indent="0">
               <a:buNone/>
             </a:pPr>
             <a:r>
@@ -2273,6 +1939,13 @@
           </a:solidFill>
           <a:ln/>
         </p:spPr>
+        <p:txBody>
+          <a:bodyPr/>
+          <a:lstStyle/>
+          <a:p>
+            <a:endParaRPr lang="en-US"/>
+          </a:p>
+        </p:txBody>
       </p:sp>
       <p:sp>
         <p:nvSpPr>
@@ -2295,7 +1968,7 @@
           <a:bodyPr wrap="square" lIns="0" tIns="0" rIns="0" bIns="0" rtlCol="0" anchor="ctr"/>
           <a:lstStyle/>
           <a:p>
-            <a:pPr indent="0" marL="0">
+            <a:pPr marL="0" indent="0">
               <a:buNone/>
             </a:pPr>
             <a:r>
@@ -2309,9 +1982,6 @@
               </a:rPr>
               <a:t>Pattern:  </a:t>
             </a:r>
-            <a:pPr indent="0" marL="0">
-              <a:buNone/>
-            </a:pPr>
             <a:r>
               <a:rPr lang="en-US" sz="1350" dirty="0">
                 <a:solidFill>
@@ -2348,7 +2018,7 @@
           <a:bodyPr wrap="square" rtlCol="0" anchor="ctr"/>
           <a:lstStyle/>
           <a:p>
-            <a:pPr indent="0" marL="0">
+            <a:pPr marL="0" indent="0">
               <a:buNone/>
             </a:pPr>
             <a:r>
@@ -2387,7 +2057,7 @@
           <a:bodyPr wrap="square" rtlCol="0" anchor="ctr"/>
           <a:lstStyle/>
           <a:p>
-            <a:pPr algn="r" indent="0" marL="0">
+            <a:pPr marL="0" indent="0" algn="r">
               <a:buNone/>
             </a:pPr>
             <a:r>
@@ -2402,45 +2072,6 @@
               <a:t>Section 3  ·  11/12</a:t>
             </a:r>
             <a:endParaRPr lang="en-US" sz="900" dirty="0"/>
-          </a:p>
-        </p:txBody>
-      </p:sp>
-      <p:sp>
-        <p:nvSpPr>
-          <p:cNvPr id="21" name="Text 16"/>
-          <p:cNvSpPr/>
-          <p:nvPr/>
-        </p:nvSpPr>
-        <p:spPr>
-          <a:xfrm>
-            <a:off x="548640" y="4462272"/>
-            <a:ext cx="8046720" cy="274320"/>
-          </a:xfrm>
-          <a:prstGeom prst="rect">
-            <a:avLst/>
-          </a:prstGeom>
-          <a:noFill/>
-          <a:ln/>
-        </p:spPr>
-        <p:txBody>
-          <a:bodyPr wrap="square" lIns="0" tIns="0" rIns="0" bIns="0" rtlCol="0" anchor="ctr"/>
-          <a:lstStyle/>
-          <a:p>
-            <a:pPr indent="0" marL="0">
-              <a:buNone/>
-            </a:pPr>
-            <a:r>
-              <a:rPr lang="en-US" sz="1000" i="1" dirty="0">
-                <a:solidFill>
-                  <a:srgbClr val="615C52"/>
-                </a:solidFill>
-                <a:latin typeface="Inter" pitchFamily="34" charset="0"/>
-                <a:ea typeface="Inter" pitchFamily="34" charset="-122"/>
-                <a:cs typeface="Inter" pitchFamily="34" charset="-120"/>
-              </a:rPr>
-              <a:t>▸ Callback to Section 2: pair an MCP server with a skill that documents its use.</a:t>
-            </a:r>
-            <a:endParaRPr lang="en-US" sz="1000" dirty="0"/>
           </a:p>
         </p:txBody>
       </p:sp>
@@ -2460,6 +2091,7 @@
         <a:solidFill>
           <a:srgbClr val="F0EEE6"/>
         </a:solidFill>
+        <a:effectLst/>
       </p:bgPr>
     </p:bg>
     <p:spTree>
@@ -2478,60 +2110,7 @@
       </p:grpSpPr>
       <p:pic>
         <p:nvPicPr>
-          <p:cNvPr id="2" name="Image 0" descr="preencoded.png">    </p:cNvPr>
-          <p:cNvPicPr>
-            <a:picLocks noChangeAspect="1"/>
-          </p:cNvPicPr>
-          <p:nvPr/>
-        </p:nvPicPr>
-        <p:blipFill>
-          <a:blip r:embed="rId1"/>
-          <a:stretch>
-            <a:fillRect/>
-          </a:stretch>
-        </p:blipFill>
-        <p:spPr>
-          <a:xfrm>
-            <a:off x="8339328" y="402336"/>
-            <a:ext cx="310896" cy="310896"/>
-          </a:xfrm>
-          <a:prstGeom prst="rect">
-            <a:avLst/>
-          </a:prstGeom>
-        </p:spPr>
-      </p:pic>
-      <p:sp>
-        <p:nvSpPr>
-          <p:cNvPr id="3" name="Shape 0"/>
-          <p:cNvSpPr/>
-          <p:nvPr/>
-        </p:nvSpPr>
-        <p:spPr>
-          <a:xfrm>
-            <a:off x="548640" y="822960"/>
-            <a:ext cx="3154680" cy="3383280"/>
-          </a:xfrm>
-          <a:prstGeom prst="roundRect">
-            <a:avLst>
-              <a:gd name="adj" fmla="val 3478"/>
-            </a:avLst>
-          </a:prstGeom>
-          <a:solidFill>
-            <a:srgbClr val="D97757"/>
-          </a:solidFill>
-          <a:ln/>
-          <a:effectLst>
-            <a:outerShdw sx="100000" sy="100000" kx="0" ky="0" algn="bl" rotWithShape="0" blurRad="88900" dist="38100" dir="5400000">
-              <a:srgbClr val="000000">
-                <a:alpha val="10000"/>
-              </a:srgbClr>
-            </a:outerShdw>
-          </a:effectLst>
-        </p:spPr>
-      </p:sp>
-      <p:pic>
-        <p:nvPicPr>
-          <p:cNvPr id="4" name="Image 1" descr="preencoded.png">    </p:cNvPr>
+          <p:cNvPr id="2" name="Image 0" descr="preencoded.png"/>
           <p:cNvPicPr>
             <a:picLocks noChangeAspect="1"/>
           </p:cNvPicPr>
@@ -2545,6 +2124,66 @@
         </p:blipFill>
         <p:spPr>
           <a:xfrm>
+            <a:off x="8339328" y="402336"/>
+            <a:ext cx="310896" cy="310896"/>
+          </a:xfrm>
+          <a:prstGeom prst="rect">
+            <a:avLst/>
+          </a:prstGeom>
+        </p:spPr>
+      </p:pic>
+      <p:sp>
+        <p:nvSpPr>
+          <p:cNvPr id="3" name="Shape 0"/>
+          <p:cNvSpPr/>
+          <p:nvPr/>
+        </p:nvSpPr>
+        <p:spPr>
+          <a:xfrm>
+            <a:off x="548640" y="822960"/>
+            <a:ext cx="3154680" cy="3383280"/>
+          </a:xfrm>
+          <a:prstGeom prst="roundRect">
+            <a:avLst>
+              <a:gd name="adj" fmla="val 3478"/>
+            </a:avLst>
+          </a:prstGeom>
+          <a:solidFill>
+            <a:srgbClr val="D97757"/>
+          </a:solidFill>
+          <a:ln/>
+          <a:effectLst>
+            <a:outerShdw blurRad="88900" dist="38100" dir="5400000" algn="bl" rotWithShape="0">
+              <a:srgbClr val="000000">
+                <a:alpha val="10000"/>
+              </a:srgbClr>
+            </a:outerShdw>
+          </a:effectLst>
+        </p:spPr>
+        <p:txBody>
+          <a:bodyPr/>
+          <a:lstStyle/>
+          <a:p>
+            <a:endParaRPr lang="en-US"/>
+          </a:p>
+        </p:txBody>
+      </p:sp>
+      <p:pic>
+        <p:nvPicPr>
+          <p:cNvPr id="4" name="Image 1" descr="preencoded.png"/>
+          <p:cNvPicPr>
+            <a:picLocks noChangeAspect="1"/>
+          </p:cNvPicPr>
+          <p:nvPr/>
+        </p:nvPicPr>
+        <p:blipFill>
+          <a:blip r:embed="rId3"/>
+          <a:stretch>
+            <a:fillRect/>
+          </a:stretch>
+        </p:blipFill>
+        <p:spPr>
+          <a:xfrm>
             <a:off x="868680" y="1152144"/>
             <a:ext cx="548640" cy="548640"/>
           </a:xfrm>
@@ -2574,7 +2213,7 @@
           <a:bodyPr wrap="square" lIns="0" tIns="0" rIns="0" bIns="0" rtlCol="0" anchor="ctr"/>
           <a:lstStyle/>
           <a:p>
-            <a:pPr indent="0" marL="0">
+            <a:pPr marL="0" indent="0">
               <a:buNone/>
             </a:pPr>
             <a:r>
@@ -2613,7 +2252,7 @@
           <a:bodyPr wrap="square" lIns="0" tIns="0" rIns="0" bIns="0" rtlCol="0" anchor="ctr"/>
           <a:lstStyle/>
           <a:p>
-            <a:pPr indent="0" marL="0">
+            <a:pPr marL="0" indent="0">
               <a:buNone/>
             </a:pPr>
             <a:r>
@@ -2653,6 +2292,13 @@
             <a:prstDash val="solid"/>
           </a:ln>
         </p:spPr>
+        <p:txBody>
+          <a:bodyPr/>
+          <a:lstStyle/>
+          <a:p>
+            <a:endParaRPr lang="en-US"/>
+          </a:p>
+        </p:txBody>
       </p:sp>
       <p:sp>
         <p:nvSpPr>
@@ -2675,11 +2321,11 @@
           <a:bodyPr wrap="square" lIns="0" tIns="0" rIns="0" bIns="0" rtlCol="0" anchor="ctr"/>
           <a:lstStyle/>
           <a:p>
-            <a:pPr indent="0" marL="0">
-              <a:buNone/>
-            </a:pPr>
-            <a:r>
-              <a:rPr lang="en-US" sz="1100" b="1" spc="100" kern="0" dirty="0">
+            <a:pPr marL="0" indent="0">
+              <a:buNone/>
+            </a:pPr>
+            <a:r>
+              <a:rPr lang="en-US" sz="1100" b="1" kern="0" spc="100" dirty="0">
                 <a:solidFill>
                   <a:srgbClr val="FBE9E2"/>
                 </a:solidFill>
@@ -2714,7 +2360,7 @@
           <a:bodyPr wrap="square" lIns="0" tIns="0" rIns="0" bIns="0" rtlCol="0" anchor="ctr"/>
           <a:lstStyle/>
           <a:p>
-            <a:pPr indent="0" marL="0">
+            <a:pPr marL="0" indent="0">
               <a:buNone/>
             </a:pPr>
             <a:r>
@@ -2753,11 +2399,11 @@
           <a:bodyPr wrap="square" lIns="0" tIns="0" rIns="0" bIns="0" rtlCol="0" anchor="ctr"/>
           <a:lstStyle/>
           <a:p>
-            <a:pPr indent="0" marL="0">
-              <a:buNone/>
-            </a:pPr>
-            <a:r>
-              <a:rPr lang="en-US" sz="1100" b="1" spc="200" kern="0" dirty="0">
+            <a:pPr marL="0" indent="0">
+              <a:buNone/>
+            </a:pPr>
+            <a:r>
+              <a:rPr lang="en-US" sz="1100" b="1" kern="0" spc="200" dirty="0">
                 <a:solidFill>
                   <a:srgbClr val="D97757"/>
                 </a:solidFill>
@@ -2790,6 +2436,13 @@
           </a:solidFill>
           <a:ln/>
         </p:spPr>
+        <p:txBody>
+          <a:bodyPr/>
+          <a:lstStyle/>
+          <a:p>
+            <a:endParaRPr lang="en-US"/>
+          </a:p>
+        </p:txBody>
       </p:sp>
       <p:sp>
         <p:nvSpPr>
@@ -2812,7 +2465,7 @@
           <a:bodyPr wrap="square" lIns="0" tIns="0" rIns="0" bIns="0" rtlCol="0" anchor="ctr"/>
           <a:lstStyle/>
           <a:p>
-            <a:pPr algn="ctr" indent="0" marL="0">
+            <a:pPr marL="0" indent="0" algn="ctr">
               <a:buNone/>
             </a:pPr>
             <a:r>
@@ -2851,7 +2504,7 @@
           <a:bodyPr wrap="square" lIns="0" tIns="0" rIns="0" bIns="0" rtlCol="0" anchor="ctr"/>
           <a:lstStyle/>
           <a:p>
-            <a:pPr indent="0" marL="0">
+            <a:pPr marL="0" indent="0">
               <a:buNone/>
             </a:pPr>
             <a:r>
@@ -2888,6 +2541,13 @@
           </a:solidFill>
           <a:ln/>
         </p:spPr>
+        <p:txBody>
+          <a:bodyPr/>
+          <a:lstStyle/>
+          <a:p>
+            <a:endParaRPr lang="en-US"/>
+          </a:p>
+        </p:txBody>
       </p:sp>
       <p:sp>
         <p:nvSpPr>
@@ -2910,7 +2570,7 @@
           <a:bodyPr wrap="square" lIns="0" tIns="0" rIns="0" bIns="0" rtlCol="0" anchor="ctr"/>
           <a:lstStyle/>
           <a:p>
-            <a:pPr algn="ctr" indent="0" marL="0">
+            <a:pPr marL="0" indent="0" algn="ctr">
               <a:buNone/>
             </a:pPr>
             <a:r>
@@ -2949,7 +2609,7 @@
           <a:bodyPr wrap="square" lIns="0" tIns="0" rIns="0" bIns="0" rtlCol="0" anchor="ctr"/>
           <a:lstStyle/>
           <a:p>
-            <a:pPr indent="0" marL="0">
+            <a:pPr marL="0" indent="0">
               <a:buNone/>
             </a:pPr>
             <a:r>
@@ -2986,6 +2646,13 @@
           </a:solidFill>
           <a:ln/>
         </p:spPr>
+        <p:txBody>
+          <a:bodyPr/>
+          <a:lstStyle/>
+          <a:p>
+            <a:endParaRPr lang="en-US"/>
+          </a:p>
+        </p:txBody>
       </p:sp>
       <p:sp>
         <p:nvSpPr>
@@ -3008,7 +2675,7 @@
           <a:bodyPr wrap="square" lIns="0" tIns="0" rIns="0" bIns="0" rtlCol="0" anchor="ctr"/>
           <a:lstStyle/>
           <a:p>
-            <a:pPr algn="ctr" indent="0" marL="0">
+            <a:pPr marL="0" indent="0" algn="ctr">
               <a:buNone/>
             </a:pPr>
             <a:r>
@@ -3047,7 +2714,7 @@
           <a:bodyPr wrap="square" lIns="0" tIns="0" rIns="0" bIns="0" rtlCol="0" anchor="ctr"/>
           <a:lstStyle/>
           <a:p>
-            <a:pPr indent="0" marL="0">
+            <a:pPr marL="0" indent="0">
               <a:buNone/>
             </a:pPr>
             <a:r>
@@ -3091,6 +2758,13 @@
             <a:prstDash val="solid"/>
           </a:ln>
         </p:spPr>
+        <p:txBody>
+          <a:bodyPr/>
+          <a:lstStyle/>
+          <a:p>
+            <a:endParaRPr lang="en-US"/>
+          </a:p>
+        </p:txBody>
       </p:sp>
       <p:sp>
         <p:nvSpPr>
@@ -3113,11 +2787,11 @@
           <a:bodyPr wrap="square" lIns="0" tIns="0" rIns="0" bIns="0" rtlCol="0" anchor="ctr"/>
           <a:lstStyle/>
           <a:p>
-            <a:pPr indent="0" marL="0">
-              <a:buNone/>
-            </a:pPr>
-            <a:r>
-              <a:rPr lang="en-US" sz="1050" b="1" spc="100" kern="0" dirty="0">
+            <a:pPr marL="0" indent="0">
+              <a:buNone/>
+            </a:pPr>
+            <a:r>
+              <a:rPr lang="en-US" sz="1050" b="1" kern="0" spc="100" dirty="0">
                 <a:solidFill>
                   <a:srgbClr val="615C52"/>
                 </a:solidFill>
@@ -3133,70 +2807,7 @@
       </p:sp>
       <p:pic>
         <p:nvPicPr>
-          <p:cNvPr id="22" name="Image 2" descr="preencoded.png">    </p:cNvPr>
-          <p:cNvPicPr>
-            <a:picLocks noChangeAspect="1"/>
-          </p:cNvPicPr>
-          <p:nvPr/>
-        </p:nvPicPr>
-        <p:blipFill>
-          <a:blip r:embed="rId3"/>
-          <a:stretch>
-            <a:fillRect/>
-          </a:stretch>
-        </p:blipFill>
-        <p:spPr>
-          <a:xfrm>
-            <a:off x="4297680" y="2935224"/>
-            <a:ext cx="182880" cy="182880"/>
-          </a:xfrm>
-          <a:prstGeom prst="rect">
-            <a:avLst/>
-          </a:prstGeom>
-        </p:spPr>
-      </p:pic>
-      <p:sp>
-        <p:nvSpPr>
-          <p:cNvPr id="23" name="Text 18"/>
-          <p:cNvSpPr/>
-          <p:nvPr/>
-        </p:nvSpPr>
-        <p:spPr>
-          <a:xfrm>
-            <a:off x="4572000" y="2889504"/>
-            <a:ext cx="3931920" cy="256032"/>
-          </a:xfrm>
-          <a:prstGeom prst="rect">
-            <a:avLst/>
-          </a:prstGeom>
-          <a:noFill/>
-          <a:ln/>
-        </p:spPr>
-        <p:txBody>
-          <a:bodyPr wrap="square" lIns="0" tIns="0" rIns="0" bIns="0" rtlCol="0" anchor="ctr"/>
-          <a:lstStyle/>
-          <a:p>
-            <a:pPr indent="0" marL="0">
-              <a:buNone/>
-            </a:pPr>
-            <a:r>
-              <a:rPr lang="en-US" sz="1250" dirty="0">
-                <a:solidFill>
-                  <a:srgbClr val="141413"/>
-                </a:solidFill>
-                <a:latin typeface="Inter" pitchFamily="34" charset="0"/>
-                <a:ea typeface="Inter" pitchFamily="34" charset="-122"/>
-                <a:cs typeface="Inter" pitchFamily="34" charset="-120"/>
-              </a:rPr>
-              <a:t>IDE integration working with diffs</a:t>
-            </a:r>
-            <a:endParaRPr lang="en-US" sz="1250" dirty="0"/>
-          </a:p>
-        </p:txBody>
-      </p:sp>
-      <p:pic>
-        <p:nvPicPr>
-          <p:cNvPr id="24" name="Image 3" descr="preencoded.png">    </p:cNvPr>
+          <p:cNvPr id="22" name="Image 2" descr="preencoded.png"/>
           <p:cNvPicPr>
             <a:picLocks noChangeAspect="1"/>
           </p:cNvPicPr>
@@ -3210,7 +2821,7 @@
         </p:blipFill>
         <p:spPr>
           <a:xfrm>
-            <a:off x="4297680" y="3200400"/>
+            <a:off x="4297680" y="2935224"/>
             <a:ext cx="182880" cy="182880"/>
           </a:xfrm>
           <a:prstGeom prst="rect">
@@ -3220,13 +2831,13 @@
       </p:pic>
       <p:sp>
         <p:nvSpPr>
-          <p:cNvPr id="25" name="Text 19"/>
-          <p:cNvSpPr/>
-          <p:nvPr/>
-        </p:nvSpPr>
-        <p:spPr>
-          <a:xfrm>
-            <a:off x="4572000" y="3154680"/>
+          <p:cNvPr id="23" name="Text 18"/>
+          <p:cNvSpPr/>
+          <p:nvPr/>
+        </p:nvSpPr>
+        <p:spPr>
+          <a:xfrm>
+            <a:off x="4572000" y="2889504"/>
             <a:ext cx="3931920" cy="256032"/>
           </a:xfrm>
           <a:prstGeom prst="rect">
@@ -3239,7 +2850,7 @@
           <a:bodyPr wrap="square" lIns="0" tIns="0" rIns="0" bIns="0" rtlCol="0" anchor="ctr"/>
           <a:lstStyle/>
           <a:p>
-            <a:pPr indent="0" marL="0">
+            <a:pPr marL="0" indent="0">
               <a:buNone/>
             </a:pPr>
             <a:r>
@@ -3251,7 +2862,7 @@
                 <a:ea typeface="Inter" pitchFamily="34" charset="-122"/>
                 <a:cs typeface="Inter" pitchFamily="34" charset="-120"/>
               </a:rPr>
-              <a:t>GitHub MCP server connected</a:t>
+              <a:t>IDE integration working with diffs</a:t>
             </a:r>
             <a:endParaRPr lang="en-US" sz="1250" dirty="0"/>
           </a:p>
@@ -3259,20 +2870,83 @@
       </p:sp>
       <p:pic>
         <p:nvPicPr>
-          <p:cNvPr id="26" name="Image 4" descr="preencoded.png">    </p:cNvPr>
+          <p:cNvPr id="24" name="Image 3" descr="preencoded.png"/>
           <p:cNvPicPr>
             <a:picLocks noChangeAspect="1"/>
           </p:cNvPicPr>
           <p:nvPr/>
         </p:nvPicPr>
         <p:blipFill>
-          <a:blip r:embed="rId5"/>
+          <a:blip r:embed="rId4"/>
           <a:stretch>
             <a:fillRect/>
           </a:stretch>
         </p:blipFill>
         <p:spPr>
           <a:xfrm>
+            <a:off x="4297680" y="3200400"/>
+            <a:ext cx="182880" cy="182880"/>
+          </a:xfrm>
+          <a:prstGeom prst="rect">
+            <a:avLst/>
+          </a:prstGeom>
+        </p:spPr>
+      </p:pic>
+      <p:sp>
+        <p:nvSpPr>
+          <p:cNvPr id="25" name="Text 19"/>
+          <p:cNvSpPr/>
+          <p:nvPr/>
+        </p:nvSpPr>
+        <p:spPr>
+          <a:xfrm>
+            <a:off x="4572000" y="3154680"/>
+            <a:ext cx="3931920" cy="256032"/>
+          </a:xfrm>
+          <a:prstGeom prst="rect">
+            <a:avLst/>
+          </a:prstGeom>
+          <a:noFill/>
+          <a:ln/>
+        </p:spPr>
+        <p:txBody>
+          <a:bodyPr wrap="square" lIns="0" tIns="0" rIns="0" bIns="0" rtlCol="0" anchor="ctr"/>
+          <a:lstStyle/>
+          <a:p>
+            <a:pPr marL="0" indent="0">
+              <a:buNone/>
+            </a:pPr>
+            <a:r>
+              <a:rPr lang="en-US" sz="1250" dirty="0">
+                <a:solidFill>
+                  <a:srgbClr val="141413"/>
+                </a:solidFill>
+                <a:latin typeface="Inter" pitchFamily="34" charset="0"/>
+                <a:ea typeface="Inter" pitchFamily="34" charset="-122"/>
+                <a:cs typeface="Inter" pitchFamily="34" charset="-120"/>
+              </a:rPr>
+              <a:t>GitHub MCP server connected</a:t>
+            </a:r>
+            <a:endParaRPr lang="en-US" sz="1250" dirty="0"/>
+          </a:p>
+        </p:txBody>
+      </p:sp>
+      <p:pic>
+        <p:nvPicPr>
+          <p:cNvPr id="26" name="Image 4" descr="preencoded.png"/>
+          <p:cNvPicPr>
+            <a:picLocks noChangeAspect="1"/>
+          </p:cNvPicPr>
+          <p:nvPr/>
+        </p:nvPicPr>
+        <p:blipFill>
+          <a:blip r:embed="rId4"/>
+          <a:stretch>
+            <a:fillRect/>
+          </a:stretch>
+        </p:blipFill>
+        <p:spPr>
+          <a:xfrm>
             <a:off x="4297680" y="3465576"/>
             <a:ext cx="182880" cy="182880"/>
           </a:xfrm>
@@ -3302,7 +2976,7 @@
           <a:bodyPr wrap="square" lIns="0" tIns="0" rIns="0" bIns="0" rtlCol="0" anchor="ctr"/>
           <a:lstStyle/>
           <a:p>
-            <a:pPr indent="0" marL="0">
+            <a:pPr marL="0" indent="0">
               <a:buNone/>
             </a:pPr>
             <a:r>
@@ -3341,6 +3015,13 @@
           </a:solidFill>
           <a:ln/>
         </p:spPr>
+        <p:txBody>
+          <a:bodyPr/>
+          <a:lstStyle/>
+          <a:p>
+            <a:endParaRPr lang="en-US"/>
+          </a:p>
+        </p:txBody>
       </p:sp>
       <p:sp>
         <p:nvSpPr>
@@ -3363,7 +3044,7 @@
           <a:bodyPr wrap="square" lIns="0" tIns="0" rIns="0" bIns="0" rtlCol="0" anchor="ctr"/>
           <a:lstStyle/>
           <a:p>
-            <a:pPr indent="0" marL="0">
+            <a:pPr marL="0" indent="0">
               <a:buNone/>
             </a:pPr>
             <a:r>
@@ -3377,9 +3058,6 @@
               </a:rPr>
               <a:t>Offline? </a:t>
             </a:r>
-            <a:pPr indent="0" marL="0">
-              <a:buNone/>
-            </a:pPr>
             <a:r>
               <a:rPr lang="en-US" sz="1150" dirty="0">
                 <a:solidFill>
@@ -3416,7 +3094,7 @@
           <a:bodyPr wrap="square" rtlCol="0" anchor="ctr"/>
           <a:lstStyle/>
           <a:p>
-            <a:pPr indent="0" marL="0">
+            <a:pPr marL="0" indent="0">
               <a:buNone/>
             </a:pPr>
             <a:r>
@@ -3455,7 +3133,7 @@
           <a:bodyPr wrap="square" rtlCol="0" anchor="ctr"/>
           <a:lstStyle/>
           <a:p>
-            <a:pPr algn="r" indent="0" marL="0">
+            <a:pPr marL="0" indent="0" algn="r">
               <a:buNone/>
             </a:pPr>
             <a:r>
@@ -3470,45 +3148,6 @@
               <a:t>Section 3  ·  12/12</a:t>
             </a:r>
             <a:endParaRPr lang="en-US" sz="900" dirty="0"/>
-          </a:p>
-        </p:txBody>
-      </p:sp>
-      <p:sp>
-        <p:nvSpPr>
-          <p:cNvPr id="32" name="Text 25"/>
-          <p:cNvSpPr/>
-          <p:nvPr/>
-        </p:nvSpPr>
-        <p:spPr>
-          <a:xfrm>
-            <a:off x="548640" y="4462272"/>
-            <a:ext cx="8046720" cy="274320"/>
-          </a:xfrm>
-          <a:prstGeom prst="rect">
-            <a:avLst/>
-          </a:prstGeom>
-          <a:noFill/>
-          <a:ln/>
-        </p:spPr>
-        <p:txBody>
-          <a:bodyPr wrap="square" lIns="0" tIns="0" rIns="0" bIns="0" rtlCol="0" anchor="ctr"/>
-          <a:lstStyle/>
-          <a:p>
-            <a:pPr indent="0" marL="0">
-              <a:buNone/>
-            </a:pPr>
-            <a:r>
-              <a:rPr lang="en-US" sz="1000" i="1" dirty="0">
-                <a:solidFill>
-                  <a:srgbClr val="615C52"/>
-                </a:solidFill>
-                <a:latin typeface="Inter" pitchFamily="34" charset="0"/>
-                <a:ea typeface="Inter" pitchFamily="34" charset="-122"/>
-                <a:cs typeface="Inter" pitchFamily="34" charset="-120"/>
-              </a:rPr>
-              <a:t>▸ Done = an issue they created via MCP; offline teams use the fixture fallback.</a:t>
-            </a:r>
-            <a:endParaRPr lang="en-US" sz="1000" dirty="0"/>
           </a:p>
         </p:txBody>
       </p:sp>
@@ -3528,6 +3167,7 @@
         <a:solidFill>
           <a:srgbClr val="F0EEE6"/>
         </a:solidFill>
+        <a:effectLst/>
       </p:bgPr>
     </p:bg>
     <p:spTree>
@@ -3565,11 +3205,11 @@
           <a:bodyPr wrap="square" lIns="0" tIns="0" rIns="0" bIns="0" rtlCol="0" anchor="ctr"/>
           <a:lstStyle/>
           <a:p>
-            <a:pPr indent="0" marL="0">
-              <a:buNone/>
-            </a:pPr>
-            <a:r>
-              <a:rPr lang="en-US" sz="1100" b="1" spc="200" kern="0" dirty="0">
+            <a:pPr marL="0" indent="0">
+              <a:buNone/>
+            </a:pPr>
+            <a:r>
+              <a:rPr lang="en-US" sz="1100" b="1" kern="0" spc="200" dirty="0">
                 <a:solidFill>
                   <a:srgbClr val="D97757"/>
                 </a:solidFill>
@@ -3604,7 +3244,7 @@
           <a:bodyPr wrap="square" lIns="0" tIns="0" rIns="0" bIns="0" rtlCol="0" anchor="ctr"/>
           <a:lstStyle/>
           <a:p>
-            <a:pPr indent="0" marL="0">
+            <a:pPr marL="0" indent="0">
               <a:buNone/>
             </a:pPr>
             <a:r>
@@ -3624,51 +3264,7 @@
       </p:sp>
       <p:pic>
         <p:nvPicPr>
-          <p:cNvPr id="4" name="Image 0" descr="preencoded.png">    </p:cNvPr>
-          <p:cNvPicPr>
-            <a:picLocks noChangeAspect="1"/>
-          </p:cNvPicPr>
-          <p:nvPr/>
-        </p:nvPicPr>
-        <p:blipFill>
-          <a:blip r:embed="rId1"/>
-          <a:stretch>
-            <a:fillRect/>
-          </a:stretch>
-        </p:blipFill>
-        <p:spPr>
-          <a:xfrm>
-            <a:off x="8339328" y="402336"/>
-            <a:ext cx="310896" cy="310896"/>
-          </a:xfrm>
-          <a:prstGeom prst="rect">
-            <a:avLst/>
-          </a:prstGeom>
-        </p:spPr>
-      </p:pic>
-      <p:sp>
-        <p:nvSpPr>
-          <p:cNvPr id="5" name="Shape 2"/>
-          <p:cNvSpPr/>
-          <p:nvPr/>
-        </p:nvSpPr>
-        <p:spPr>
-          <a:xfrm>
-            <a:off x="566928" y="1389888"/>
-            <a:ext cx="310896" cy="310896"/>
-          </a:xfrm>
-          <a:prstGeom prst="ellipse">
-            <a:avLst/>
-          </a:prstGeom>
-          <a:solidFill>
-            <a:srgbClr val="D97757"/>
-          </a:solidFill>
-          <a:ln/>
-        </p:spPr>
-      </p:sp>
-      <p:pic>
-        <p:nvPicPr>
-          <p:cNvPr id="6" name="Image 1" descr="preencoded.png">    </p:cNvPr>
+          <p:cNvPr id="4" name="Image 0" descr="preencoded.png"/>
           <p:cNvPicPr>
             <a:picLocks noChangeAspect="1"/>
           </p:cNvPicPr>
@@ -3682,8 +3278,8 @@
         </p:blipFill>
         <p:spPr>
           <a:xfrm>
-            <a:off x="647761" y="1470721"/>
-            <a:ext cx="149230" cy="149230"/>
+            <a:off x="8339328" y="402336"/>
+            <a:ext cx="310896" cy="310896"/>
           </a:xfrm>
           <a:prstGeom prst="rect">
             <a:avLst/>
@@ -3692,52 +3288,13 @@
       </p:pic>
       <p:sp>
         <p:nvSpPr>
-          <p:cNvPr id="7" name="Text 3"/>
-          <p:cNvSpPr/>
-          <p:nvPr/>
-        </p:nvSpPr>
-        <p:spPr>
-          <a:xfrm>
-            <a:off x="1024128" y="1371600"/>
-            <a:ext cx="7406640" cy="411480"/>
-          </a:xfrm>
-          <a:prstGeom prst="rect">
-            <a:avLst/>
-          </a:prstGeom>
-          <a:noFill/>
-          <a:ln/>
-        </p:spPr>
-        <p:txBody>
-          <a:bodyPr wrap="square" lIns="0" tIns="0" rIns="0" bIns="0" rtlCol="0" anchor="ctr"/>
-          <a:lstStyle/>
-          <a:p>
-            <a:pPr indent="0" marL="0">
-              <a:buNone/>
-            </a:pPr>
-            <a:r>
-              <a:rPr lang="en-US" sz="1600" dirty="0">
-                <a:solidFill>
-                  <a:srgbClr val="141413"/>
-                </a:solidFill>
-                <a:latin typeface="Inter" pitchFamily="34" charset="0"/>
-                <a:ea typeface="Inter" pitchFamily="34" charset="-122"/>
-                <a:cs typeface="Inter" pitchFamily="34" charset="-120"/>
-              </a:rPr>
-              <a:t>Operate across terminal / VS Code / JetBrains</a:t>
-            </a:r>
-            <a:endParaRPr lang="en-US" sz="1600" dirty="0"/>
-          </a:p>
-        </p:txBody>
-      </p:sp>
-      <p:sp>
-        <p:nvSpPr>
-          <p:cNvPr id="8" name="Shape 4"/>
-          <p:cNvSpPr/>
-          <p:nvPr/>
-        </p:nvSpPr>
-        <p:spPr>
-          <a:xfrm>
-            <a:off x="566928" y="1801368"/>
+          <p:cNvPr id="5" name="Shape 2"/>
+          <p:cNvSpPr/>
+          <p:nvPr/>
+        </p:nvSpPr>
+        <p:spPr>
+          <a:xfrm>
+            <a:off x="566928" y="1389888"/>
             <a:ext cx="310896" cy="310896"/>
           </a:xfrm>
           <a:prstGeom prst="ellipse">
@@ -3748,10 +3305,17 @@
           </a:solidFill>
           <a:ln/>
         </p:spPr>
+        <p:txBody>
+          <a:bodyPr/>
+          <a:lstStyle/>
+          <a:p>
+            <a:endParaRPr lang="en-US"/>
+          </a:p>
+        </p:txBody>
       </p:sp>
       <p:pic>
         <p:nvPicPr>
-          <p:cNvPr id="9" name="Image 2" descr="preencoded.png">    </p:cNvPr>
+          <p:cNvPr id="6" name="Image 1" descr="preencoded.png"/>
           <p:cNvPicPr>
             <a:picLocks noChangeAspect="1"/>
           </p:cNvPicPr>
@@ -3765,7 +3329,7 @@
         </p:blipFill>
         <p:spPr>
           <a:xfrm>
-            <a:off x="647761" y="1882201"/>
+            <a:off x="647761" y="1470721"/>
             <a:ext cx="149230" cy="149230"/>
           </a:xfrm>
           <a:prstGeom prst="rect">
@@ -3775,13 +3339,13 @@
       </p:pic>
       <p:sp>
         <p:nvSpPr>
-          <p:cNvPr id="10" name="Text 5"/>
-          <p:cNvSpPr/>
-          <p:nvPr/>
-        </p:nvSpPr>
-        <p:spPr>
-          <a:xfrm>
-            <a:off x="1024128" y="1783080"/>
+          <p:cNvPr id="7" name="Text 3"/>
+          <p:cNvSpPr/>
+          <p:nvPr/>
+        </p:nvSpPr>
+        <p:spPr>
+          <a:xfrm>
+            <a:off x="1024128" y="1371600"/>
             <a:ext cx="7406640" cy="411480"/>
           </a:xfrm>
           <a:prstGeom prst="rect">
@@ -3794,7 +3358,7 @@
           <a:bodyPr wrap="square" lIns="0" tIns="0" rIns="0" bIns="0" rtlCol="0" anchor="ctr"/>
           <a:lstStyle/>
           <a:p>
-            <a:pPr indent="0" marL="0">
+            <a:pPr marL="0" indent="0">
               <a:buNone/>
             </a:pPr>
             <a:r>
@@ -3806,7 +3370,7 @@
                 <a:ea typeface="Inter" pitchFamily="34" charset="-122"/>
                 <a:cs typeface="Inter" pitchFamily="34" charset="-120"/>
               </a:rPr>
-              <a:t>Use full IDE integration — diffs, context, permissions</a:t>
+              <a:t>Operate across terminal / VS Code / JetBrains</a:t>
             </a:r>
             <a:endParaRPr lang="en-US" sz="1600" dirty="0"/>
           </a:p>
@@ -3814,13 +3378,13 @@
       </p:sp>
       <p:sp>
         <p:nvSpPr>
-          <p:cNvPr id="11" name="Shape 6"/>
-          <p:cNvSpPr/>
-          <p:nvPr/>
-        </p:nvSpPr>
-        <p:spPr>
-          <a:xfrm>
-            <a:off x="566928" y="2212848"/>
+          <p:cNvPr id="8" name="Shape 4"/>
+          <p:cNvSpPr/>
+          <p:nvPr/>
+        </p:nvSpPr>
+        <p:spPr>
+          <a:xfrm>
+            <a:off x="566928" y="1801368"/>
             <a:ext cx="310896" cy="310896"/>
           </a:xfrm>
           <a:prstGeom prst="ellipse">
@@ -3831,24 +3395,31 @@
           </a:solidFill>
           <a:ln/>
         </p:spPr>
+        <p:txBody>
+          <a:bodyPr/>
+          <a:lstStyle/>
+          <a:p>
+            <a:endParaRPr lang="en-US"/>
+          </a:p>
+        </p:txBody>
       </p:sp>
       <p:pic>
         <p:nvPicPr>
-          <p:cNvPr id="12" name="Image 3" descr="preencoded.png">    </p:cNvPr>
+          <p:cNvPr id="9" name="Image 2" descr="preencoded.png"/>
           <p:cNvPicPr>
             <a:picLocks noChangeAspect="1"/>
           </p:cNvPicPr>
           <p:nvPr/>
         </p:nvPicPr>
         <p:blipFill>
-          <a:blip r:embed="rId4"/>
+          <a:blip r:embed="rId3"/>
           <a:stretch>
             <a:fillRect/>
           </a:stretch>
         </p:blipFill>
         <p:spPr>
           <a:xfrm>
-            <a:off x="647761" y="2293681"/>
+            <a:off x="647761" y="1882201"/>
             <a:ext cx="149230" cy="149230"/>
           </a:xfrm>
           <a:prstGeom prst="rect">
@@ -3858,13 +3429,13 @@
       </p:pic>
       <p:sp>
         <p:nvSpPr>
-          <p:cNvPr id="13" name="Text 7"/>
-          <p:cNvSpPr/>
-          <p:nvPr/>
-        </p:nvSpPr>
-        <p:spPr>
-          <a:xfrm>
-            <a:off x="1024128" y="2194560"/>
+          <p:cNvPr id="10" name="Text 5"/>
+          <p:cNvSpPr/>
+          <p:nvPr/>
+        </p:nvSpPr>
+        <p:spPr>
+          <a:xfrm>
+            <a:off x="1024128" y="1783080"/>
             <a:ext cx="7406640" cy="411480"/>
           </a:xfrm>
           <a:prstGeom prst="rect">
@@ -3877,7 +3448,7 @@
           <a:bodyPr wrap="square" lIns="0" tIns="0" rIns="0" bIns="0" rtlCol="0" anchor="ctr"/>
           <a:lstStyle/>
           <a:p>
-            <a:pPr indent="0" marL="0">
+            <a:pPr marL="0" indent="0">
               <a:buNone/>
             </a:pPr>
             <a:r>
@@ -3889,7 +3460,7 @@
                 <a:ea typeface="Inter" pitchFamily="34" charset="-122"/>
                 <a:cs typeface="Inter" pitchFamily="34" charset="-120"/>
               </a:rPr>
-              <a:t>Configure the JetBrains plugin in Rider</a:t>
+              <a:t>Use full IDE integration — diffs, context, permissions</a:t>
             </a:r>
             <a:endParaRPr lang="en-US" sz="1600" dirty="0"/>
           </a:p>
@@ -3897,13 +3468,13 @@
       </p:sp>
       <p:sp>
         <p:nvSpPr>
-          <p:cNvPr id="14" name="Shape 8"/>
-          <p:cNvSpPr/>
-          <p:nvPr/>
-        </p:nvSpPr>
-        <p:spPr>
-          <a:xfrm>
-            <a:off x="566928" y="2624328"/>
+          <p:cNvPr id="11" name="Shape 6"/>
+          <p:cNvSpPr/>
+          <p:nvPr/>
+        </p:nvSpPr>
+        <p:spPr>
+          <a:xfrm>
+            <a:off x="566928" y="2212848"/>
             <a:ext cx="310896" cy="310896"/>
           </a:xfrm>
           <a:prstGeom prst="ellipse">
@@ -3914,24 +3485,31 @@
           </a:solidFill>
           <a:ln/>
         </p:spPr>
+        <p:txBody>
+          <a:bodyPr/>
+          <a:lstStyle/>
+          <a:p>
+            <a:endParaRPr lang="en-US"/>
+          </a:p>
+        </p:txBody>
       </p:sp>
       <p:pic>
         <p:nvPicPr>
-          <p:cNvPr id="15" name="Image 4" descr="preencoded.png">    </p:cNvPr>
+          <p:cNvPr id="12" name="Image 3" descr="preencoded.png"/>
           <p:cNvPicPr>
             <a:picLocks noChangeAspect="1"/>
           </p:cNvPicPr>
           <p:nvPr/>
         </p:nvPicPr>
         <p:blipFill>
-          <a:blip r:embed="rId5"/>
+          <a:blip r:embed="rId3"/>
           <a:stretch>
             <a:fillRect/>
           </a:stretch>
         </p:blipFill>
         <p:spPr>
           <a:xfrm>
-            <a:off x="647761" y="2705161"/>
+            <a:off x="647761" y="2293681"/>
             <a:ext cx="149230" cy="149230"/>
           </a:xfrm>
           <a:prstGeom prst="rect">
@@ -3941,13 +3519,13 @@
       </p:pic>
       <p:sp>
         <p:nvSpPr>
-          <p:cNvPr id="16" name="Text 9"/>
-          <p:cNvSpPr/>
-          <p:nvPr/>
-        </p:nvSpPr>
-        <p:spPr>
-          <a:xfrm>
-            <a:off x="1024128" y="2606040"/>
+          <p:cNvPr id="13" name="Text 7"/>
+          <p:cNvSpPr/>
+          <p:nvPr/>
+        </p:nvSpPr>
+        <p:spPr>
+          <a:xfrm>
+            <a:off x="1024128" y="2194560"/>
             <a:ext cx="7406640" cy="411480"/>
           </a:xfrm>
           <a:prstGeom prst="rect">
@@ -3960,7 +3538,7 @@
           <a:bodyPr wrap="square" lIns="0" tIns="0" rIns="0" bIns="0" rtlCol="0" anchor="ctr"/>
           <a:lstStyle/>
           <a:p>
-            <a:pPr indent="0" marL="0">
+            <a:pPr marL="0" indent="0">
               <a:buNone/>
             </a:pPr>
             <a:r>
@@ -3972,7 +3550,7 @@
                 <a:ea typeface="Inter" pitchFamily="34" charset="-122"/>
                 <a:cs typeface="Inter" pitchFamily="34" charset="-120"/>
               </a:rPr>
-              <a:t>Manage sessions across surfaces</a:t>
+              <a:t>Configure the JetBrains plugin in Rider</a:t>
             </a:r>
             <a:endParaRPr lang="en-US" sz="1600" dirty="0"/>
           </a:p>
@@ -3980,13 +3558,13 @@
       </p:sp>
       <p:sp>
         <p:nvSpPr>
-          <p:cNvPr id="17" name="Shape 10"/>
-          <p:cNvSpPr/>
-          <p:nvPr/>
-        </p:nvSpPr>
-        <p:spPr>
-          <a:xfrm>
-            <a:off x="566928" y="3035808"/>
+          <p:cNvPr id="14" name="Shape 8"/>
+          <p:cNvSpPr/>
+          <p:nvPr/>
+        </p:nvSpPr>
+        <p:spPr>
+          <a:xfrm>
+            <a:off x="566928" y="2624328"/>
             <a:ext cx="310896" cy="310896"/>
           </a:xfrm>
           <a:prstGeom prst="ellipse">
@@ -3997,24 +3575,31 @@
           </a:solidFill>
           <a:ln/>
         </p:spPr>
+        <p:txBody>
+          <a:bodyPr/>
+          <a:lstStyle/>
+          <a:p>
+            <a:endParaRPr lang="en-US"/>
+          </a:p>
+        </p:txBody>
       </p:sp>
       <p:pic>
         <p:nvPicPr>
-          <p:cNvPr id="18" name="Image 5" descr="preencoded.png">    </p:cNvPr>
+          <p:cNvPr id="15" name="Image 4" descr="preencoded.png"/>
           <p:cNvPicPr>
             <a:picLocks noChangeAspect="1"/>
           </p:cNvPicPr>
           <p:nvPr/>
         </p:nvPicPr>
         <p:blipFill>
-          <a:blip r:embed="rId6"/>
+          <a:blip r:embed="rId3"/>
           <a:stretch>
             <a:fillRect/>
           </a:stretch>
         </p:blipFill>
         <p:spPr>
           <a:xfrm>
-            <a:off x="647761" y="3116641"/>
+            <a:off x="647761" y="2705161"/>
             <a:ext cx="149230" cy="149230"/>
           </a:xfrm>
           <a:prstGeom prst="rect">
@@ -4024,13 +3609,13 @@
       </p:pic>
       <p:sp>
         <p:nvSpPr>
-          <p:cNvPr id="19" name="Text 11"/>
-          <p:cNvSpPr/>
-          <p:nvPr/>
-        </p:nvSpPr>
-        <p:spPr>
-          <a:xfrm>
-            <a:off x="1024128" y="3017520"/>
+          <p:cNvPr id="16" name="Text 9"/>
+          <p:cNvSpPr/>
+          <p:nvPr/>
+        </p:nvSpPr>
+        <p:spPr>
+          <a:xfrm>
+            <a:off x="1024128" y="2606040"/>
             <a:ext cx="7406640" cy="411480"/>
           </a:xfrm>
           <a:prstGeom prst="rect">
@@ -4043,7 +3628,7 @@
           <a:bodyPr wrap="square" lIns="0" tIns="0" rIns="0" bIns="0" rtlCol="0" anchor="ctr"/>
           <a:lstStyle/>
           <a:p>
-            <a:pPr indent="0" marL="0">
+            <a:pPr marL="0" indent="0">
               <a:buNone/>
             </a:pPr>
             <a:r>
@@ -4055,7 +3640,7 @@
                 <a:ea typeface="Inter" pitchFamily="34" charset="-122"/>
                 <a:cs typeface="Inter" pitchFamily="34" charset="-120"/>
               </a:rPr>
-              <a:t>Explain MCP — hosts, clients, servers, primitives</a:t>
+              <a:t>Manage sessions across surfaces</a:t>
             </a:r>
             <a:endParaRPr lang="en-US" sz="1600" dirty="0"/>
           </a:p>
@@ -4063,13 +3648,13 @@
       </p:sp>
       <p:sp>
         <p:nvSpPr>
-          <p:cNvPr id="20" name="Shape 12"/>
-          <p:cNvSpPr/>
-          <p:nvPr/>
-        </p:nvSpPr>
-        <p:spPr>
-          <a:xfrm>
-            <a:off x="566928" y="3447288"/>
+          <p:cNvPr id="17" name="Shape 10"/>
+          <p:cNvSpPr/>
+          <p:nvPr/>
+        </p:nvSpPr>
+        <p:spPr>
+          <a:xfrm>
+            <a:off x="566928" y="3035808"/>
             <a:ext cx="310896" cy="310896"/>
           </a:xfrm>
           <a:prstGeom prst="ellipse">
@@ -4080,24 +3665,31 @@
           </a:solidFill>
           <a:ln/>
         </p:spPr>
+        <p:txBody>
+          <a:bodyPr/>
+          <a:lstStyle/>
+          <a:p>
+            <a:endParaRPr lang="en-US"/>
+          </a:p>
+        </p:txBody>
       </p:sp>
       <p:pic>
         <p:nvPicPr>
-          <p:cNvPr id="21" name="Image 6" descr="preencoded.png">    </p:cNvPr>
+          <p:cNvPr id="18" name="Image 5" descr="preencoded.png"/>
           <p:cNvPicPr>
             <a:picLocks noChangeAspect="1"/>
           </p:cNvPicPr>
           <p:nvPr/>
         </p:nvPicPr>
         <p:blipFill>
-          <a:blip r:embed="rId7"/>
+          <a:blip r:embed="rId3"/>
           <a:stretch>
             <a:fillRect/>
           </a:stretch>
         </p:blipFill>
         <p:spPr>
           <a:xfrm>
-            <a:off x="647761" y="3528121"/>
+            <a:off x="647761" y="3116641"/>
             <a:ext cx="149230" cy="149230"/>
           </a:xfrm>
           <a:prstGeom prst="rect">
@@ -4107,13 +3699,13 @@
       </p:pic>
       <p:sp>
         <p:nvSpPr>
-          <p:cNvPr id="22" name="Text 13"/>
-          <p:cNvSpPr/>
-          <p:nvPr/>
-        </p:nvSpPr>
-        <p:spPr>
-          <a:xfrm>
-            <a:off x="1024128" y="3429000"/>
+          <p:cNvPr id="19" name="Text 11"/>
+          <p:cNvSpPr/>
+          <p:nvPr/>
+        </p:nvSpPr>
+        <p:spPr>
+          <a:xfrm>
+            <a:off x="1024128" y="3017520"/>
             <a:ext cx="7406640" cy="411480"/>
           </a:xfrm>
           <a:prstGeom prst="rect">
@@ -4126,7 +3718,7 @@
           <a:bodyPr wrap="square" lIns="0" tIns="0" rIns="0" bIns="0" rtlCol="0" anchor="ctr"/>
           <a:lstStyle/>
           <a:p>
-            <a:pPr indent="0" marL="0">
+            <a:pPr marL="0" indent="0">
               <a:buNone/>
             </a:pPr>
             <a:r>
@@ -4138,7 +3730,7 @@
                 <a:ea typeface="Inter" pitchFamily="34" charset="-122"/>
                 <a:cs typeface="Inter" pitchFamily="34" charset="-120"/>
               </a:rPr>
-              <a:t>Use the GitHub MCP server</a:t>
+              <a:t>Explain MCP — hosts, clients, servers, primitives</a:t>
             </a:r>
             <a:endParaRPr lang="en-US" sz="1600" dirty="0"/>
           </a:p>
@@ -4146,13 +3738,13 @@
       </p:sp>
       <p:sp>
         <p:nvSpPr>
-          <p:cNvPr id="23" name="Shape 14"/>
-          <p:cNvSpPr/>
-          <p:nvPr/>
-        </p:nvSpPr>
-        <p:spPr>
-          <a:xfrm>
-            <a:off x="566928" y="3858768"/>
+          <p:cNvPr id="20" name="Shape 12"/>
+          <p:cNvSpPr/>
+          <p:nvPr/>
+        </p:nvSpPr>
+        <p:spPr>
+          <a:xfrm>
+            <a:off x="566928" y="3447288"/>
             <a:ext cx="310896" cy="310896"/>
           </a:xfrm>
           <a:prstGeom prst="ellipse">
@@ -4163,23 +3755,120 @@
           </a:solidFill>
           <a:ln/>
         </p:spPr>
+        <p:txBody>
+          <a:bodyPr/>
+          <a:lstStyle/>
+          <a:p>
+            <a:endParaRPr lang="en-US"/>
+          </a:p>
+        </p:txBody>
       </p:sp>
       <p:pic>
         <p:nvPicPr>
-          <p:cNvPr id="24" name="Image 7" descr="preencoded.png">    </p:cNvPr>
+          <p:cNvPr id="21" name="Image 6" descr="preencoded.png"/>
           <p:cNvPicPr>
             <a:picLocks noChangeAspect="1"/>
           </p:cNvPicPr>
           <p:nvPr/>
         </p:nvPicPr>
         <p:blipFill>
-          <a:blip r:embed="rId8"/>
+          <a:blip r:embed="rId3"/>
           <a:stretch>
             <a:fillRect/>
           </a:stretch>
         </p:blipFill>
         <p:spPr>
           <a:xfrm>
+            <a:off x="647761" y="3528121"/>
+            <a:ext cx="149230" cy="149230"/>
+          </a:xfrm>
+          <a:prstGeom prst="rect">
+            <a:avLst/>
+          </a:prstGeom>
+        </p:spPr>
+      </p:pic>
+      <p:sp>
+        <p:nvSpPr>
+          <p:cNvPr id="22" name="Text 13"/>
+          <p:cNvSpPr/>
+          <p:nvPr/>
+        </p:nvSpPr>
+        <p:spPr>
+          <a:xfrm>
+            <a:off x="1024128" y="3429000"/>
+            <a:ext cx="7406640" cy="411480"/>
+          </a:xfrm>
+          <a:prstGeom prst="rect">
+            <a:avLst/>
+          </a:prstGeom>
+          <a:noFill/>
+          <a:ln/>
+        </p:spPr>
+        <p:txBody>
+          <a:bodyPr wrap="square" lIns="0" tIns="0" rIns="0" bIns="0" rtlCol="0" anchor="ctr"/>
+          <a:lstStyle/>
+          <a:p>
+            <a:pPr marL="0" indent="0">
+              <a:buNone/>
+            </a:pPr>
+            <a:r>
+              <a:rPr lang="en-US" sz="1600" dirty="0">
+                <a:solidFill>
+                  <a:srgbClr val="141413"/>
+                </a:solidFill>
+                <a:latin typeface="Inter" pitchFamily="34" charset="0"/>
+                <a:ea typeface="Inter" pitchFamily="34" charset="-122"/>
+                <a:cs typeface="Inter" pitchFamily="34" charset="-120"/>
+              </a:rPr>
+              <a:t>Use the GitHub MCP server</a:t>
+            </a:r>
+            <a:endParaRPr lang="en-US" sz="1600" dirty="0"/>
+          </a:p>
+        </p:txBody>
+      </p:sp>
+      <p:sp>
+        <p:nvSpPr>
+          <p:cNvPr id="23" name="Shape 14"/>
+          <p:cNvSpPr/>
+          <p:nvPr/>
+        </p:nvSpPr>
+        <p:spPr>
+          <a:xfrm>
+            <a:off x="566928" y="3858768"/>
+            <a:ext cx="310896" cy="310896"/>
+          </a:xfrm>
+          <a:prstGeom prst="ellipse">
+            <a:avLst/>
+          </a:prstGeom>
+          <a:solidFill>
+            <a:srgbClr val="D97757"/>
+          </a:solidFill>
+          <a:ln/>
+        </p:spPr>
+        <p:txBody>
+          <a:bodyPr/>
+          <a:lstStyle/>
+          <a:p>
+            <a:endParaRPr lang="en-US"/>
+          </a:p>
+        </p:txBody>
+      </p:sp>
+      <p:pic>
+        <p:nvPicPr>
+          <p:cNvPr id="24" name="Image 7" descr="preencoded.png"/>
+          <p:cNvPicPr>
+            <a:picLocks noChangeAspect="1"/>
+          </p:cNvPicPr>
+          <p:nvPr/>
+        </p:nvPicPr>
+        <p:blipFill>
+          <a:blip r:embed="rId3"/>
+          <a:stretch>
+            <a:fillRect/>
+          </a:stretch>
+        </p:blipFill>
+        <p:spPr>
+          <a:xfrm>
             <a:off x="647761" y="3939601"/>
             <a:ext cx="149230" cy="149230"/>
           </a:xfrm>
@@ -4209,7 +3898,7 @@
           <a:bodyPr wrap="square" lIns="0" tIns="0" rIns="0" bIns="0" rtlCol="0" anchor="ctr"/>
           <a:lstStyle/>
           <a:p>
-            <a:pPr indent="0" marL="0">
+            <a:pPr marL="0" indent="0">
               <a:buNone/>
             </a:pPr>
             <a:r>
@@ -4248,7 +3937,7 @@
           <a:bodyPr wrap="square" rtlCol="0" anchor="ctr"/>
           <a:lstStyle/>
           <a:p>
-            <a:pPr indent="0" marL="0">
+            <a:pPr marL="0" indent="0">
               <a:buNone/>
             </a:pPr>
             <a:r>
@@ -4287,7 +3976,7 @@
           <a:bodyPr wrap="square" rtlCol="0" anchor="ctr"/>
           <a:lstStyle/>
           <a:p>
-            <a:pPr algn="r" indent="0" marL="0">
+            <a:pPr marL="0" indent="0" algn="r">
               <a:buNone/>
             </a:pPr>
             <a:r>
@@ -4302,45 +3991,6 @@
               <a:t>Section 3  ·  2/12</a:t>
             </a:r>
             <a:endParaRPr lang="en-US" sz="900" dirty="0"/>
-          </a:p>
-        </p:txBody>
-      </p:sp>
-      <p:sp>
-        <p:nvSpPr>
-          <p:cNvPr id="28" name="Text 18"/>
-          <p:cNvSpPr/>
-          <p:nvPr/>
-        </p:nvSpPr>
-        <p:spPr>
-          <a:xfrm>
-            <a:off x="548640" y="4462272"/>
-            <a:ext cx="8046720" cy="274320"/>
-          </a:xfrm>
-          <a:prstGeom prst="rect">
-            <a:avLst/>
-          </a:prstGeom>
-          <a:noFill/>
-          <a:ln/>
-        </p:spPr>
-        <p:txBody>
-          <a:bodyPr wrap="square" lIns="0" tIns="0" rIns="0" bIns="0" rtlCol="0" anchor="ctr"/>
-          <a:lstStyle/>
-          <a:p>
-            <a:pPr indent="0" marL="0">
-              <a:buNone/>
-            </a:pPr>
-            <a:r>
-              <a:rPr lang="en-US" sz="1000" i="1" dirty="0">
-                <a:solidFill>
-                  <a:srgbClr val="615C52"/>
-                </a:solidFill>
-                <a:latin typeface="Inter" pitchFamily="34" charset="0"/>
-                <a:ea typeface="Inter" pitchFamily="34" charset="-122"/>
-                <a:cs typeface="Inter" pitchFamily="34" charset="-120"/>
-              </a:rPr>
-              <a:t>▸ Two halves: the IDE surfaces first, then the MCP ecosystem after the break.</a:t>
-            </a:r>
-            <a:endParaRPr lang="en-US" sz="1000" dirty="0"/>
           </a:p>
         </p:txBody>
       </p:sp>
@@ -4360,6 +4010,7 @@
         <a:solidFill>
           <a:srgbClr val="F0EEE6"/>
         </a:solidFill>
+        <a:effectLst/>
       </p:bgPr>
     </p:bg>
     <p:spTree>
@@ -4397,11 +4048,11 @@
           <a:bodyPr wrap="square" lIns="0" tIns="0" rIns="0" bIns="0" rtlCol="0" anchor="ctr"/>
           <a:lstStyle/>
           <a:p>
-            <a:pPr indent="0" marL="0">
-              <a:buNone/>
-            </a:pPr>
-            <a:r>
-              <a:rPr lang="en-US" sz="1100" b="1" spc="200" kern="0" dirty="0">
+            <a:pPr marL="0" indent="0">
+              <a:buNone/>
+            </a:pPr>
+            <a:r>
+              <a:rPr lang="en-US" sz="1100" b="1" kern="0" spc="200" dirty="0">
                 <a:solidFill>
                   <a:srgbClr val="D97757"/>
                 </a:solidFill>
@@ -4436,7 +4087,7 @@
           <a:bodyPr wrap="square" lIns="0" tIns="0" rIns="0" bIns="0" rtlCol="0" anchor="ctr"/>
           <a:lstStyle/>
           <a:p>
-            <a:pPr indent="0" marL="0">
+            <a:pPr marL="0" indent="0">
               <a:buNone/>
             </a:pPr>
             <a:r>
@@ -4456,14 +4107,14 @@
       </p:sp>
       <p:pic>
         <p:nvPicPr>
-          <p:cNvPr id="4" name="Image 0" descr="preencoded.png">    </p:cNvPr>
+          <p:cNvPr id="4" name="Image 0" descr="preencoded.png"/>
           <p:cNvPicPr>
             <a:picLocks noChangeAspect="1"/>
           </p:cNvPicPr>
           <p:nvPr/>
         </p:nvPicPr>
         <p:blipFill>
-          <a:blip r:embed="rId1"/>
+          <a:blip r:embed="rId2"/>
           <a:stretch>
             <a:fillRect/>
           </a:stretch>
@@ -4504,13 +4155,20 @@
             <a:prstDash val="solid"/>
           </a:ln>
           <a:effectLst>
-            <a:outerShdw sx="100000" sy="100000" kx="0" ky="0" algn="bl" rotWithShape="0" blurRad="88900" dist="38100" dir="5400000">
+            <a:outerShdw blurRad="88900" dist="38100" dir="5400000" algn="bl" rotWithShape="0">
               <a:srgbClr val="000000">
                 <a:alpha val="10000"/>
               </a:srgbClr>
             </a:outerShdw>
           </a:effectLst>
         </p:spPr>
+        <p:txBody>
+          <a:bodyPr/>
+          <a:lstStyle/>
+          <a:p>
+            <a:endParaRPr lang="en-US"/>
+          </a:p>
+        </p:txBody>
       </p:sp>
       <p:sp>
         <p:nvSpPr>
@@ -4531,17 +4189,24 @@
           </a:solidFill>
           <a:ln/>
         </p:spPr>
+        <p:txBody>
+          <a:bodyPr/>
+          <a:lstStyle/>
+          <a:p>
+            <a:endParaRPr lang="en-US"/>
+          </a:p>
+        </p:txBody>
       </p:sp>
       <p:pic>
         <p:nvPicPr>
-          <p:cNvPr id="7" name="Image 1" descr="preencoded.png">    </p:cNvPr>
+          <p:cNvPr id="7" name="Image 1" descr="preencoded.png"/>
           <p:cNvPicPr>
             <a:picLocks noChangeAspect="1"/>
           </p:cNvPicPr>
           <p:nvPr/>
         </p:nvPicPr>
         <p:blipFill>
-          <a:blip r:embed="rId2"/>
+          <a:blip r:embed="rId3"/>
           <a:stretch>
             <a:fillRect/>
           </a:stretch>
@@ -4577,7 +4242,7 @@
           <a:bodyPr wrap="square" lIns="0" tIns="0" rIns="0" bIns="0" rtlCol="0" anchor="ctr"/>
           <a:lstStyle/>
           <a:p>
-            <a:pPr indent="0" marL="0">
+            <a:pPr marL="0" indent="0">
               <a:buNone/>
             </a:pPr>
             <a:r>
@@ -4621,13 +4286,20 @@
             <a:prstDash val="solid"/>
           </a:ln>
           <a:effectLst>
-            <a:outerShdw sx="100000" sy="100000" kx="0" ky="0" algn="bl" rotWithShape="0" blurRad="88900" dist="38100" dir="5400000">
+            <a:outerShdw blurRad="88900" dist="38100" dir="5400000" algn="bl" rotWithShape="0">
               <a:srgbClr val="000000">
                 <a:alpha val="10000"/>
               </a:srgbClr>
             </a:outerShdw>
           </a:effectLst>
         </p:spPr>
+        <p:txBody>
+          <a:bodyPr/>
+          <a:lstStyle/>
+          <a:p>
+            <a:endParaRPr lang="en-US"/>
+          </a:p>
+        </p:txBody>
       </p:sp>
       <p:sp>
         <p:nvSpPr>
@@ -4648,17 +4320,24 @@
           </a:solidFill>
           <a:ln/>
         </p:spPr>
+        <p:txBody>
+          <a:bodyPr/>
+          <a:lstStyle/>
+          <a:p>
+            <a:endParaRPr lang="en-US"/>
+          </a:p>
+        </p:txBody>
       </p:sp>
       <p:pic>
         <p:nvPicPr>
-          <p:cNvPr id="11" name="Image 2" descr="preencoded.png">    </p:cNvPr>
+          <p:cNvPr id="11" name="Image 2" descr="preencoded.png"/>
           <p:cNvPicPr>
             <a:picLocks noChangeAspect="1"/>
           </p:cNvPicPr>
           <p:nvPr/>
         </p:nvPicPr>
         <p:blipFill>
-          <a:blip r:embed="rId3"/>
+          <a:blip r:embed="rId4"/>
           <a:stretch>
             <a:fillRect/>
           </a:stretch>
@@ -4694,7 +4373,7 @@
           <a:bodyPr wrap="square" lIns="0" tIns="0" rIns="0" bIns="0" rtlCol="0" anchor="ctr"/>
           <a:lstStyle/>
           <a:p>
-            <a:pPr indent="0" marL="0">
+            <a:pPr marL="0" indent="0">
               <a:buNone/>
             </a:pPr>
             <a:r>
@@ -4738,13 +4417,20 @@
             <a:prstDash val="solid"/>
           </a:ln>
           <a:effectLst>
-            <a:outerShdw sx="100000" sy="100000" kx="0" ky="0" algn="bl" rotWithShape="0" blurRad="88900" dist="38100" dir="5400000">
+            <a:outerShdw blurRad="88900" dist="38100" dir="5400000" algn="bl" rotWithShape="0">
               <a:srgbClr val="000000">
                 <a:alpha val="10000"/>
               </a:srgbClr>
             </a:outerShdw>
           </a:effectLst>
         </p:spPr>
+        <p:txBody>
+          <a:bodyPr/>
+          <a:lstStyle/>
+          <a:p>
+            <a:endParaRPr lang="en-US"/>
+          </a:p>
+        </p:txBody>
       </p:sp>
       <p:sp>
         <p:nvSpPr>
@@ -4765,17 +4451,24 @@
           </a:solidFill>
           <a:ln/>
         </p:spPr>
+        <p:txBody>
+          <a:bodyPr/>
+          <a:lstStyle/>
+          <a:p>
+            <a:endParaRPr lang="en-US"/>
+          </a:p>
+        </p:txBody>
       </p:sp>
       <p:pic>
         <p:nvPicPr>
-          <p:cNvPr id="15" name="Image 3" descr="preencoded.png">    </p:cNvPr>
+          <p:cNvPr id="15" name="Image 3" descr="preencoded.png"/>
           <p:cNvPicPr>
             <a:picLocks noChangeAspect="1"/>
           </p:cNvPicPr>
           <p:nvPr/>
         </p:nvPicPr>
         <p:blipFill>
-          <a:blip r:embed="rId4"/>
+          <a:blip r:embed="rId5"/>
           <a:stretch>
             <a:fillRect/>
           </a:stretch>
@@ -4811,7 +4504,7 @@
           <a:bodyPr wrap="square" lIns="0" tIns="0" rIns="0" bIns="0" rtlCol="0" anchor="ctr"/>
           <a:lstStyle/>
           <a:p>
-            <a:pPr indent="0" marL="0">
+            <a:pPr marL="0" indent="0">
               <a:buNone/>
             </a:pPr>
             <a:r>
@@ -4850,13 +4543,20 @@
           </a:solidFill>
           <a:ln/>
           <a:effectLst>
-            <a:outerShdw sx="100000" sy="100000" kx="0" ky="0" algn="bl" rotWithShape="0" blurRad="88900" dist="38100" dir="5400000">
+            <a:outerShdw blurRad="88900" dist="38100" dir="5400000" algn="bl" rotWithShape="0">
               <a:srgbClr val="000000">
                 <a:alpha val="10000"/>
               </a:srgbClr>
             </a:outerShdw>
           </a:effectLst>
         </p:spPr>
+        <p:txBody>
+          <a:bodyPr/>
+          <a:lstStyle/>
+          <a:p>
+            <a:endParaRPr lang="en-US"/>
+          </a:p>
+        </p:txBody>
       </p:sp>
       <p:sp>
         <p:nvSpPr>
@@ -4879,11 +4579,11 @@
           <a:bodyPr wrap="square" lIns="0" tIns="0" rIns="0" bIns="0" rtlCol="0" anchor="ctr"/>
           <a:lstStyle/>
           <a:p>
-            <a:pPr indent="0" marL="0">
-              <a:buNone/>
-            </a:pPr>
-            <a:r>
-              <a:rPr lang="en-US" sz="1200" b="1" spc="100" kern="0" dirty="0">
+            <a:pPr marL="0" indent="0">
+              <a:buNone/>
+            </a:pPr>
+            <a:r>
+              <a:rPr lang="en-US" sz="1200" b="1" kern="0" spc="100" dirty="0">
                 <a:solidFill>
                   <a:srgbClr val="D97757"/>
                 </a:solidFill>
@@ -4918,7 +4618,7 @@
           <a:bodyPr wrap="square" lIns="0" tIns="0" rIns="0" bIns="0" rtlCol="0" anchor="t"/>
           <a:lstStyle/>
           <a:p>
-            <a:pPr indent="0" marL="0">
+            <a:pPr marL="0" indent="0">
               <a:buNone/>
             </a:pPr>
             <a:r>
@@ -4962,13 +4662,20 @@
             <a:prstDash val="solid"/>
           </a:ln>
           <a:effectLst>
-            <a:outerShdw sx="100000" sy="100000" kx="0" ky="0" algn="bl" rotWithShape="0" blurRad="88900" dist="38100" dir="5400000">
+            <a:outerShdw blurRad="88900" dist="38100" dir="5400000" algn="bl" rotWithShape="0">
               <a:srgbClr val="000000">
                 <a:alpha val="10000"/>
               </a:srgbClr>
             </a:outerShdw>
           </a:effectLst>
         </p:spPr>
+        <p:txBody>
+          <a:bodyPr/>
+          <a:lstStyle/>
+          <a:p>
+            <a:endParaRPr lang="en-US"/>
+          </a:p>
+        </p:txBody>
       </p:sp>
       <p:sp>
         <p:nvSpPr>
@@ -4991,11 +4698,11 @@
           <a:bodyPr wrap="square" lIns="0" tIns="0" rIns="0" bIns="0" rtlCol="0" anchor="ctr"/>
           <a:lstStyle/>
           <a:p>
-            <a:pPr indent="0" marL="0">
-              <a:buNone/>
-            </a:pPr>
-            <a:r>
-              <a:rPr lang="en-US" sz="1200" b="1" spc="100" kern="0" dirty="0">
+            <a:pPr marL="0" indent="0">
+              <a:buNone/>
+            </a:pPr>
+            <a:r>
+              <a:rPr lang="en-US" sz="1200" b="1" kern="0" spc="100" dirty="0">
                 <a:solidFill>
                   <a:srgbClr val="615C52"/>
                 </a:solidFill>
@@ -5030,7 +4737,7 @@
           <a:bodyPr wrap="square" lIns="0" tIns="0" rIns="0" bIns="0" rtlCol="0" anchor="t"/>
           <a:lstStyle/>
           <a:p>
-            <a:pPr indent="0" marL="0">
+            <a:pPr marL="0" indent="0">
               <a:buNone/>
             </a:pPr>
             <a:r>
@@ -5069,7 +4776,7 @@
           <a:bodyPr wrap="square" rtlCol="0" anchor="ctr"/>
           <a:lstStyle/>
           <a:p>
-            <a:pPr indent="0" marL="0">
+            <a:pPr marL="0" indent="0">
               <a:buNone/>
             </a:pPr>
             <a:r>
@@ -5108,7 +4815,7 @@
           <a:bodyPr wrap="square" rtlCol="0" anchor="ctr"/>
           <a:lstStyle/>
           <a:p>
-            <a:pPr algn="r" indent="0" marL="0">
+            <a:pPr marL="0" indent="0" algn="r">
               <a:buNone/>
             </a:pPr>
             <a:r>
@@ -5123,45 +4830,6 @@
               <a:t>Section 3  ·  3/12</a:t>
             </a:r>
             <a:endParaRPr lang="en-US" sz="900" dirty="0"/>
-          </a:p>
-        </p:txBody>
-      </p:sp>
-      <p:sp>
-        <p:nvSpPr>
-          <p:cNvPr id="25" name="Text 19"/>
-          <p:cNvSpPr/>
-          <p:nvPr/>
-        </p:nvSpPr>
-        <p:spPr>
-          <a:xfrm>
-            <a:off x="548640" y="4462272"/>
-            <a:ext cx="8046720" cy="274320"/>
-          </a:xfrm>
-          <a:prstGeom prst="rect">
-            <a:avLst/>
-          </a:prstGeom>
-          <a:noFill/>
-          <a:ln/>
-        </p:spPr>
-        <p:txBody>
-          <a:bodyPr wrap="square" lIns="0" tIns="0" rIns="0" bIns="0" rtlCol="0" anchor="ctr"/>
-          <a:lstStyle/>
-          <a:p>
-            <a:pPr indent="0" marL="0">
-              <a:buNone/>
-            </a:pPr>
-            <a:r>
-              <a:rPr lang="en-US" sz="1000" i="1" dirty="0">
-                <a:solidFill>
-                  <a:srgbClr val="615C52"/>
-                </a:solidFill>
-                <a:latin typeface="Inter" pitchFamily="34" charset="0"/>
-                <a:ea typeface="Inter" pitchFamily="34" charset="-122"/>
-                <a:cs typeface="Inter" pitchFamily="34" charset="-120"/>
-              </a:rPr>
-              <a:t>▸ Reassure: switching surfaces costs nothing — your steering config comes along.</a:t>
-            </a:r>
-            <a:endParaRPr lang="en-US" sz="1000" dirty="0"/>
           </a:p>
         </p:txBody>
       </p:sp>
@@ -5181,6 +4849,7 @@
         <a:solidFill>
           <a:srgbClr val="F0EEE6"/>
         </a:solidFill>
+        <a:effectLst/>
       </p:bgPr>
     </p:bg>
     <p:spTree>
@@ -5218,11 +4887,11 @@
           <a:bodyPr wrap="square" lIns="0" tIns="0" rIns="0" bIns="0" rtlCol="0" anchor="ctr"/>
           <a:lstStyle/>
           <a:p>
-            <a:pPr indent="0" marL="0">
-              <a:buNone/>
-            </a:pPr>
-            <a:r>
-              <a:rPr lang="en-US" sz="1100" b="1" spc="200" kern="0" dirty="0">
+            <a:pPr marL="0" indent="0">
+              <a:buNone/>
+            </a:pPr>
+            <a:r>
+              <a:rPr lang="en-US" sz="1100" b="1" kern="0" spc="200" dirty="0">
                 <a:solidFill>
                   <a:srgbClr val="D97757"/>
                 </a:solidFill>
@@ -5257,7 +4926,7 @@
           <a:bodyPr wrap="square" lIns="0" tIns="0" rIns="0" bIns="0" rtlCol="0" anchor="ctr"/>
           <a:lstStyle/>
           <a:p>
-            <a:pPr indent="0" marL="0">
+            <a:pPr marL="0" indent="0">
               <a:buNone/>
             </a:pPr>
             <a:r>
@@ -5277,159 +4946,7 @@
       </p:sp>
       <p:pic>
         <p:nvPicPr>
-          <p:cNvPr id="4" name="Image 0" descr="preencoded.png">    </p:cNvPr>
-          <p:cNvPicPr>
-            <a:picLocks noChangeAspect="1"/>
-          </p:cNvPicPr>
-          <p:nvPr/>
-        </p:nvPicPr>
-        <p:blipFill>
-          <a:blip r:embed="rId1"/>
-          <a:stretch>
-            <a:fillRect/>
-          </a:stretch>
-        </p:blipFill>
-        <p:spPr>
-          <a:xfrm>
-            <a:off x="8339328" y="402336"/>
-            <a:ext cx="310896" cy="310896"/>
-          </a:xfrm>
-          <a:prstGeom prst="rect">
-            <a:avLst/>
-          </a:prstGeom>
-        </p:spPr>
-      </p:pic>
-      <p:sp>
-        <p:nvSpPr>
-          <p:cNvPr id="5" name="Shape 2"/>
-          <p:cNvSpPr/>
-          <p:nvPr/>
-        </p:nvSpPr>
-        <p:spPr>
-          <a:xfrm>
-            <a:off x="548640" y="1417320"/>
-            <a:ext cx="4160520" cy="960120"/>
-          </a:xfrm>
-          <a:prstGeom prst="roundRect">
-            <a:avLst>
-              <a:gd name="adj" fmla="val 7619"/>
-            </a:avLst>
-          </a:prstGeom>
-          <a:solidFill>
-            <a:srgbClr val="1F1E1D"/>
-          </a:solidFill>
-          <a:ln/>
-          <a:effectLst>
-            <a:outerShdw sx="100000" sy="100000" kx="0" ky="0" algn="bl" rotWithShape="0" blurRad="88900" dist="38100" dir="5400000">
-              <a:srgbClr val="000000">
-                <a:alpha val="10000"/>
-              </a:srgbClr>
-            </a:outerShdw>
-          </a:effectLst>
-        </p:spPr>
-      </p:sp>
-      <p:sp>
-        <p:nvSpPr>
-          <p:cNvPr id="6" name="Text 3"/>
-          <p:cNvSpPr/>
-          <p:nvPr/>
-        </p:nvSpPr>
-        <p:spPr>
-          <a:xfrm>
-            <a:off x="822960" y="1600200"/>
-            <a:ext cx="3703320" cy="640080"/>
-          </a:xfrm>
-          <a:prstGeom prst="rect">
-            <a:avLst/>
-          </a:prstGeom>
-          <a:noFill/>
-          <a:ln/>
-        </p:spPr>
-        <p:txBody>
-          <a:bodyPr wrap="square" lIns="0" tIns="0" rIns="0" bIns="0" rtlCol="0" anchor="ctr"/>
-          <a:lstStyle/>
-          <a:p>
-            <a:pPr indent="0" marL="0">
-              <a:lnSpc>
-                <a:spcPct val="125000"/>
-              </a:lnSpc>
-              <a:buNone/>
-            </a:pPr>
-            <a:r>
-              <a:rPr lang="en-US" sz="1300" b="1" dirty="0">
-                <a:solidFill>
-                  <a:srgbClr val="D97757"/>
-                </a:solidFill>
-                <a:latin typeface="Courier New" pitchFamily="34" charset="0"/>
-                <a:ea typeface="Courier New" pitchFamily="34" charset="-122"/>
-                <a:cs typeface="Courier New" pitchFamily="34" charset="-120"/>
-              </a:rPr>
-              <a:t>$ </a:t>
-            </a:r>
-            <a:pPr indent="0" marL="0">
-              <a:lnSpc>
-                <a:spcPct val="125000"/>
-              </a:lnSpc>
-              <a:buNone/>
-            </a:pPr>
-            <a:r>
-              <a:rPr lang="en-US" sz="1300" dirty="0">
-                <a:solidFill>
-                  <a:srgbClr val="E9E5DD"/>
-                </a:solidFill>
-                <a:latin typeface="Courier New" pitchFamily="34" charset="0"/>
-                <a:ea typeface="Courier New" pitchFamily="34" charset="-122"/>
-                <a:cs typeface="Courier New" pitchFamily="34" charset="-120"/>
-              </a:rPr>
-              <a:t>code --install-extension</a:t>
-            </a:r>
-            <a:endParaRPr lang="en-US" sz="1300" dirty="0"/>
-          </a:p>
-          <a:p>
-            <a:pPr indent="0" marL="0">
-              <a:lnSpc>
-                <a:spcPct val="125000"/>
-              </a:lnSpc>
-              <a:buNone/>
-            </a:pPr>
-            <a:r>
-              <a:rPr lang="en-US" sz="1300" dirty="0">
-                <a:solidFill>
-                  <a:srgbClr val="E0A04A"/>
-                </a:solidFill>
-                <a:latin typeface="Courier New" pitchFamily="34" charset="0"/>
-                <a:ea typeface="Courier New" pitchFamily="34" charset="-122"/>
-                <a:cs typeface="Courier New" pitchFamily="34" charset="-120"/>
-              </a:rPr>
-              <a:t>    anthropic.claude-code</a:t>
-            </a:r>
-            <a:endParaRPr lang="en-US" sz="1300" dirty="0"/>
-          </a:p>
-        </p:txBody>
-      </p:sp>
-      <p:sp>
-        <p:nvSpPr>
-          <p:cNvPr id="7" name="Shape 4"/>
-          <p:cNvSpPr/>
-          <p:nvPr/>
-        </p:nvSpPr>
-        <p:spPr>
-          <a:xfrm>
-            <a:off x="566928" y="2697480"/>
-            <a:ext cx="420624" cy="420624"/>
-          </a:xfrm>
-          <a:prstGeom prst="ellipse">
-            <a:avLst/>
-          </a:prstGeom>
-          <a:solidFill>
-            <a:srgbClr val="D97757"/>
-          </a:solidFill>
-          <a:ln/>
-        </p:spPr>
-      </p:sp>
-      <p:pic>
-        <p:nvPicPr>
-          <p:cNvPr id="8" name="Image 1" descr="preencoded.png">    </p:cNvPr>
+          <p:cNvPr id="4" name="Image 0" descr="preencoded.png"/>
           <p:cNvPicPr>
             <a:picLocks noChangeAspect="1"/>
           </p:cNvPicPr>
@@ -5443,8 +4960,8 @@
         </p:blipFill>
         <p:spPr>
           <a:xfrm>
-            <a:off x="676290" y="2806842"/>
-            <a:ext cx="201900" cy="201900"/>
+            <a:off x="8339328" y="402336"/>
+            <a:ext cx="310896" cy="310896"/>
           </a:xfrm>
           <a:prstGeom prst="rect">
             <a:avLst/>
@@ -5453,91 +4970,122 @@
       </p:pic>
       <p:sp>
         <p:nvSpPr>
-          <p:cNvPr id="9" name="Text 5"/>
-          <p:cNvSpPr/>
-          <p:nvPr/>
-        </p:nvSpPr>
-        <p:spPr>
-          <a:xfrm>
-            <a:off x="1133856" y="2660904"/>
-            <a:ext cx="7315200" cy="292608"/>
-          </a:xfrm>
-          <a:prstGeom prst="rect">
-            <a:avLst/>
-          </a:prstGeom>
-          <a:noFill/>
-          <a:ln/>
-        </p:spPr>
-        <p:txBody>
-          <a:bodyPr wrap="square" lIns="0" tIns="0" rIns="0" bIns="0" rtlCol="0" anchor="ctr"/>
-          <a:lstStyle/>
-          <a:p>
-            <a:pPr indent="0" marL="0">
-              <a:buNone/>
-            </a:pPr>
-            <a:r>
-              <a:rPr lang="en-US" sz="1500" b="1" dirty="0">
-                <a:solidFill>
-                  <a:srgbClr val="141413"/>
-                </a:solidFill>
-                <a:latin typeface="Inter" pitchFamily="34" charset="0"/>
-                <a:ea typeface="Inter" pitchFamily="34" charset="-122"/>
-                <a:cs typeface="Inter" pitchFamily="34" charset="-120"/>
-              </a:rPr>
-              <a:t>Inline diff review</a:t>
-            </a:r>
-            <a:endParaRPr lang="en-US" sz="1500" dirty="0"/>
-          </a:p>
-        </p:txBody>
-      </p:sp>
-      <p:sp>
-        <p:nvSpPr>
-          <p:cNvPr id="10" name="Text 6"/>
-          <p:cNvSpPr/>
-          <p:nvPr/>
-        </p:nvSpPr>
-        <p:spPr>
-          <a:xfrm>
-            <a:off x="1133856" y="2944368"/>
-            <a:ext cx="7315200" cy="274320"/>
-          </a:xfrm>
-          <a:prstGeom prst="rect">
-            <a:avLst/>
-          </a:prstGeom>
-          <a:noFill/>
-          <a:ln/>
-        </p:spPr>
-        <p:txBody>
-          <a:bodyPr wrap="square" lIns="0" tIns="0" rIns="0" bIns="0" rtlCol="0" anchor="ctr"/>
-          <a:lstStyle/>
-          <a:p>
-            <a:pPr indent="0" marL="0">
-              <a:buNone/>
-            </a:pPr>
-            <a:r>
-              <a:rPr lang="en-US" sz="1250" dirty="0">
-                <a:solidFill>
-                  <a:srgbClr val="615C52"/>
-                </a:solidFill>
-                <a:latin typeface="Inter" pitchFamily="34" charset="0"/>
-                <a:ea typeface="Inter" pitchFamily="34" charset="-122"/>
-                <a:cs typeface="Inter" pitchFamily="34" charset="-120"/>
-              </a:rPr>
-              <a:t>Approve, reject, or modify each change</a:t>
-            </a:r>
-            <a:endParaRPr lang="en-US" sz="1250" dirty="0"/>
-          </a:p>
-        </p:txBody>
-      </p:sp>
-      <p:sp>
-        <p:nvSpPr>
-          <p:cNvPr id="11" name="Shape 7"/>
-          <p:cNvSpPr/>
-          <p:nvPr/>
-        </p:nvSpPr>
-        <p:spPr>
-          <a:xfrm>
-            <a:off x="566928" y="3291840"/>
+          <p:cNvPr id="5" name="Shape 2"/>
+          <p:cNvSpPr/>
+          <p:nvPr/>
+        </p:nvSpPr>
+        <p:spPr>
+          <a:xfrm>
+            <a:off x="548640" y="1417320"/>
+            <a:ext cx="4160520" cy="960120"/>
+          </a:xfrm>
+          <a:prstGeom prst="roundRect">
+            <a:avLst>
+              <a:gd name="adj" fmla="val 7619"/>
+            </a:avLst>
+          </a:prstGeom>
+          <a:solidFill>
+            <a:srgbClr val="1F1E1D"/>
+          </a:solidFill>
+          <a:ln/>
+          <a:effectLst>
+            <a:outerShdw blurRad="88900" dist="38100" dir="5400000" algn="bl" rotWithShape="0">
+              <a:srgbClr val="000000">
+                <a:alpha val="10000"/>
+              </a:srgbClr>
+            </a:outerShdw>
+          </a:effectLst>
+        </p:spPr>
+        <p:txBody>
+          <a:bodyPr/>
+          <a:lstStyle/>
+          <a:p>
+            <a:endParaRPr lang="en-US"/>
+          </a:p>
+        </p:txBody>
+      </p:sp>
+      <p:sp>
+        <p:nvSpPr>
+          <p:cNvPr id="6" name="Text 3"/>
+          <p:cNvSpPr/>
+          <p:nvPr/>
+        </p:nvSpPr>
+        <p:spPr>
+          <a:xfrm>
+            <a:off x="822960" y="1600200"/>
+            <a:ext cx="3703320" cy="640080"/>
+          </a:xfrm>
+          <a:prstGeom prst="rect">
+            <a:avLst/>
+          </a:prstGeom>
+          <a:noFill/>
+          <a:ln/>
+        </p:spPr>
+        <p:txBody>
+          <a:bodyPr wrap="square" lIns="0" tIns="0" rIns="0" bIns="0" rtlCol="0" anchor="ctr"/>
+          <a:lstStyle/>
+          <a:p>
+            <a:pPr marL="0" indent="0">
+              <a:lnSpc>
+                <a:spcPct val="125000"/>
+              </a:lnSpc>
+              <a:buNone/>
+            </a:pPr>
+            <a:r>
+              <a:rPr lang="en-US" sz="1300" b="1" dirty="0">
+                <a:solidFill>
+                  <a:srgbClr val="D97757"/>
+                </a:solidFill>
+                <a:latin typeface="Courier New" pitchFamily="34" charset="0"/>
+                <a:ea typeface="Courier New" pitchFamily="34" charset="-122"/>
+                <a:cs typeface="Courier New" pitchFamily="34" charset="-120"/>
+              </a:rPr>
+              <a:t>$ </a:t>
+            </a:r>
+            <a:r>
+              <a:rPr lang="en-US" sz="1300" dirty="0">
+                <a:solidFill>
+                  <a:srgbClr val="E9E5DD"/>
+                </a:solidFill>
+                <a:latin typeface="Courier New" pitchFamily="34" charset="0"/>
+                <a:ea typeface="Courier New" pitchFamily="34" charset="-122"/>
+                <a:cs typeface="Courier New" pitchFamily="34" charset="-120"/>
+              </a:rPr>
+              <a:t>code --install-extension</a:t>
+            </a:r>
+            <a:endParaRPr lang="en-US" sz="1300" dirty="0"/>
+          </a:p>
+          <a:p>
+            <a:pPr marL="0" indent="0">
+              <a:lnSpc>
+                <a:spcPct val="125000"/>
+              </a:lnSpc>
+              <a:buNone/>
+            </a:pPr>
+            <a:r>
+              <a:rPr lang="en-US" sz="1300" dirty="0">
+                <a:solidFill>
+                  <a:srgbClr val="E0A04A"/>
+                </a:solidFill>
+                <a:latin typeface="Courier New" pitchFamily="34" charset="0"/>
+                <a:ea typeface="Courier New" pitchFamily="34" charset="-122"/>
+                <a:cs typeface="Courier New" pitchFamily="34" charset="-120"/>
+              </a:rPr>
+              <a:t>    anthropic.claude-code</a:t>
+            </a:r>
+            <a:endParaRPr lang="en-US" sz="1300" dirty="0"/>
+          </a:p>
+        </p:txBody>
+      </p:sp>
+      <p:sp>
+        <p:nvSpPr>
+          <p:cNvPr id="7" name="Shape 4"/>
+          <p:cNvSpPr/>
+          <p:nvPr/>
+        </p:nvSpPr>
+        <p:spPr>
+          <a:xfrm>
+            <a:off x="566928" y="2697480"/>
             <a:ext cx="420624" cy="420624"/>
           </a:xfrm>
           <a:prstGeom prst="ellipse">
@@ -5548,10 +5096,17 @@
           </a:solidFill>
           <a:ln/>
         </p:spPr>
+        <p:txBody>
+          <a:bodyPr/>
+          <a:lstStyle/>
+          <a:p>
+            <a:endParaRPr lang="en-US"/>
+          </a:p>
+        </p:txBody>
       </p:sp>
       <p:pic>
         <p:nvPicPr>
-          <p:cNvPr id="12" name="Image 2" descr="preencoded.png">    </p:cNvPr>
+          <p:cNvPr id="8" name="Image 1" descr="preencoded.png"/>
           <p:cNvPicPr>
             <a:picLocks noChangeAspect="1"/>
           </p:cNvPicPr>
@@ -5565,7 +5120,7 @@
         </p:blipFill>
         <p:spPr>
           <a:xfrm>
-            <a:off x="676290" y="3401202"/>
+            <a:off x="676290" y="2806842"/>
             <a:ext cx="201900" cy="201900"/>
           </a:xfrm>
           <a:prstGeom prst="rect">
@@ -5575,13 +5130,13 @@
       </p:pic>
       <p:sp>
         <p:nvSpPr>
-          <p:cNvPr id="13" name="Text 8"/>
-          <p:cNvSpPr/>
-          <p:nvPr/>
-        </p:nvSpPr>
-        <p:spPr>
-          <a:xfrm>
-            <a:off x="1133856" y="3255264"/>
+          <p:cNvPr id="9" name="Text 5"/>
+          <p:cNvSpPr/>
+          <p:nvPr/>
+        </p:nvSpPr>
+        <p:spPr>
+          <a:xfrm>
+            <a:off x="1133856" y="2660904"/>
             <a:ext cx="7315200" cy="292608"/>
           </a:xfrm>
           <a:prstGeom prst="rect">
@@ -5594,7 +5149,7 @@
           <a:bodyPr wrap="square" lIns="0" tIns="0" rIns="0" bIns="0" rtlCol="0" anchor="ctr"/>
           <a:lstStyle/>
           <a:p>
-            <a:pPr indent="0" marL="0">
+            <a:pPr marL="0" indent="0">
               <a:buNone/>
             </a:pPr>
             <a:r>
@@ -5606,7 +5161,7 @@
                 <a:ea typeface="Inter" pitchFamily="34" charset="-122"/>
                 <a:cs typeface="Inter" pitchFamily="34" charset="-120"/>
               </a:rPr>
-              <a:t>“Add to Claude Code context”</a:t>
+              <a:t>Inline diff review</a:t>
             </a:r>
             <a:endParaRPr lang="en-US" sz="1500" dirty="0"/>
           </a:p>
@@ -5614,13 +5169,13 @@
       </p:sp>
       <p:sp>
         <p:nvSpPr>
-          <p:cNvPr id="14" name="Text 9"/>
-          <p:cNvSpPr/>
-          <p:nvPr/>
-        </p:nvSpPr>
-        <p:spPr>
-          <a:xfrm>
-            <a:off x="1133856" y="3538728"/>
+          <p:cNvPr id="10" name="Text 6"/>
+          <p:cNvSpPr/>
+          <p:nvPr/>
+        </p:nvSpPr>
+        <p:spPr>
+          <a:xfrm>
+            <a:off x="1133856" y="2944368"/>
             <a:ext cx="7315200" cy="274320"/>
           </a:xfrm>
           <a:prstGeom prst="rect">
@@ -5633,7 +5188,7 @@
           <a:bodyPr wrap="square" lIns="0" tIns="0" rIns="0" bIns="0" rtlCol="0" anchor="ctr"/>
           <a:lstStyle/>
           <a:p>
-            <a:pPr indent="0" marL="0">
+            <a:pPr marL="0" indent="0">
               <a:buNone/>
             </a:pPr>
             <a:r>
@@ -5645,7 +5200,7 @@
                 <a:ea typeface="Inter" pitchFamily="34" charset="-122"/>
                 <a:cs typeface="Inter" pitchFamily="34" charset="-120"/>
               </a:rPr>
-              <a:t>Send a selection straight to the agent</a:t>
+              <a:t>Approve, reject, or modify each change</a:t>
             </a:r>
             <a:endParaRPr lang="en-US" sz="1250" dirty="0"/>
           </a:p>
@@ -5653,13 +5208,13 @@
       </p:sp>
       <p:sp>
         <p:nvSpPr>
-          <p:cNvPr id="15" name="Shape 10"/>
-          <p:cNvSpPr/>
-          <p:nvPr/>
-        </p:nvSpPr>
-        <p:spPr>
-          <a:xfrm>
-            <a:off x="566928" y="3886200"/>
+          <p:cNvPr id="11" name="Shape 7"/>
+          <p:cNvSpPr/>
+          <p:nvPr/>
+        </p:nvSpPr>
+        <p:spPr>
+          <a:xfrm>
+            <a:off x="566928" y="3291840"/>
             <a:ext cx="420624" cy="420624"/>
           </a:xfrm>
           <a:prstGeom prst="ellipse">
@@ -5670,10 +5225,17 @@
           </a:solidFill>
           <a:ln/>
         </p:spPr>
+        <p:txBody>
+          <a:bodyPr/>
+          <a:lstStyle/>
+          <a:p>
+            <a:endParaRPr lang="en-US"/>
+          </a:p>
+        </p:txBody>
       </p:sp>
       <p:pic>
         <p:nvPicPr>
-          <p:cNvPr id="16" name="Image 3" descr="preencoded.png">    </p:cNvPr>
+          <p:cNvPr id="12" name="Image 2" descr="preencoded.png"/>
           <p:cNvPicPr>
             <a:picLocks noChangeAspect="1"/>
           </p:cNvPicPr>
@@ -5687,6 +5249,135 @@
         </p:blipFill>
         <p:spPr>
           <a:xfrm>
+            <a:off x="676290" y="3401202"/>
+            <a:ext cx="201900" cy="201900"/>
+          </a:xfrm>
+          <a:prstGeom prst="rect">
+            <a:avLst/>
+          </a:prstGeom>
+        </p:spPr>
+      </p:pic>
+      <p:sp>
+        <p:nvSpPr>
+          <p:cNvPr id="13" name="Text 8"/>
+          <p:cNvSpPr/>
+          <p:nvPr/>
+        </p:nvSpPr>
+        <p:spPr>
+          <a:xfrm>
+            <a:off x="1133856" y="3255264"/>
+            <a:ext cx="7315200" cy="292608"/>
+          </a:xfrm>
+          <a:prstGeom prst="rect">
+            <a:avLst/>
+          </a:prstGeom>
+          <a:noFill/>
+          <a:ln/>
+        </p:spPr>
+        <p:txBody>
+          <a:bodyPr wrap="square" lIns="0" tIns="0" rIns="0" bIns="0" rtlCol="0" anchor="ctr"/>
+          <a:lstStyle/>
+          <a:p>
+            <a:pPr marL="0" indent="0">
+              <a:buNone/>
+            </a:pPr>
+            <a:r>
+              <a:rPr lang="en-US" sz="1500" b="1" dirty="0">
+                <a:solidFill>
+                  <a:srgbClr val="141413"/>
+                </a:solidFill>
+                <a:latin typeface="Inter" pitchFamily="34" charset="0"/>
+                <a:ea typeface="Inter" pitchFamily="34" charset="-122"/>
+                <a:cs typeface="Inter" pitchFamily="34" charset="-120"/>
+              </a:rPr>
+              <a:t>“Add to Claude Code context”</a:t>
+            </a:r>
+            <a:endParaRPr lang="en-US" sz="1500" dirty="0"/>
+          </a:p>
+        </p:txBody>
+      </p:sp>
+      <p:sp>
+        <p:nvSpPr>
+          <p:cNvPr id="14" name="Text 9"/>
+          <p:cNvSpPr/>
+          <p:nvPr/>
+        </p:nvSpPr>
+        <p:spPr>
+          <a:xfrm>
+            <a:off x="1133856" y="3538728"/>
+            <a:ext cx="7315200" cy="274320"/>
+          </a:xfrm>
+          <a:prstGeom prst="rect">
+            <a:avLst/>
+          </a:prstGeom>
+          <a:noFill/>
+          <a:ln/>
+        </p:spPr>
+        <p:txBody>
+          <a:bodyPr wrap="square" lIns="0" tIns="0" rIns="0" bIns="0" rtlCol="0" anchor="ctr"/>
+          <a:lstStyle/>
+          <a:p>
+            <a:pPr marL="0" indent="0">
+              <a:buNone/>
+            </a:pPr>
+            <a:r>
+              <a:rPr lang="en-US" sz="1250" dirty="0">
+                <a:solidFill>
+                  <a:srgbClr val="615C52"/>
+                </a:solidFill>
+                <a:latin typeface="Inter" pitchFamily="34" charset="0"/>
+                <a:ea typeface="Inter" pitchFamily="34" charset="-122"/>
+                <a:cs typeface="Inter" pitchFamily="34" charset="-120"/>
+              </a:rPr>
+              <a:t>Send a selection straight to the agent</a:t>
+            </a:r>
+            <a:endParaRPr lang="en-US" sz="1250" dirty="0"/>
+          </a:p>
+        </p:txBody>
+      </p:sp>
+      <p:sp>
+        <p:nvSpPr>
+          <p:cNvPr id="15" name="Shape 10"/>
+          <p:cNvSpPr/>
+          <p:nvPr/>
+        </p:nvSpPr>
+        <p:spPr>
+          <a:xfrm>
+            <a:off x="566928" y="3886200"/>
+            <a:ext cx="420624" cy="420624"/>
+          </a:xfrm>
+          <a:prstGeom prst="ellipse">
+            <a:avLst/>
+          </a:prstGeom>
+          <a:solidFill>
+            <a:srgbClr val="D97757"/>
+          </a:solidFill>
+          <a:ln/>
+        </p:spPr>
+        <p:txBody>
+          <a:bodyPr/>
+          <a:lstStyle/>
+          <a:p>
+            <a:endParaRPr lang="en-US"/>
+          </a:p>
+        </p:txBody>
+      </p:sp>
+      <p:pic>
+        <p:nvPicPr>
+          <p:cNvPr id="16" name="Image 3" descr="preencoded.png"/>
+          <p:cNvPicPr>
+            <a:picLocks noChangeAspect="1"/>
+          </p:cNvPicPr>
+          <p:nvPr/>
+        </p:nvPicPr>
+        <p:blipFill>
+          <a:blip r:embed="rId5"/>
+          <a:stretch>
+            <a:fillRect/>
+          </a:stretch>
+        </p:blipFill>
+        <p:spPr>
+          <a:xfrm>
             <a:off x="676290" y="3995562"/>
             <a:ext cx="201900" cy="201900"/>
           </a:xfrm>
@@ -5716,7 +5407,7 @@
           <a:bodyPr wrap="square" lIns="0" tIns="0" rIns="0" bIns="0" rtlCol="0" anchor="ctr"/>
           <a:lstStyle/>
           <a:p>
-            <a:pPr indent="0" marL="0">
+            <a:pPr marL="0" indent="0">
               <a:buNone/>
             </a:pPr>
             <a:r>
@@ -5755,7 +5446,7 @@
           <a:bodyPr wrap="square" lIns="0" tIns="0" rIns="0" bIns="0" rtlCol="0" anchor="ctr"/>
           <a:lstStyle/>
           <a:p>
-            <a:pPr indent="0" marL="0">
+            <a:pPr marL="0" indent="0">
               <a:buNone/>
             </a:pPr>
             <a:r>
@@ -5794,7 +5485,7 @@
           <a:bodyPr wrap="square" rtlCol="0" anchor="ctr"/>
           <a:lstStyle/>
           <a:p>
-            <a:pPr indent="0" marL="0">
+            <a:pPr marL="0" indent="0">
               <a:buNone/>
             </a:pPr>
             <a:r>
@@ -5833,7 +5524,7 @@
           <a:bodyPr wrap="square" rtlCol="0" anchor="ctr"/>
           <a:lstStyle/>
           <a:p>
-            <a:pPr algn="r" indent="0" marL="0">
+            <a:pPr marL="0" indent="0" algn="r">
               <a:buNone/>
             </a:pPr>
             <a:r>
@@ -5848,45 +5539,6 @@
               <a:t>Section 3  ·  4/12</a:t>
             </a:r>
             <a:endParaRPr lang="en-US" sz="900" dirty="0"/>
-          </a:p>
-        </p:txBody>
-      </p:sp>
-      <p:sp>
-        <p:nvSpPr>
-          <p:cNvPr id="21" name="Text 15"/>
-          <p:cNvSpPr/>
-          <p:nvPr/>
-        </p:nvSpPr>
-        <p:spPr>
-          <a:xfrm>
-            <a:off x="548640" y="4462272"/>
-            <a:ext cx="8046720" cy="274320"/>
-          </a:xfrm>
-          <a:prstGeom prst="rect">
-            <a:avLst/>
-          </a:prstGeom>
-          <a:noFill/>
-          <a:ln/>
-        </p:spPr>
-        <p:txBody>
-          <a:bodyPr wrap="square" lIns="0" tIns="0" rIns="0" bIns="0" rtlCol="0" anchor="ctr"/>
-          <a:lstStyle/>
-          <a:p>
-            <a:pPr indent="0" marL="0">
-              <a:buNone/>
-            </a:pPr>
-            <a:r>
-              <a:rPr lang="en-US" sz="1000" i="1" dirty="0">
-                <a:solidFill>
-                  <a:srgbClr val="615C52"/>
-                </a:solidFill>
-                <a:latin typeface="Inter" pitchFamily="34" charset="0"/>
-                <a:ea typeface="Inter" pitchFamily="34" charset="-122"/>
-                <a:cs typeface="Inter" pitchFamily="34" charset="-120"/>
-              </a:rPr>
-              <a:t>▸ The extension turns terminal approvals into native, clickable diff review.</a:t>
-            </a:r>
-            <a:endParaRPr lang="en-US" sz="1000" dirty="0"/>
           </a:p>
         </p:txBody>
       </p:sp>
@@ -5906,6 +5558,7 @@
         <a:solidFill>
           <a:srgbClr val="F0EEE6"/>
         </a:solidFill>
+        <a:effectLst/>
       </p:bgPr>
     </p:bg>
     <p:spTree>
@@ -5943,11 +5596,11 @@
           <a:bodyPr wrap="square" lIns="0" tIns="0" rIns="0" bIns="0" rtlCol="0" anchor="ctr"/>
           <a:lstStyle/>
           <a:p>
-            <a:pPr indent="0" marL="0">
-              <a:buNone/>
-            </a:pPr>
-            <a:r>
-              <a:rPr lang="en-US" sz="1100" b="1" spc="200" kern="0" dirty="0">
+            <a:pPr marL="0" indent="0">
+              <a:buNone/>
+            </a:pPr>
+            <a:r>
+              <a:rPr lang="en-US" sz="1100" b="1" kern="0" spc="200" dirty="0">
                 <a:solidFill>
                   <a:srgbClr val="D97757"/>
                 </a:solidFill>
@@ -5982,7 +5635,7 @@
           <a:bodyPr wrap="square" lIns="0" tIns="0" rIns="0" bIns="0" rtlCol="0" anchor="ctr"/>
           <a:lstStyle/>
           <a:p>
-            <a:pPr indent="0" marL="0">
+            <a:pPr marL="0" indent="0">
               <a:buNone/>
             </a:pPr>
             <a:r>
@@ -6002,80 +5655,7 @@
       </p:sp>
       <p:pic>
         <p:nvPicPr>
-          <p:cNvPr id="4" name="Image 0" descr="preencoded.png">    </p:cNvPr>
-          <p:cNvPicPr>
-            <a:picLocks noChangeAspect="1"/>
-          </p:cNvPicPr>
-          <p:nvPr/>
-        </p:nvPicPr>
-        <p:blipFill>
-          <a:blip r:embed="rId1"/>
-          <a:stretch>
-            <a:fillRect/>
-          </a:stretch>
-        </p:blipFill>
-        <p:spPr>
-          <a:xfrm>
-            <a:off x="8339328" y="402336"/>
-            <a:ext cx="310896" cy="310896"/>
-          </a:xfrm>
-          <a:prstGeom prst="rect">
-            <a:avLst/>
-          </a:prstGeom>
-        </p:spPr>
-      </p:pic>
-      <p:sp>
-        <p:nvSpPr>
-          <p:cNvPr id="5" name="Shape 2"/>
-          <p:cNvSpPr/>
-          <p:nvPr/>
-        </p:nvSpPr>
-        <p:spPr>
-          <a:xfrm>
-            <a:off x="548640" y="1417320"/>
-            <a:ext cx="3931920" cy="1371600"/>
-          </a:xfrm>
-          <a:prstGeom prst="roundRect">
-            <a:avLst>
-              <a:gd name="adj" fmla="val 6667"/>
-            </a:avLst>
-          </a:prstGeom>
-          <a:solidFill>
-            <a:srgbClr val="F4E4DC"/>
-          </a:solidFill>
-          <a:ln/>
-          <a:effectLst>
-            <a:outerShdw sx="100000" sy="100000" kx="0" ky="0" algn="bl" rotWithShape="0" blurRad="88900" dist="38100" dir="5400000">
-              <a:srgbClr val="000000">
-                <a:alpha val="10000"/>
-              </a:srgbClr>
-            </a:outerShdw>
-          </a:effectLst>
-        </p:spPr>
-      </p:sp>
-      <p:sp>
-        <p:nvSpPr>
-          <p:cNvPr id="6" name="Shape 3"/>
-          <p:cNvSpPr/>
-          <p:nvPr/>
-        </p:nvSpPr>
-        <p:spPr>
-          <a:xfrm>
-            <a:off x="804672" y="1673352"/>
-            <a:ext cx="548640" cy="548640"/>
-          </a:xfrm>
-          <a:prstGeom prst="ellipse">
-            <a:avLst/>
-          </a:prstGeom>
-          <a:solidFill>
-            <a:srgbClr val="D97757"/>
-          </a:solidFill>
-          <a:ln/>
-        </p:spPr>
-      </p:sp>
-      <p:pic>
-        <p:nvPicPr>
-          <p:cNvPr id="7" name="Image 1" descr="preencoded.png">    </p:cNvPr>
+          <p:cNvPr id="4" name="Image 0" descr="preencoded.png"/>
           <p:cNvPicPr>
             <a:picLocks noChangeAspect="1"/>
           </p:cNvPicPr>
@@ -6089,8 +5669,8 @@
         </p:blipFill>
         <p:spPr>
           <a:xfrm>
-            <a:off x="947318" y="1815998"/>
-            <a:ext cx="263347" cy="263347"/>
+            <a:off x="8339328" y="402336"/>
+            <a:ext cx="310896" cy="310896"/>
           </a:xfrm>
           <a:prstGeom prst="rect">
             <a:avLst/>
@@ -6099,131 +5679,50 @@
       </p:pic>
       <p:sp>
         <p:nvSpPr>
-          <p:cNvPr id="8" name="Text 4"/>
-          <p:cNvSpPr/>
-          <p:nvPr/>
-        </p:nvSpPr>
-        <p:spPr>
-          <a:xfrm>
-            <a:off x="1554480" y="1572768"/>
-            <a:ext cx="2743200" cy="365760"/>
-          </a:xfrm>
-          <a:prstGeom prst="rect">
-            <a:avLst/>
-          </a:prstGeom>
-          <a:noFill/>
-          <a:ln/>
-        </p:spPr>
-        <p:txBody>
-          <a:bodyPr wrap="square" lIns="0" tIns="0" rIns="0" bIns="0" rtlCol="0" anchor="ctr"/>
-          <a:lstStyle/>
-          <a:p>
-            <a:pPr indent="0" marL="0">
-              <a:buNone/>
-            </a:pPr>
-            <a:r>
-              <a:rPr lang="en-US" sz="2200" b="1" dirty="0">
-                <a:solidFill>
-                  <a:srgbClr val="141413"/>
-                </a:solidFill>
-                <a:latin typeface="Inter" pitchFamily="34" charset="0"/>
-                <a:ea typeface="Inter" pitchFamily="34" charset="-122"/>
-                <a:cs typeface="Inter" pitchFamily="34" charset="-120"/>
-              </a:rPr>
-              <a:t>Rider</a:t>
-            </a:r>
-            <a:endParaRPr lang="en-US" sz="2200" dirty="0"/>
-          </a:p>
-        </p:txBody>
-      </p:sp>
-      <p:sp>
-        <p:nvSpPr>
-          <p:cNvPr id="9" name="Text 5"/>
-          <p:cNvSpPr/>
-          <p:nvPr/>
-        </p:nvSpPr>
-        <p:spPr>
-          <a:xfrm>
-            <a:off x="1554480" y="1956816"/>
-            <a:ext cx="2743200" cy="640080"/>
-          </a:xfrm>
-          <a:prstGeom prst="rect">
-            <a:avLst/>
-          </a:prstGeom>
-          <a:noFill/>
-          <a:ln/>
-        </p:spPr>
-        <p:txBody>
-          <a:bodyPr wrap="square" lIns="0" tIns="0" rIns="0" bIns="0" rtlCol="0" anchor="t"/>
-          <a:lstStyle/>
-          <a:p>
-            <a:pPr indent="0" marL="0">
-              <a:buNone/>
-            </a:pPr>
-            <a:r>
-              <a:rPr lang="en-US" sz="1300" dirty="0">
-                <a:solidFill>
-                  <a:srgbClr val="141413"/>
-                </a:solidFill>
-                <a:latin typeface="Inter" pitchFamily="34" charset="0"/>
-                <a:ea typeface="Inter" pitchFamily="34" charset="-122"/>
-                <a:cs typeface="Inter" pitchFamily="34" charset="-120"/>
-              </a:rPr>
-              <a:t>Your .NET-native IDE — start here</a:t>
-            </a:r>
-            <a:endParaRPr lang="en-US" sz="1300" dirty="0"/>
-          </a:p>
-        </p:txBody>
-      </p:sp>
-      <p:sp>
-        <p:nvSpPr>
-          <p:cNvPr id="10" name="Text 6"/>
-          <p:cNvSpPr/>
-          <p:nvPr/>
-        </p:nvSpPr>
-        <p:spPr>
-          <a:xfrm>
-            <a:off x="822960" y="2487168"/>
-            <a:ext cx="3566160" cy="274320"/>
-          </a:xfrm>
-          <a:prstGeom prst="rect">
-            <a:avLst/>
-          </a:prstGeom>
-          <a:noFill/>
-          <a:ln/>
-        </p:spPr>
-        <p:txBody>
-          <a:bodyPr wrap="square" lIns="0" tIns="0" rIns="0" bIns="0" rtlCol="0" anchor="ctr"/>
-          <a:lstStyle/>
-          <a:p>
-            <a:pPr indent="0" marL="0">
-              <a:buNone/>
-            </a:pPr>
-            <a:r>
-              <a:rPr lang="en-US" sz="1200" i="1" dirty="0">
-                <a:solidFill>
-                  <a:srgbClr val="615C52"/>
-                </a:solidFill>
-                <a:latin typeface="Inter" pitchFamily="34" charset="0"/>
-                <a:ea typeface="Inter" pitchFamily="34" charset="-122"/>
-                <a:cs typeface="Inter" pitchFamily="34" charset="-120"/>
-              </a:rPr>
-              <a:t>Also: IntelliJ · PyCharm · WebStorm</a:t>
-            </a:r>
-            <a:endParaRPr lang="en-US" sz="1200" dirty="0"/>
-          </a:p>
-        </p:txBody>
-      </p:sp>
-      <p:sp>
-        <p:nvSpPr>
-          <p:cNvPr id="11" name="Shape 7"/>
-          <p:cNvSpPr/>
-          <p:nvPr/>
-        </p:nvSpPr>
-        <p:spPr>
-          <a:xfrm>
-            <a:off x="4800600" y="1481328"/>
-            <a:ext cx="420624" cy="420624"/>
+          <p:cNvPr id="5" name="Shape 2"/>
+          <p:cNvSpPr/>
+          <p:nvPr/>
+        </p:nvSpPr>
+        <p:spPr>
+          <a:xfrm>
+            <a:off x="548640" y="1417320"/>
+            <a:ext cx="3931920" cy="1371600"/>
+          </a:xfrm>
+          <a:prstGeom prst="roundRect">
+            <a:avLst>
+              <a:gd name="adj" fmla="val 6667"/>
+            </a:avLst>
+          </a:prstGeom>
+          <a:solidFill>
+            <a:srgbClr val="F4E4DC"/>
+          </a:solidFill>
+          <a:ln/>
+          <a:effectLst>
+            <a:outerShdw blurRad="88900" dist="38100" dir="5400000" algn="bl" rotWithShape="0">
+              <a:srgbClr val="000000">
+                <a:alpha val="10000"/>
+              </a:srgbClr>
+            </a:outerShdw>
+          </a:effectLst>
+        </p:spPr>
+        <p:txBody>
+          <a:bodyPr/>
+          <a:lstStyle/>
+          <a:p>
+            <a:endParaRPr lang="en-US"/>
+          </a:p>
+        </p:txBody>
+      </p:sp>
+      <p:sp>
+        <p:nvSpPr>
+          <p:cNvPr id="6" name="Shape 3"/>
+          <p:cNvSpPr/>
+          <p:nvPr/>
+        </p:nvSpPr>
+        <p:spPr>
+          <a:xfrm>
+            <a:off x="804672" y="1673352"/>
+            <a:ext cx="548640" cy="548640"/>
           </a:xfrm>
           <a:prstGeom prst="ellipse">
             <a:avLst/>
@@ -6233,10 +5732,17 @@
           </a:solidFill>
           <a:ln/>
         </p:spPr>
+        <p:txBody>
+          <a:bodyPr/>
+          <a:lstStyle/>
+          <a:p>
+            <a:endParaRPr lang="en-US"/>
+          </a:p>
+        </p:txBody>
       </p:sp>
       <p:pic>
         <p:nvPicPr>
-          <p:cNvPr id="12" name="Image 2" descr="preencoded.png">    </p:cNvPr>
+          <p:cNvPr id="7" name="Image 1" descr="preencoded.png"/>
           <p:cNvPicPr>
             <a:picLocks noChangeAspect="1"/>
           </p:cNvPicPr>
@@ -6250,8 +5756,8 @@
         </p:blipFill>
         <p:spPr>
           <a:xfrm>
-            <a:off x="4909962" y="1590690"/>
-            <a:ext cx="201900" cy="201900"/>
+            <a:off x="947318" y="1815998"/>
+            <a:ext cx="263347" cy="263347"/>
           </a:xfrm>
           <a:prstGeom prst="rect">
             <a:avLst/>
@@ -6260,30 +5766,30 @@
       </p:pic>
       <p:sp>
         <p:nvSpPr>
-          <p:cNvPr id="13" name="Text 8"/>
-          <p:cNvSpPr/>
-          <p:nvPr/>
-        </p:nvSpPr>
-        <p:spPr>
-          <a:xfrm>
-            <a:off x="5367528" y="1444752"/>
-            <a:ext cx="3108960" cy="292608"/>
-          </a:xfrm>
-          <a:prstGeom prst="rect">
-            <a:avLst/>
-          </a:prstGeom>
-          <a:noFill/>
-          <a:ln/>
-        </p:spPr>
-        <p:txBody>
-          <a:bodyPr wrap="square" lIns="0" tIns="0" rIns="0" bIns="0" rtlCol="0" anchor="ctr"/>
-          <a:lstStyle/>
-          <a:p>
-            <a:pPr indent="0" marL="0">
-              <a:buNone/>
-            </a:pPr>
-            <a:r>
-              <a:rPr lang="en-US" sz="1450" b="1" dirty="0">
+          <p:cNvPr id="8" name="Text 4"/>
+          <p:cNvSpPr/>
+          <p:nvPr/>
+        </p:nvSpPr>
+        <p:spPr>
+          <a:xfrm>
+            <a:off x="1554480" y="1572768"/>
+            <a:ext cx="2743200" cy="365760"/>
+          </a:xfrm>
+          <a:prstGeom prst="rect">
+            <a:avLst/>
+          </a:prstGeom>
+          <a:noFill/>
+          <a:ln/>
+        </p:spPr>
+        <p:txBody>
+          <a:bodyPr wrap="square" lIns="0" tIns="0" rIns="0" bIns="0" rtlCol="0" anchor="ctr"/>
+          <a:lstStyle/>
+          <a:p>
+            <a:pPr marL="0" indent="0">
+              <a:buNone/>
+            </a:pPr>
+            <a:r>
+              <a:rPr lang="en-US" sz="2200" b="1" dirty="0">
                 <a:solidFill>
                   <a:srgbClr val="141413"/>
                 </a:solidFill>
@@ -6291,38 +5797,77 @@
                 <a:ea typeface="Inter" pitchFamily="34" charset="-122"/>
                 <a:cs typeface="Inter" pitchFamily="34" charset="-120"/>
               </a:rPr>
-              <a:t>Install from Marketplace</a:t>
-            </a:r>
-            <a:endParaRPr lang="en-US" sz="1450" dirty="0"/>
-          </a:p>
-        </p:txBody>
-      </p:sp>
-      <p:sp>
-        <p:nvSpPr>
-          <p:cNvPr id="14" name="Text 9"/>
-          <p:cNvSpPr/>
-          <p:nvPr/>
-        </p:nvSpPr>
-        <p:spPr>
-          <a:xfrm>
-            <a:off x="5367528" y="1728216"/>
-            <a:ext cx="3200400" cy="274320"/>
-          </a:xfrm>
-          <a:prstGeom prst="rect">
-            <a:avLst/>
-          </a:prstGeom>
-          <a:noFill/>
-          <a:ln/>
-        </p:spPr>
-        <p:txBody>
-          <a:bodyPr wrap="square" lIns="0" tIns="0" rIns="0" bIns="0" rtlCol="0" anchor="ctr"/>
-          <a:lstStyle/>
-          <a:p>
-            <a:pPr indent="0" marL="0">
-              <a:buNone/>
-            </a:pPr>
-            <a:r>
-              <a:rPr lang="en-US" sz="1200" dirty="0">
+              <a:t>Rider</a:t>
+            </a:r>
+            <a:endParaRPr lang="en-US" sz="2200" dirty="0"/>
+          </a:p>
+        </p:txBody>
+      </p:sp>
+      <p:sp>
+        <p:nvSpPr>
+          <p:cNvPr id="9" name="Text 5"/>
+          <p:cNvSpPr/>
+          <p:nvPr/>
+        </p:nvSpPr>
+        <p:spPr>
+          <a:xfrm>
+            <a:off x="1554480" y="1956816"/>
+            <a:ext cx="2743200" cy="640080"/>
+          </a:xfrm>
+          <a:prstGeom prst="rect">
+            <a:avLst/>
+          </a:prstGeom>
+          <a:noFill/>
+          <a:ln/>
+        </p:spPr>
+        <p:txBody>
+          <a:bodyPr wrap="square" lIns="0" tIns="0" rIns="0" bIns="0" rtlCol="0" anchor="t"/>
+          <a:lstStyle/>
+          <a:p>
+            <a:pPr marL="0" indent="0">
+              <a:buNone/>
+            </a:pPr>
+            <a:r>
+              <a:rPr lang="en-US" sz="1300" dirty="0">
+                <a:solidFill>
+                  <a:srgbClr val="141413"/>
+                </a:solidFill>
+                <a:latin typeface="Inter" pitchFamily="34" charset="0"/>
+                <a:ea typeface="Inter" pitchFamily="34" charset="-122"/>
+                <a:cs typeface="Inter" pitchFamily="34" charset="-120"/>
+              </a:rPr>
+              <a:t>Your .NET-native IDE — start here</a:t>
+            </a:r>
+            <a:endParaRPr lang="en-US" sz="1300" dirty="0"/>
+          </a:p>
+        </p:txBody>
+      </p:sp>
+      <p:sp>
+        <p:nvSpPr>
+          <p:cNvPr id="10" name="Text 6"/>
+          <p:cNvSpPr/>
+          <p:nvPr/>
+        </p:nvSpPr>
+        <p:spPr>
+          <a:xfrm>
+            <a:off x="822960" y="2487168"/>
+            <a:ext cx="3566160" cy="274320"/>
+          </a:xfrm>
+          <a:prstGeom prst="rect">
+            <a:avLst/>
+          </a:prstGeom>
+          <a:noFill/>
+          <a:ln/>
+        </p:spPr>
+        <p:txBody>
+          <a:bodyPr wrap="square" lIns="0" tIns="0" rIns="0" bIns="0" rtlCol="0" anchor="ctr"/>
+          <a:lstStyle/>
+          <a:p>
+            <a:pPr marL="0" indent="0">
+              <a:buNone/>
+            </a:pPr>
+            <a:r>
+              <a:rPr lang="en-US" sz="1200" i="1" dirty="0">
                 <a:solidFill>
                   <a:srgbClr val="615C52"/>
                 </a:solidFill>
@@ -6330,7 +5875,7 @@
                 <a:ea typeface="Inter" pitchFamily="34" charset="-122"/>
                 <a:cs typeface="Inter" pitchFamily="34" charset="-120"/>
               </a:rPr>
-              <a:t>Search “Claude Code”</a:t>
+              <a:t>Also: IntelliJ · PyCharm · WebStorm</a:t>
             </a:r>
             <a:endParaRPr lang="en-US" sz="1200" dirty="0"/>
           </a:p>
@@ -6338,13 +5883,13 @@
       </p:sp>
       <p:sp>
         <p:nvSpPr>
-          <p:cNvPr id="15" name="Shape 10"/>
-          <p:cNvSpPr/>
-          <p:nvPr/>
-        </p:nvSpPr>
-        <p:spPr>
-          <a:xfrm>
-            <a:off x="4800600" y="2075688"/>
+          <p:cNvPr id="11" name="Shape 7"/>
+          <p:cNvSpPr/>
+          <p:nvPr/>
+        </p:nvSpPr>
+        <p:spPr>
+          <a:xfrm>
+            <a:off x="4800600" y="1481328"/>
             <a:ext cx="420624" cy="420624"/>
           </a:xfrm>
           <a:prstGeom prst="ellipse">
@@ -6355,10 +5900,17 @@
           </a:solidFill>
           <a:ln/>
         </p:spPr>
+        <p:txBody>
+          <a:bodyPr/>
+          <a:lstStyle/>
+          <a:p>
+            <a:endParaRPr lang="en-US"/>
+          </a:p>
+        </p:txBody>
       </p:sp>
       <p:pic>
         <p:nvPicPr>
-          <p:cNvPr id="16" name="Image 3" descr="preencoded.png">    </p:cNvPr>
+          <p:cNvPr id="12" name="Image 2" descr="preencoded.png"/>
           <p:cNvPicPr>
             <a:picLocks noChangeAspect="1"/>
           </p:cNvPicPr>
@@ -6372,7 +5924,7 @@
         </p:blipFill>
         <p:spPr>
           <a:xfrm>
-            <a:off x="4909962" y="2185050"/>
+            <a:off x="4909962" y="1590690"/>
             <a:ext cx="201900" cy="201900"/>
           </a:xfrm>
           <a:prstGeom prst="rect">
@@ -6382,13 +5934,13 @@
       </p:pic>
       <p:sp>
         <p:nvSpPr>
-          <p:cNvPr id="17" name="Text 11"/>
-          <p:cNvSpPr/>
-          <p:nvPr/>
-        </p:nvSpPr>
-        <p:spPr>
-          <a:xfrm>
-            <a:off x="5367528" y="2039112"/>
+          <p:cNvPr id="13" name="Text 8"/>
+          <p:cNvSpPr/>
+          <p:nvPr/>
+        </p:nvSpPr>
+        <p:spPr>
+          <a:xfrm>
+            <a:off x="5367528" y="1444752"/>
             <a:ext cx="3108960" cy="292608"/>
           </a:xfrm>
           <a:prstGeom prst="rect">
@@ -6401,7 +5953,7 @@
           <a:bodyPr wrap="square" lIns="0" tIns="0" rIns="0" bIns="0" rtlCol="0" anchor="ctr"/>
           <a:lstStyle/>
           <a:p>
-            <a:pPr indent="0" marL="0">
+            <a:pPr marL="0" indent="0">
               <a:buNone/>
             </a:pPr>
             <a:r>
@@ -6413,7 +5965,7 @@
                 <a:ea typeface="Inter" pitchFamily="34" charset="-122"/>
                 <a:cs typeface="Inter" pitchFamily="34" charset="-120"/>
               </a:rPr>
-              <a:t>JetBrains merge tool</a:t>
+              <a:t>Install from Marketplace</a:t>
             </a:r>
             <a:endParaRPr lang="en-US" sz="1450" dirty="0"/>
           </a:p>
@@ -6421,13 +5973,13 @@
       </p:sp>
       <p:sp>
         <p:nvSpPr>
-          <p:cNvPr id="18" name="Text 12"/>
-          <p:cNvSpPr/>
-          <p:nvPr/>
-        </p:nvSpPr>
-        <p:spPr>
-          <a:xfrm>
-            <a:off x="5367528" y="2322576"/>
+          <p:cNvPr id="14" name="Text 9"/>
+          <p:cNvSpPr/>
+          <p:nvPr/>
+        </p:nvSpPr>
+        <p:spPr>
+          <a:xfrm>
+            <a:off x="5367528" y="1728216"/>
             <a:ext cx="3200400" cy="274320"/>
           </a:xfrm>
           <a:prstGeom prst="rect">
@@ -6440,7 +5992,7 @@
           <a:bodyPr wrap="square" lIns="0" tIns="0" rIns="0" bIns="0" rtlCol="0" anchor="ctr"/>
           <a:lstStyle/>
           <a:p>
-            <a:pPr indent="0" marL="0">
+            <a:pPr marL="0" indent="0">
               <a:buNone/>
             </a:pPr>
             <a:r>
@@ -6452,7 +6004,7 @@
                 <a:ea typeface="Inter" pitchFamily="34" charset="-122"/>
                 <a:cs typeface="Inter" pitchFamily="34" charset="-120"/>
               </a:rPr>
-              <a:t>Used for reviewing diffs</a:t>
+              <a:t>Search “Claude Code”</a:t>
             </a:r>
             <a:endParaRPr lang="en-US" sz="1200" dirty="0"/>
           </a:p>
@@ -6460,13 +6012,13 @@
       </p:sp>
       <p:sp>
         <p:nvSpPr>
-          <p:cNvPr id="19" name="Shape 13"/>
-          <p:cNvSpPr/>
-          <p:nvPr/>
-        </p:nvSpPr>
-        <p:spPr>
-          <a:xfrm>
-            <a:off x="4800600" y="2670048"/>
+          <p:cNvPr id="15" name="Shape 10"/>
+          <p:cNvSpPr/>
+          <p:nvPr/>
+        </p:nvSpPr>
+        <p:spPr>
+          <a:xfrm>
+            <a:off x="4800600" y="2075688"/>
             <a:ext cx="420624" cy="420624"/>
           </a:xfrm>
           <a:prstGeom prst="ellipse">
@@ -6477,10 +6029,17 @@
           </a:solidFill>
           <a:ln/>
         </p:spPr>
+        <p:txBody>
+          <a:bodyPr/>
+          <a:lstStyle/>
+          <a:p>
+            <a:endParaRPr lang="en-US"/>
+          </a:p>
+        </p:txBody>
       </p:sp>
       <p:pic>
         <p:nvPicPr>
-          <p:cNvPr id="20" name="Image 4" descr="preencoded.png">    </p:cNvPr>
+          <p:cNvPr id="16" name="Image 3" descr="preencoded.png"/>
           <p:cNvPicPr>
             <a:picLocks noChangeAspect="1"/>
           </p:cNvPicPr>
@@ -6494,6 +6053,135 @@
         </p:blipFill>
         <p:spPr>
           <a:xfrm>
+            <a:off x="4909962" y="2185050"/>
+            <a:ext cx="201900" cy="201900"/>
+          </a:xfrm>
+          <a:prstGeom prst="rect">
+            <a:avLst/>
+          </a:prstGeom>
+        </p:spPr>
+      </p:pic>
+      <p:sp>
+        <p:nvSpPr>
+          <p:cNvPr id="17" name="Text 11"/>
+          <p:cNvSpPr/>
+          <p:nvPr/>
+        </p:nvSpPr>
+        <p:spPr>
+          <a:xfrm>
+            <a:off x="5367528" y="2039112"/>
+            <a:ext cx="3108960" cy="292608"/>
+          </a:xfrm>
+          <a:prstGeom prst="rect">
+            <a:avLst/>
+          </a:prstGeom>
+          <a:noFill/>
+          <a:ln/>
+        </p:spPr>
+        <p:txBody>
+          <a:bodyPr wrap="square" lIns="0" tIns="0" rIns="0" bIns="0" rtlCol="0" anchor="ctr"/>
+          <a:lstStyle/>
+          <a:p>
+            <a:pPr marL="0" indent="0">
+              <a:buNone/>
+            </a:pPr>
+            <a:r>
+              <a:rPr lang="en-US" sz="1450" b="1" dirty="0">
+                <a:solidFill>
+                  <a:srgbClr val="141413"/>
+                </a:solidFill>
+                <a:latin typeface="Inter" pitchFamily="34" charset="0"/>
+                <a:ea typeface="Inter" pitchFamily="34" charset="-122"/>
+                <a:cs typeface="Inter" pitchFamily="34" charset="-120"/>
+              </a:rPr>
+              <a:t>JetBrains merge tool</a:t>
+            </a:r>
+            <a:endParaRPr lang="en-US" sz="1450" dirty="0"/>
+          </a:p>
+        </p:txBody>
+      </p:sp>
+      <p:sp>
+        <p:nvSpPr>
+          <p:cNvPr id="18" name="Text 12"/>
+          <p:cNvSpPr/>
+          <p:nvPr/>
+        </p:nvSpPr>
+        <p:spPr>
+          <a:xfrm>
+            <a:off x="5367528" y="2322576"/>
+            <a:ext cx="3200400" cy="274320"/>
+          </a:xfrm>
+          <a:prstGeom prst="rect">
+            <a:avLst/>
+          </a:prstGeom>
+          <a:noFill/>
+          <a:ln/>
+        </p:spPr>
+        <p:txBody>
+          <a:bodyPr wrap="square" lIns="0" tIns="0" rIns="0" bIns="0" rtlCol="0" anchor="ctr"/>
+          <a:lstStyle/>
+          <a:p>
+            <a:pPr marL="0" indent="0">
+              <a:buNone/>
+            </a:pPr>
+            <a:r>
+              <a:rPr lang="en-US" sz="1200" dirty="0">
+                <a:solidFill>
+                  <a:srgbClr val="615C52"/>
+                </a:solidFill>
+                <a:latin typeface="Inter" pitchFamily="34" charset="0"/>
+                <a:ea typeface="Inter" pitchFamily="34" charset="-122"/>
+                <a:cs typeface="Inter" pitchFamily="34" charset="-120"/>
+              </a:rPr>
+              <a:t>Used for reviewing diffs</a:t>
+            </a:r>
+            <a:endParaRPr lang="en-US" sz="1200" dirty="0"/>
+          </a:p>
+        </p:txBody>
+      </p:sp>
+      <p:sp>
+        <p:nvSpPr>
+          <p:cNvPr id="19" name="Shape 13"/>
+          <p:cNvSpPr/>
+          <p:nvPr/>
+        </p:nvSpPr>
+        <p:spPr>
+          <a:xfrm>
+            <a:off x="4800600" y="2670048"/>
+            <a:ext cx="420624" cy="420624"/>
+          </a:xfrm>
+          <a:prstGeom prst="ellipse">
+            <a:avLst/>
+          </a:prstGeom>
+          <a:solidFill>
+            <a:srgbClr val="D97757"/>
+          </a:solidFill>
+          <a:ln/>
+        </p:spPr>
+        <p:txBody>
+          <a:bodyPr/>
+          <a:lstStyle/>
+          <a:p>
+            <a:endParaRPr lang="en-US"/>
+          </a:p>
+        </p:txBody>
+      </p:sp>
+      <p:pic>
+        <p:nvPicPr>
+          <p:cNvPr id="20" name="Image 4" descr="preencoded.png"/>
+          <p:cNvPicPr>
+            <a:picLocks noChangeAspect="1"/>
+          </p:cNvPicPr>
+          <p:nvPr/>
+        </p:nvPicPr>
+        <p:blipFill>
+          <a:blip r:embed="rId6"/>
+          <a:stretch>
+            <a:fillRect/>
+          </a:stretch>
+        </p:blipFill>
+        <p:spPr>
+          <a:xfrm>
             <a:off x="4909962" y="2779410"/>
             <a:ext cx="201900" cy="201900"/>
           </a:xfrm>
@@ -6523,7 +6211,7 @@
           <a:bodyPr wrap="square" lIns="0" tIns="0" rIns="0" bIns="0" rtlCol="0" anchor="ctr"/>
           <a:lstStyle/>
           <a:p>
-            <a:pPr indent="0" marL="0">
+            <a:pPr marL="0" indent="0">
               <a:buNone/>
             </a:pPr>
             <a:r>
@@ -6562,7 +6250,7 @@
           <a:bodyPr wrap="square" lIns="0" tIns="0" rIns="0" bIns="0" rtlCol="0" anchor="ctr"/>
           <a:lstStyle/>
           <a:p>
-            <a:pPr indent="0" marL="0">
+            <a:pPr marL="0" indent="0">
               <a:buNone/>
             </a:pPr>
             <a:r>
@@ -6606,6 +6294,13 @@
             <a:prstDash val="solid"/>
           </a:ln>
         </p:spPr>
+        <p:txBody>
+          <a:bodyPr/>
+          <a:lstStyle/>
+          <a:p>
+            <a:endParaRPr lang="en-US"/>
+          </a:p>
+        </p:txBody>
       </p:sp>
       <p:sp>
         <p:nvSpPr>
@@ -6628,7 +6323,7 @@
           <a:bodyPr wrap="square" lIns="0" tIns="0" rIns="0" bIns="0" rtlCol="0" anchor="ctr"/>
           <a:lstStyle/>
           <a:p>
-            <a:pPr indent="0" marL="0">
+            <a:pPr marL="0" indent="0">
               <a:buNone/>
             </a:pPr>
             <a:r>
@@ -6642,13 +6337,10 @@
               </a:rPr>
               <a:t>Same agent, same .claude/</a:t>
             </a:r>
-            <a:pPr indent="0" marL="0">
-              <a:buNone/>
-            </a:pPr>
             <a:endParaRPr lang="en-US" sz="1400" dirty="0"/>
           </a:p>
           <a:p>
-            <a:pPr indent="0" marL="0">
+            <a:pPr marL="0" indent="0">
               <a:buNone/>
             </a:pPr>
             <a:r>
@@ -6687,7 +6379,7 @@
           <a:bodyPr wrap="square" rtlCol="0" anchor="ctr"/>
           <a:lstStyle/>
           <a:p>
-            <a:pPr indent="0" marL="0">
+            <a:pPr marL="0" indent="0">
               <a:buNone/>
             </a:pPr>
             <a:r>
@@ -6726,7 +6418,7 @@
           <a:bodyPr wrap="square" rtlCol="0" anchor="ctr"/>
           <a:lstStyle/>
           <a:p>
-            <a:pPr algn="r" indent="0" marL="0">
+            <a:pPr marL="0" indent="0" algn="r">
               <a:buNone/>
             </a:pPr>
             <a:r>
@@ -6741,45 +6433,6 @@
               <a:t>Section 3  ·  5/12</a:t>
             </a:r>
             <a:endParaRPr lang="en-US" sz="900" dirty="0"/>
-          </a:p>
-        </p:txBody>
-      </p:sp>
-      <p:sp>
-        <p:nvSpPr>
-          <p:cNvPr id="27" name="Text 20"/>
-          <p:cNvSpPr/>
-          <p:nvPr/>
-        </p:nvSpPr>
-        <p:spPr>
-          <a:xfrm>
-            <a:off x="548640" y="4462272"/>
-            <a:ext cx="8046720" cy="274320"/>
-          </a:xfrm>
-          <a:prstGeom prst="rect">
-            <a:avLst/>
-          </a:prstGeom>
-          <a:noFill/>
-          <a:ln/>
-        </p:spPr>
-        <p:txBody>
-          <a:bodyPr wrap="square" lIns="0" tIns="0" rIns="0" bIns="0" rtlCol="0" anchor="ctr"/>
-          <a:lstStyle/>
-          <a:p>
-            <a:pPr indent="0" marL="0">
-              <a:buNone/>
-            </a:pPr>
-            <a:r>
-              <a:rPr lang="en-US" sz="1000" i="1" dirty="0">
-                <a:solidFill>
-                  <a:srgbClr val="615C52"/>
-                </a:solidFill>
-                <a:latin typeface="Inter" pitchFamily="34" charset="0"/>
-                <a:ea typeface="Inter" pitchFamily="34" charset="-122"/>
-                <a:cs typeface="Inter" pitchFamily="34" charset="-120"/>
-              </a:rPr>
-              <a:t>▸ Most of this room is in Rider — lead with it, mention the others briefly.</a:t>
-            </a:r>
-            <a:endParaRPr lang="en-US" sz="1000" dirty="0"/>
           </a:p>
         </p:txBody>
       </p:sp>
@@ -6799,6 +6452,7 @@
         <a:solidFill>
           <a:srgbClr val="F0EEE6"/>
         </a:solidFill>
+        <a:effectLst/>
       </p:bgPr>
     </p:bg>
     <p:spTree>
@@ -6836,11 +6490,11 @@
           <a:bodyPr wrap="square" lIns="0" tIns="0" rIns="0" bIns="0" rtlCol="0" anchor="ctr"/>
           <a:lstStyle/>
           <a:p>
-            <a:pPr indent="0" marL="0">
-              <a:buNone/>
-            </a:pPr>
-            <a:r>
-              <a:rPr lang="en-US" sz="1100" b="1" spc="200" kern="0" dirty="0">
+            <a:pPr marL="0" indent="0">
+              <a:buNone/>
+            </a:pPr>
+            <a:r>
+              <a:rPr lang="en-US" sz="1100" b="1" kern="0" spc="200" dirty="0">
                 <a:solidFill>
                   <a:srgbClr val="D97757"/>
                 </a:solidFill>
@@ -6875,7 +6529,7 @@
           <a:bodyPr wrap="square" lIns="0" tIns="0" rIns="0" bIns="0" rtlCol="0" anchor="ctr"/>
           <a:lstStyle/>
           <a:p>
-            <a:pPr indent="0" marL="0">
+            <a:pPr marL="0" indent="0">
               <a:buNone/>
             </a:pPr>
             <a:r>
@@ -6895,14 +6549,14 @@
       </p:sp>
       <p:pic>
         <p:nvPicPr>
-          <p:cNvPr id="4" name="Image 0" descr="preencoded.png">    </p:cNvPr>
+          <p:cNvPr id="4" name="Image 0" descr="preencoded.png"/>
           <p:cNvPicPr>
             <a:picLocks noChangeAspect="1"/>
           </p:cNvPicPr>
           <p:nvPr/>
         </p:nvPicPr>
         <p:blipFill>
-          <a:blip r:embed="rId1"/>
+          <a:blip r:embed="rId2"/>
           <a:stretch>
             <a:fillRect/>
           </a:stretch>
@@ -6943,6 +6597,13 @@
             <a:prstDash val="solid"/>
           </a:ln>
         </p:spPr>
+        <p:txBody>
+          <a:bodyPr/>
+          <a:lstStyle/>
+          <a:p>
+            <a:endParaRPr lang="en-US"/>
+          </a:p>
+        </p:txBody>
       </p:sp>
       <p:sp>
         <p:nvSpPr>
@@ -6963,17 +6624,24 @@
           </a:solidFill>
           <a:ln/>
         </p:spPr>
+        <p:txBody>
+          <a:bodyPr/>
+          <a:lstStyle/>
+          <a:p>
+            <a:endParaRPr lang="en-US"/>
+          </a:p>
+        </p:txBody>
       </p:sp>
       <p:pic>
         <p:nvPicPr>
-          <p:cNvPr id="7" name="Image 1" descr="preencoded.png">    </p:cNvPr>
+          <p:cNvPr id="7" name="Image 1" descr="preencoded.png"/>
           <p:cNvPicPr>
             <a:picLocks noChangeAspect="1"/>
           </p:cNvPicPr>
           <p:nvPr/>
         </p:nvPicPr>
         <p:blipFill>
-          <a:blip r:embed="rId2"/>
+          <a:blip r:embed="rId3"/>
           <a:stretch>
             <a:fillRect/>
           </a:stretch>
@@ -7009,7 +6677,7 @@
           <a:bodyPr wrap="square" lIns="0" tIns="0" rIns="0" bIns="0" rtlCol="0" anchor="ctr"/>
           <a:lstStyle/>
           <a:p>
-            <a:pPr indent="0" marL="0">
+            <a:pPr marL="0" indent="0">
               <a:buNone/>
             </a:pPr>
             <a:r>
@@ -7048,7 +6716,7 @@
           <a:bodyPr wrap="square" lIns="0" tIns="0" rIns="0" bIns="0" rtlCol="0" anchor="ctr"/>
           <a:lstStyle/>
           <a:p>
-            <a:pPr indent="0" marL="0">
+            <a:pPr marL="0" indent="0">
               <a:buNone/>
             </a:pPr>
             <a:r>
@@ -7092,6 +6760,13 @@
             <a:prstDash val="solid"/>
           </a:ln>
         </p:spPr>
+        <p:txBody>
+          <a:bodyPr/>
+          <a:lstStyle/>
+          <a:p>
+            <a:endParaRPr lang="en-US"/>
+          </a:p>
+        </p:txBody>
       </p:sp>
       <p:sp>
         <p:nvSpPr>
@@ -7112,17 +6787,24 @@
           </a:solidFill>
           <a:ln/>
         </p:spPr>
+        <p:txBody>
+          <a:bodyPr/>
+          <a:lstStyle/>
+          <a:p>
+            <a:endParaRPr lang="en-US"/>
+          </a:p>
+        </p:txBody>
       </p:sp>
       <p:pic>
         <p:nvPicPr>
-          <p:cNvPr id="12" name="Image 2" descr="preencoded.png">    </p:cNvPr>
+          <p:cNvPr id="12" name="Image 2" descr="preencoded.png"/>
           <p:cNvPicPr>
             <a:picLocks noChangeAspect="1"/>
           </p:cNvPicPr>
           <p:nvPr/>
         </p:nvPicPr>
         <p:blipFill>
-          <a:blip r:embed="rId3"/>
+          <a:blip r:embed="rId4"/>
           <a:stretch>
             <a:fillRect/>
           </a:stretch>
@@ -7158,7 +6840,7 @@
           <a:bodyPr wrap="square" lIns="0" tIns="0" rIns="0" bIns="0" rtlCol="0" anchor="ctr"/>
           <a:lstStyle/>
           <a:p>
-            <a:pPr indent="0" marL="0">
+            <a:pPr marL="0" indent="0">
               <a:buNone/>
             </a:pPr>
             <a:r>
@@ -7197,7 +6879,7 @@
           <a:bodyPr wrap="square" lIns="0" tIns="0" rIns="0" bIns="0" rtlCol="0" anchor="ctr"/>
           <a:lstStyle/>
           <a:p>
-            <a:pPr indent="0" marL="0">
+            <a:pPr marL="0" indent="0">
               <a:buNone/>
             </a:pPr>
             <a:r>
@@ -7241,6 +6923,13 @@
             <a:prstDash val="solid"/>
           </a:ln>
         </p:spPr>
+        <p:txBody>
+          <a:bodyPr/>
+          <a:lstStyle/>
+          <a:p>
+            <a:endParaRPr lang="en-US"/>
+          </a:p>
+        </p:txBody>
       </p:sp>
       <p:sp>
         <p:nvSpPr>
@@ -7261,17 +6950,24 @@
           </a:solidFill>
           <a:ln/>
         </p:spPr>
+        <p:txBody>
+          <a:bodyPr/>
+          <a:lstStyle/>
+          <a:p>
+            <a:endParaRPr lang="en-US"/>
+          </a:p>
+        </p:txBody>
       </p:sp>
       <p:pic>
         <p:nvPicPr>
-          <p:cNvPr id="17" name="Image 3" descr="preencoded.png">    </p:cNvPr>
+          <p:cNvPr id="17" name="Image 3" descr="preencoded.png"/>
           <p:cNvPicPr>
             <a:picLocks noChangeAspect="1"/>
           </p:cNvPicPr>
           <p:nvPr/>
         </p:nvPicPr>
         <p:blipFill>
-          <a:blip r:embed="rId4"/>
+          <a:blip r:embed="rId5"/>
           <a:stretch>
             <a:fillRect/>
           </a:stretch>
@@ -7307,7 +7003,7 @@
           <a:bodyPr wrap="square" lIns="0" tIns="0" rIns="0" bIns="0" rtlCol="0" anchor="ctr"/>
           <a:lstStyle/>
           <a:p>
-            <a:pPr indent="0" marL="0">
+            <a:pPr marL="0" indent="0">
               <a:buNone/>
             </a:pPr>
             <a:r>
@@ -7346,7 +7042,7 @@
           <a:bodyPr wrap="square" lIns="0" tIns="0" rIns="0" bIns="0" rtlCol="0" anchor="ctr"/>
           <a:lstStyle/>
           <a:p>
-            <a:pPr indent="0" marL="0">
+            <a:pPr marL="0" indent="0">
               <a:buNone/>
             </a:pPr>
             <a:r>
@@ -7390,6 +7086,13 @@
             <a:prstDash val="solid"/>
           </a:ln>
         </p:spPr>
+        <p:txBody>
+          <a:bodyPr/>
+          <a:lstStyle/>
+          <a:p>
+            <a:endParaRPr lang="en-US"/>
+          </a:p>
+        </p:txBody>
       </p:sp>
       <p:sp>
         <p:nvSpPr>
@@ -7410,17 +7113,24 @@
           </a:solidFill>
           <a:ln/>
         </p:spPr>
+        <p:txBody>
+          <a:bodyPr/>
+          <a:lstStyle/>
+          <a:p>
+            <a:endParaRPr lang="en-US"/>
+          </a:p>
+        </p:txBody>
       </p:sp>
       <p:pic>
         <p:nvPicPr>
-          <p:cNvPr id="22" name="Image 4" descr="preencoded.png">    </p:cNvPr>
+          <p:cNvPr id="22" name="Image 4" descr="preencoded.png"/>
           <p:cNvPicPr>
             <a:picLocks noChangeAspect="1"/>
           </p:cNvPicPr>
           <p:nvPr/>
         </p:nvPicPr>
         <p:blipFill>
-          <a:blip r:embed="rId5"/>
+          <a:blip r:embed="rId6"/>
           <a:stretch>
             <a:fillRect/>
           </a:stretch>
@@ -7456,7 +7166,7 @@
           <a:bodyPr wrap="square" lIns="0" tIns="0" rIns="0" bIns="0" rtlCol="0" anchor="ctr"/>
           <a:lstStyle/>
           <a:p>
-            <a:pPr indent="0" marL="0">
+            <a:pPr marL="0" indent="0">
               <a:buNone/>
             </a:pPr>
             <a:r>
@@ -7495,7 +7205,7 @@
           <a:bodyPr wrap="square" lIns="0" tIns="0" rIns="0" bIns="0" rtlCol="0" anchor="ctr"/>
           <a:lstStyle/>
           <a:p>
-            <a:pPr indent="0" marL="0">
+            <a:pPr marL="0" indent="0">
               <a:buNone/>
             </a:pPr>
             <a:r>
@@ -7539,6 +7249,13 @@
             <a:prstDash val="solid"/>
           </a:ln>
         </p:spPr>
+        <p:txBody>
+          <a:bodyPr/>
+          <a:lstStyle/>
+          <a:p>
+            <a:endParaRPr lang="en-US"/>
+          </a:p>
+        </p:txBody>
       </p:sp>
       <p:sp>
         <p:nvSpPr>
@@ -7559,17 +7276,24 @@
           </a:solidFill>
           <a:ln/>
         </p:spPr>
+        <p:txBody>
+          <a:bodyPr/>
+          <a:lstStyle/>
+          <a:p>
+            <a:endParaRPr lang="en-US"/>
+          </a:p>
+        </p:txBody>
       </p:sp>
       <p:pic>
         <p:nvPicPr>
-          <p:cNvPr id="27" name="Image 5" descr="preencoded.png">    </p:cNvPr>
+          <p:cNvPr id="27" name="Image 5" descr="preencoded.png"/>
           <p:cNvPicPr>
             <a:picLocks noChangeAspect="1"/>
           </p:cNvPicPr>
           <p:nvPr/>
         </p:nvPicPr>
         <p:blipFill>
-          <a:blip r:embed="rId6"/>
+          <a:blip r:embed="rId7"/>
           <a:stretch>
             <a:fillRect/>
           </a:stretch>
@@ -7605,7 +7329,7 @@
           <a:bodyPr wrap="square" lIns="0" tIns="0" rIns="0" bIns="0" rtlCol="0" anchor="ctr"/>
           <a:lstStyle/>
           <a:p>
-            <a:pPr indent="0" marL="0">
+            <a:pPr marL="0" indent="0">
               <a:buNone/>
             </a:pPr>
             <a:r>
@@ -7644,7 +7368,7 @@
           <a:bodyPr wrap="square" lIns="0" tIns="0" rIns="0" bIns="0" rtlCol="0" anchor="ctr"/>
           <a:lstStyle/>
           <a:p>
-            <a:pPr indent="0" marL="0">
+            <a:pPr marL="0" indent="0">
               <a:buNone/>
             </a:pPr>
             <a:r>
@@ -7683,7 +7407,7 @@
           <a:bodyPr wrap="square" rtlCol="0" anchor="ctr"/>
           <a:lstStyle/>
           <a:p>
-            <a:pPr indent="0" marL="0">
+            <a:pPr marL="0" indent="0">
               <a:buNone/>
             </a:pPr>
             <a:r>
@@ -7722,7 +7446,7 @@
           <a:bodyPr wrap="square" rtlCol="0" anchor="ctr"/>
           <a:lstStyle/>
           <a:p>
-            <a:pPr algn="r" indent="0" marL="0">
+            <a:pPr marL="0" indent="0" algn="r">
               <a:buNone/>
             </a:pPr>
             <a:r>
@@ -7737,45 +7461,6 @@
               <a:t>Section 3  ·  6/12</a:t>
             </a:r>
             <a:endParaRPr lang="en-US" sz="900" dirty="0"/>
-          </a:p>
-        </p:txBody>
-      </p:sp>
-      <p:sp>
-        <p:nvSpPr>
-          <p:cNvPr id="32" name="Text 24"/>
-          <p:cNvSpPr/>
-          <p:nvPr/>
-        </p:nvSpPr>
-        <p:spPr>
-          <a:xfrm>
-            <a:off x="548640" y="4462272"/>
-            <a:ext cx="8046720" cy="274320"/>
-          </a:xfrm>
-          <a:prstGeom prst="rect">
-            <a:avLst/>
-          </a:prstGeom>
-          <a:noFill/>
-          <a:ln/>
-        </p:spPr>
-        <p:txBody>
-          <a:bodyPr wrap="square" lIns="0" tIns="0" rIns="0" bIns="0" rtlCol="0" anchor="ctr"/>
-          <a:lstStyle/>
-          <a:p>
-            <a:pPr indent="0" marL="0">
-              <a:buNone/>
-            </a:pPr>
-            <a:r>
-              <a:rPr lang="en-US" sz="1000" i="1" dirty="0">
-                <a:solidFill>
-                  <a:srgbClr val="615C52"/>
-                </a:solidFill>
-                <a:latin typeface="Inter" pitchFamily="34" charset="0"/>
-                <a:ea typeface="Inter" pitchFamily="34" charset="-122"/>
-                <a:cs typeface="Inter" pitchFamily="34" charset="-120"/>
-              </a:rPr>
-              <a:t>▸ Plan mode is the safety valve — use it before anything large or destructive.</a:t>
-            </a:r>
-            <a:endParaRPr lang="en-US" sz="1000" dirty="0"/>
           </a:p>
         </p:txBody>
       </p:sp>
@@ -7795,6 +7480,7 @@
         <a:solidFill>
           <a:srgbClr val="F0EEE6"/>
         </a:solidFill>
+        <a:effectLst/>
       </p:bgPr>
     </p:bg>
     <p:spTree>
@@ -7832,11 +7518,11 @@
           <a:bodyPr wrap="square" lIns="0" tIns="0" rIns="0" bIns="0" rtlCol="0" anchor="ctr"/>
           <a:lstStyle/>
           <a:p>
-            <a:pPr indent="0" marL="0">
-              <a:buNone/>
-            </a:pPr>
-            <a:r>
-              <a:rPr lang="en-US" sz="1100" b="1" spc="200" kern="0" dirty="0">
+            <a:pPr marL="0" indent="0">
+              <a:buNone/>
+            </a:pPr>
+            <a:r>
+              <a:rPr lang="en-US" sz="1100" b="1" kern="0" spc="200" dirty="0">
                 <a:solidFill>
                   <a:srgbClr val="D97757"/>
                 </a:solidFill>
@@ -7871,7 +7557,7 @@
           <a:bodyPr wrap="square" lIns="0" tIns="0" rIns="0" bIns="0" rtlCol="0" anchor="ctr"/>
           <a:lstStyle/>
           <a:p>
-            <a:pPr indent="0" marL="0">
+            <a:pPr marL="0" indent="0">
               <a:buNone/>
             </a:pPr>
             <a:r>
@@ -7891,73 +7577,7 @@
       </p:sp>
       <p:pic>
         <p:nvPicPr>
-          <p:cNvPr id="4" name="Image 0" descr="preencoded.png">    </p:cNvPr>
-          <p:cNvPicPr>
-            <a:picLocks noChangeAspect="1"/>
-          </p:cNvPicPr>
-          <p:nvPr/>
-        </p:nvPicPr>
-        <p:blipFill>
-          <a:blip r:embed="rId1"/>
-          <a:stretch>
-            <a:fillRect/>
-          </a:stretch>
-        </p:blipFill>
-        <p:spPr>
-          <a:xfrm>
-            <a:off x="8339328" y="402336"/>
-            <a:ext cx="310896" cy="310896"/>
-          </a:xfrm>
-          <a:prstGeom prst="rect">
-            <a:avLst/>
-          </a:prstGeom>
-        </p:spPr>
-      </p:pic>
-      <p:sp>
-        <p:nvSpPr>
-          <p:cNvPr id="5" name="Shape 2"/>
-          <p:cNvSpPr/>
-          <p:nvPr/>
-        </p:nvSpPr>
-        <p:spPr>
-          <a:xfrm>
-            <a:off x="548640" y="1554480"/>
-            <a:ext cx="8046720" cy="914400"/>
-          </a:xfrm>
-          <a:prstGeom prst="roundRect">
-            <a:avLst>
-              <a:gd name="adj" fmla="val 10000"/>
-            </a:avLst>
-          </a:prstGeom>
-          <a:solidFill>
-            <a:srgbClr val="F4E4DC"/>
-          </a:solidFill>
-          <a:ln/>
-        </p:spPr>
-      </p:sp>
-      <p:sp>
-        <p:nvSpPr>
-          <p:cNvPr id="6" name="Shape 3"/>
-          <p:cNvSpPr/>
-          <p:nvPr/>
-        </p:nvSpPr>
-        <p:spPr>
-          <a:xfrm>
-            <a:off x="822960" y="1783080"/>
-            <a:ext cx="457200" cy="457200"/>
-          </a:xfrm>
-          <a:prstGeom prst="ellipse">
-            <a:avLst/>
-          </a:prstGeom>
-          <a:solidFill>
-            <a:srgbClr val="D97757"/>
-          </a:solidFill>
-          <a:ln/>
-        </p:spPr>
-      </p:sp>
-      <p:pic>
-        <p:nvPicPr>
-          <p:cNvPr id="7" name="Image 1" descr="preencoded.png">    </p:cNvPr>
+          <p:cNvPr id="4" name="Image 0" descr="preencoded.png"/>
           <p:cNvPicPr>
             <a:picLocks noChangeAspect="1"/>
           </p:cNvPicPr>
@@ -7971,6 +7591,86 @@
         </p:blipFill>
         <p:spPr>
           <a:xfrm>
+            <a:off x="8339328" y="402336"/>
+            <a:ext cx="310896" cy="310896"/>
+          </a:xfrm>
+          <a:prstGeom prst="rect">
+            <a:avLst/>
+          </a:prstGeom>
+        </p:spPr>
+      </p:pic>
+      <p:sp>
+        <p:nvSpPr>
+          <p:cNvPr id="5" name="Shape 2"/>
+          <p:cNvSpPr/>
+          <p:nvPr/>
+        </p:nvSpPr>
+        <p:spPr>
+          <a:xfrm>
+            <a:off x="548640" y="1554480"/>
+            <a:ext cx="8046720" cy="914400"/>
+          </a:xfrm>
+          <a:prstGeom prst="roundRect">
+            <a:avLst>
+              <a:gd name="adj" fmla="val 10000"/>
+            </a:avLst>
+          </a:prstGeom>
+          <a:solidFill>
+            <a:srgbClr val="F4E4DC"/>
+          </a:solidFill>
+          <a:ln/>
+        </p:spPr>
+        <p:txBody>
+          <a:bodyPr/>
+          <a:lstStyle/>
+          <a:p>
+            <a:endParaRPr lang="en-US"/>
+          </a:p>
+        </p:txBody>
+      </p:sp>
+      <p:sp>
+        <p:nvSpPr>
+          <p:cNvPr id="6" name="Shape 3"/>
+          <p:cNvSpPr/>
+          <p:nvPr/>
+        </p:nvSpPr>
+        <p:spPr>
+          <a:xfrm>
+            <a:off x="822960" y="1783080"/>
+            <a:ext cx="457200" cy="457200"/>
+          </a:xfrm>
+          <a:prstGeom prst="ellipse">
+            <a:avLst/>
+          </a:prstGeom>
+          <a:solidFill>
+            <a:srgbClr val="D97757"/>
+          </a:solidFill>
+          <a:ln/>
+        </p:spPr>
+        <p:txBody>
+          <a:bodyPr/>
+          <a:lstStyle/>
+          <a:p>
+            <a:endParaRPr lang="en-US"/>
+          </a:p>
+        </p:txBody>
+      </p:sp>
+      <p:pic>
+        <p:nvPicPr>
+          <p:cNvPr id="7" name="Image 1" descr="preencoded.png"/>
+          <p:cNvPicPr>
+            <a:picLocks noChangeAspect="1"/>
+          </p:cNvPicPr>
+          <p:nvPr/>
+        </p:nvPicPr>
+        <p:blipFill>
+          <a:blip r:embed="rId3"/>
+          <a:stretch>
+            <a:fillRect/>
+          </a:stretch>
+        </p:blipFill>
+        <p:spPr>
+          <a:xfrm>
             <a:off x="941832" y="1901952"/>
             <a:ext cx="219456" cy="219456"/>
           </a:xfrm>
@@ -8000,7 +7700,7 @@
           <a:bodyPr wrap="square" lIns="0" tIns="0" rIns="0" bIns="0" rtlCol="0" anchor="ctr"/>
           <a:lstStyle/>
           <a:p>
-            <a:pPr indent="0" marL="0">
+            <a:pPr marL="0" indent="0">
               <a:buNone/>
             </a:pPr>
             <a:r>
@@ -8044,13 +7744,20 @@
             <a:prstDash val="solid"/>
           </a:ln>
           <a:effectLst>
-            <a:outerShdw sx="100000" sy="100000" kx="0" ky="0" algn="bl" rotWithShape="0" blurRad="88900" dist="38100" dir="5400000">
+            <a:outerShdw blurRad="88900" dist="38100" dir="5400000" algn="bl" rotWithShape="0">
               <a:srgbClr val="000000">
                 <a:alpha val="10000"/>
               </a:srgbClr>
             </a:outerShdw>
           </a:effectLst>
         </p:spPr>
+        <p:txBody>
+          <a:bodyPr/>
+          <a:lstStyle/>
+          <a:p>
+            <a:endParaRPr lang="en-US"/>
+          </a:p>
+        </p:txBody>
       </p:sp>
       <p:sp>
         <p:nvSpPr>
@@ -8071,17 +7778,24 @@
           </a:solidFill>
           <a:ln/>
         </p:spPr>
+        <p:txBody>
+          <a:bodyPr/>
+          <a:lstStyle/>
+          <a:p>
+            <a:endParaRPr lang="en-US"/>
+          </a:p>
+        </p:txBody>
       </p:sp>
       <p:pic>
         <p:nvPicPr>
-          <p:cNvPr id="11" name="Image 2" descr="preencoded.png">    </p:cNvPr>
+          <p:cNvPr id="11" name="Image 2" descr="preencoded.png"/>
           <p:cNvPicPr>
             <a:picLocks noChangeAspect="1"/>
           </p:cNvPicPr>
           <p:nvPr/>
         </p:nvPicPr>
         <p:blipFill>
-          <a:blip r:embed="rId3"/>
+          <a:blip r:embed="rId4"/>
           <a:stretch>
             <a:fillRect/>
           </a:stretch>
@@ -8117,7 +7831,7 @@
           <a:bodyPr wrap="square" lIns="0" tIns="0" rIns="0" bIns="0" rtlCol="0" anchor="ctr"/>
           <a:lstStyle/>
           <a:p>
-            <a:pPr indent="0" marL="0">
+            <a:pPr marL="0" indent="0">
               <a:buNone/>
             </a:pPr>
             <a:r>
@@ -8156,7 +7870,7 @@
           <a:bodyPr wrap="square" lIns="0" tIns="0" rIns="0" bIns="0" rtlCol="0" anchor="ctr"/>
           <a:lstStyle/>
           <a:p>
-            <a:pPr indent="0" marL="0">
+            <a:pPr marL="0" indent="0">
               <a:buNone/>
             </a:pPr>
             <a:r>
@@ -8200,13 +7914,20 @@
             <a:prstDash val="solid"/>
           </a:ln>
           <a:effectLst>
-            <a:outerShdw sx="100000" sy="100000" kx="0" ky="0" algn="bl" rotWithShape="0" blurRad="88900" dist="38100" dir="5400000">
+            <a:outerShdw blurRad="88900" dist="38100" dir="5400000" algn="bl" rotWithShape="0">
               <a:srgbClr val="000000">
                 <a:alpha val="10000"/>
               </a:srgbClr>
             </a:outerShdw>
           </a:effectLst>
         </p:spPr>
+        <p:txBody>
+          <a:bodyPr/>
+          <a:lstStyle/>
+          <a:p>
+            <a:endParaRPr lang="en-US"/>
+          </a:p>
+        </p:txBody>
       </p:sp>
       <p:sp>
         <p:nvSpPr>
@@ -8227,17 +7948,24 @@
           </a:solidFill>
           <a:ln/>
         </p:spPr>
+        <p:txBody>
+          <a:bodyPr/>
+          <a:lstStyle/>
+          <a:p>
+            <a:endParaRPr lang="en-US"/>
+          </a:p>
+        </p:txBody>
       </p:sp>
       <p:pic>
         <p:nvPicPr>
-          <p:cNvPr id="16" name="Image 3" descr="preencoded.png">    </p:cNvPr>
+          <p:cNvPr id="16" name="Image 3" descr="preencoded.png"/>
           <p:cNvPicPr>
             <a:picLocks noChangeAspect="1"/>
           </p:cNvPicPr>
           <p:nvPr/>
         </p:nvPicPr>
         <p:blipFill>
-          <a:blip r:embed="rId4"/>
+          <a:blip r:embed="rId5"/>
           <a:stretch>
             <a:fillRect/>
           </a:stretch>
@@ -8273,7 +8001,7 @@
           <a:bodyPr wrap="square" lIns="0" tIns="0" rIns="0" bIns="0" rtlCol="0" anchor="ctr"/>
           <a:lstStyle/>
           <a:p>
-            <a:pPr indent="0" marL="0">
+            <a:pPr marL="0" indent="0">
               <a:buNone/>
             </a:pPr>
             <a:r>
@@ -8312,7 +8040,7 @@
           <a:bodyPr wrap="square" lIns="0" tIns="0" rIns="0" bIns="0" rtlCol="0" anchor="ctr"/>
           <a:lstStyle/>
           <a:p>
-            <a:pPr indent="0" marL="0">
+            <a:pPr marL="0" indent="0">
               <a:buNone/>
             </a:pPr>
             <a:r>
@@ -8351,7 +8079,7 @@
           <a:bodyPr wrap="square" rtlCol="0" anchor="ctr"/>
           <a:lstStyle/>
           <a:p>
-            <a:pPr indent="0" marL="0">
+            <a:pPr marL="0" indent="0">
               <a:buNone/>
             </a:pPr>
             <a:r>
@@ -8390,7 +8118,7 @@
           <a:bodyPr wrap="square" rtlCol="0" anchor="ctr"/>
           <a:lstStyle/>
           <a:p>
-            <a:pPr algn="r" indent="0" marL="0">
+            <a:pPr marL="0" indent="0" algn="r">
               <a:buNone/>
             </a:pPr>
             <a:r>
@@ -8405,45 +8133,6 @@
               <a:t>Section 3  ·  7/12</a:t>
             </a:r>
             <a:endParaRPr lang="en-US" sz="900" dirty="0"/>
-          </a:p>
-        </p:txBody>
-      </p:sp>
-      <p:sp>
-        <p:nvSpPr>
-          <p:cNvPr id="21" name="Text 15"/>
-          <p:cNvSpPr/>
-          <p:nvPr/>
-        </p:nvSpPr>
-        <p:spPr>
-          <a:xfrm>
-            <a:off x="548640" y="4462272"/>
-            <a:ext cx="8046720" cy="274320"/>
-          </a:xfrm>
-          <a:prstGeom prst="rect">
-            <a:avLst/>
-          </a:prstGeom>
-          <a:noFill/>
-          <a:ln/>
-        </p:spPr>
-        <p:txBody>
-          <a:bodyPr wrap="square" lIns="0" tIns="0" rIns="0" bIns="0" rtlCol="0" anchor="ctr"/>
-          <a:lstStyle/>
-          <a:p>
-            <a:pPr indent="0" marL="0">
-              <a:buNone/>
-            </a:pPr>
-            <a:r>
-              <a:rPr lang="en-US" sz="1000" i="1" dirty="0">
-                <a:solidFill>
-                  <a:srgbClr val="615C52"/>
-                </a:solidFill>
-                <a:latin typeface="Inter" pitchFamily="34" charset="0"/>
-                <a:ea typeface="Inter" pitchFamily="34" charset="-122"/>
-                <a:cs typeface="Inter" pitchFamily="34" charset="-120"/>
-              </a:rPr>
-              <a:t>▸ Same task, two surfaces — the only difference they'll feel is the review UI.</a:t>
-            </a:r>
-            <a:endParaRPr lang="en-US" sz="1000" dirty="0"/>
           </a:p>
         </p:txBody>
       </p:sp>
@@ -8463,6 +8152,7 @@
         <a:solidFill>
           <a:srgbClr val="F0EEE6"/>
         </a:solidFill>
+        <a:effectLst/>
       </p:bgPr>
     </p:bg>
     <p:spTree>
@@ -8500,11 +8190,11 @@
           <a:bodyPr wrap="square" lIns="0" tIns="0" rIns="0" bIns="0" rtlCol="0" anchor="ctr"/>
           <a:lstStyle/>
           <a:p>
-            <a:pPr indent="0" marL="0">
-              <a:buNone/>
-            </a:pPr>
-            <a:r>
-              <a:rPr lang="en-US" sz="1100" b="1" spc="200" kern="0" dirty="0">
+            <a:pPr marL="0" indent="0">
+              <a:buNone/>
+            </a:pPr>
+            <a:r>
+              <a:rPr lang="en-US" sz="1100" b="1" kern="0" spc="200" dirty="0">
                 <a:solidFill>
                   <a:srgbClr val="D97757"/>
                 </a:solidFill>
@@ -8539,7 +8229,7 @@
           <a:bodyPr wrap="square" lIns="0" tIns="0" rIns="0" bIns="0" rtlCol="0" anchor="ctr"/>
           <a:lstStyle/>
           <a:p>
-            <a:pPr indent="0" marL="0">
+            <a:pPr marL="0" indent="0">
               <a:buNone/>
             </a:pPr>
             <a:r>
@@ -8559,14 +8249,14 @@
       </p:sp>
       <p:pic>
         <p:nvPicPr>
-          <p:cNvPr id="4" name="Image 0" descr="preencoded.png">    </p:cNvPr>
+          <p:cNvPr id="4" name="Image 0" descr="preencoded.png"/>
           <p:cNvPicPr>
             <a:picLocks noChangeAspect="1"/>
           </p:cNvPicPr>
           <p:nvPr/>
         </p:nvPicPr>
         <p:blipFill>
-          <a:blip r:embed="rId1"/>
+          <a:blip r:embed="rId2"/>
           <a:stretch>
             <a:fillRect/>
           </a:stretch>
@@ -8602,7 +8292,7 @@
           <a:bodyPr wrap="square" lIns="0" tIns="0" rIns="0" bIns="0" rtlCol="0" anchor="ctr"/>
           <a:lstStyle/>
           <a:p>
-            <a:pPr indent="0" marL="0">
+            <a:pPr marL="0" indent="0">
               <a:buNone/>
             </a:pPr>
             <a:r>
@@ -8646,13 +8336,20 @@
             <a:prstDash val="solid"/>
           </a:ln>
           <a:effectLst>
-            <a:outerShdw sx="100000" sy="100000" kx="0" ky="0" algn="bl" rotWithShape="0" blurRad="88900" dist="38100" dir="5400000">
+            <a:outerShdw blurRad="88900" dist="38100" dir="5400000" algn="bl" rotWithShape="0">
               <a:srgbClr val="000000">
                 <a:alpha val="10000"/>
               </a:srgbClr>
             </a:outerShdw>
           </a:effectLst>
         </p:spPr>
+        <p:txBody>
+          <a:bodyPr/>
+          <a:lstStyle/>
+          <a:p>
+            <a:endParaRPr lang="en-US"/>
+          </a:p>
+        </p:txBody>
       </p:sp>
       <p:sp>
         <p:nvSpPr>
@@ -8673,17 +8370,24 @@
           </a:solidFill>
           <a:ln/>
         </p:spPr>
+        <p:txBody>
+          <a:bodyPr/>
+          <a:lstStyle/>
+          <a:p>
+            <a:endParaRPr lang="en-US"/>
+          </a:p>
+        </p:txBody>
       </p:sp>
       <p:pic>
         <p:nvPicPr>
-          <p:cNvPr id="8" name="Image 1" descr="preencoded.png">    </p:cNvPr>
+          <p:cNvPr id="8" name="Image 1" descr="preencoded.png"/>
           <p:cNvPicPr>
             <a:picLocks noChangeAspect="1"/>
           </p:cNvPicPr>
           <p:nvPr/>
         </p:nvPicPr>
         <p:blipFill>
-          <a:blip r:embed="rId2"/>
+          <a:blip r:embed="rId3"/>
           <a:stretch>
             <a:fillRect/>
           </a:stretch>
@@ -8719,7 +8423,7 @@
           <a:bodyPr wrap="square" lIns="0" tIns="0" rIns="0" bIns="0" rtlCol="0" anchor="ctr"/>
           <a:lstStyle/>
           <a:p>
-            <a:pPr algn="ctr" indent="0" marL="0">
+            <a:pPr marL="0" indent="0" algn="ctr">
               <a:buNone/>
             </a:pPr>
             <a:r>
@@ -8758,7 +8462,7 @@
           <a:bodyPr wrap="square" lIns="0" tIns="0" rIns="0" bIns="0" rtlCol="0" anchor="ctr"/>
           <a:lstStyle/>
           <a:p>
-            <a:pPr algn="ctr" indent="0" marL="0">
+            <a:pPr marL="0" indent="0" algn="ctr">
               <a:buNone/>
             </a:pPr>
             <a:r>
@@ -8797,7 +8501,7 @@
           <a:bodyPr wrap="square" lIns="0" tIns="0" rIns="0" bIns="0" rtlCol="0" anchor="ctr"/>
           <a:lstStyle/>
           <a:p>
-            <a:pPr algn="ctr" indent="0" marL="0">
+            <a:pPr marL="0" indent="0" algn="ctr">
               <a:buNone/>
             </a:pPr>
             <a:r>
@@ -8841,13 +8545,20 @@
             <a:prstDash val="solid"/>
           </a:ln>
           <a:effectLst>
-            <a:outerShdw sx="100000" sy="100000" kx="0" ky="0" algn="bl" rotWithShape="0" blurRad="88900" dist="38100" dir="5400000">
+            <a:outerShdw blurRad="88900" dist="38100" dir="5400000" algn="bl" rotWithShape="0">
               <a:srgbClr val="000000">
                 <a:alpha val="10000"/>
               </a:srgbClr>
             </a:outerShdw>
           </a:effectLst>
         </p:spPr>
+        <p:txBody>
+          <a:bodyPr/>
+          <a:lstStyle/>
+          <a:p>
+            <a:endParaRPr lang="en-US"/>
+          </a:p>
+        </p:txBody>
       </p:sp>
       <p:sp>
         <p:nvSpPr>
@@ -8868,17 +8579,24 @@
           </a:solidFill>
           <a:ln/>
         </p:spPr>
+        <p:txBody>
+          <a:bodyPr/>
+          <a:lstStyle/>
+          <a:p>
+            <a:endParaRPr lang="en-US"/>
+          </a:p>
+        </p:txBody>
       </p:sp>
       <p:pic>
         <p:nvPicPr>
-          <p:cNvPr id="14" name="Image 2" descr="preencoded.png">    </p:cNvPr>
+          <p:cNvPr id="14" name="Image 2" descr="preencoded.png"/>
           <p:cNvPicPr>
             <a:picLocks noChangeAspect="1"/>
           </p:cNvPicPr>
           <p:nvPr/>
         </p:nvPicPr>
         <p:blipFill>
-          <a:blip r:embed="rId3"/>
+          <a:blip r:embed="rId4"/>
           <a:stretch>
             <a:fillRect/>
           </a:stretch>
@@ -8914,7 +8632,7 @@
           <a:bodyPr wrap="square" lIns="0" tIns="0" rIns="0" bIns="0" rtlCol="0" anchor="ctr"/>
           <a:lstStyle/>
           <a:p>
-            <a:pPr algn="ctr" indent="0" marL="0">
+            <a:pPr marL="0" indent="0" algn="ctr">
               <a:buNone/>
             </a:pPr>
             <a:r>
@@ -8953,7 +8671,7 @@
           <a:bodyPr wrap="square" lIns="0" tIns="0" rIns="0" bIns="0" rtlCol="0" anchor="ctr"/>
           <a:lstStyle/>
           <a:p>
-            <a:pPr algn="ctr" indent="0" marL="0">
+            <a:pPr marL="0" indent="0" algn="ctr">
               <a:buNone/>
             </a:pPr>
             <a:r>
@@ -8992,7 +8710,7 @@
           <a:bodyPr wrap="square" lIns="0" tIns="0" rIns="0" bIns="0" rtlCol="0" anchor="ctr"/>
           <a:lstStyle/>
           <a:p>
-            <a:pPr algn="ctr" indent="0" marL="0">
+            <a:pPr marL="0" indent="0" algn="ctr">
               <a:buNone/>
             </a:pPr>
             <a:r>
@@ -9036,13 +8754,20 @@
             <a:prstDash val="solid"/>
           </a:ln>
           <a:effectLst>
-            <a:outerShdw sx="100000" sy="100000" kx="0" ky="0" algn="bl" rotWithShape="0" blurRad="88900" dist="38100" dir="5400000">
+            <a:outerShdw blurRad="88900" dist="38100" dir="5400000" algn="bl" rotWithShape="0">
               <a:srgbClr val="000000">
                 <a:alpha val="10000"/>
               </a:srgbClr>
             </a:outerShdw>
           </a:effectLst>
         </p:spPr>
+        <p:txBody>
+          <a:bodyPr/>
+          <a:lstStyle/>
+          <a:p>
+            <a:endParaRPr lang="en-US"/>
+          </a:p>
+        </p:txBody>
       </p:sp>
       <p:sp>
         <p:nvSpPr>
@@ -9063,17 +8788,24 @@
           </a:solidFill>
           <a:ln/>
         </p:spPr>
+        <p:txBody>
+          <a:bodyPr/>
+          <a:lstStyle/>
+          <a:p>
+            <a:endParaRPr lang="en-US"/>
+          </a:p>
+        </p:txBody>
       </p:sp>
       <p:pic>
         <p:nvPicPr>
-          <p:cNvPr id="20" name="Image 3" descr="preencoded.png">    </p:cNvPr>
+          <p:cNvPr id="20" name="Image 3" descr="preencoded.png"/>
           <p:cNvPicPr>
             <a:picLocks noChangeAspect="1"/>
           </p:cNvPicPr>
           <p:nvPr/>
         </p:nvPicPr>
         <p:blipFill>
-          <a:blip r:embed="rId4"/>
+          <a:blip r:embed="rId5"/>
           <a:stretch>
             <a:fillRect/>
           </a:stretch>
@@ -9109,7 +8841,7 @@
           <a:bodyPr wrap="square" lIns="0" tIns="0" rIns="0" bIns="0" rtlCol="0" anchor="ctr"/>
           <a:lstStyle/>
           <a:p>
-            <a:pPr algn="ctr" indent="0" marL="0">
+            <a:pPr marL="0" indent="0" algn="ctr">
               <a:buNone/>
             </a:pPr>
             <a:r>
@@ -9148,7 +8880,7 @@
           <a:bodyPr wrap="square" lIns="0" tIns="0" rIns="0" bIns="0" rtlCol="0" anchor="ctr"/>
           <a:lstStyle/>
           <a:p>
-            <a:pPr algn="ctr" indent="0" marL="0">
+            <a:pPr marL="0" indent="0" algn="ctr">
               <a:buNone/>
             </a:pPr>
             <a:r>
@@ -9187,7 +8919,7 @@
           <a:bodyPr wrap="square" rtlCol="0" anchor="ctr"/>
           <a:lstStyle/>
           <a:p>
-            <a:pPr indent="0" marL="0">
+            <a:pPr marL="0" indent="0">
               <a:buNone/>
             </a:pPr>
             <a:r>
@@ -9226,7 +8958,7 @@
           <a:bodyPr wrap="square" rtlCol="0" anchor="ctr"/>
           <a:lstStyle/>
           <a:p>
-            <a:pPr algn="r" indent="0" marL="0">
+            <a:pPr marL="0" indent="0" algn="r">
               <a:buNone/>
             </a:pPr>
             <a:r>
@@ -9241,45 +8973,6 @@
               <a:t>Section 3  ·  8/12</a:t>
             </a:r>
             <a:endParaRPr lang="en-US" sz="900" dirty="0"/>
-          </a:p>
-        </p:txBody>
-      </p:sp>
-      <p:sp>
-        <p:nvSpPr>
-          <p:cNvPr id="25" name="Text 19"/>
-          <p:cNvSpPr/>
-          <p:nvPr/>
-        </p:nvSpPr>
-        <p:spPr>
-          <a:xfrm>
-            <a:off x="548640" y="4462272"/>
-            <a:ext cx="8046720" cy="274320"/>
-          </a:xfrm>
-          <a:prstGeom prst="rect">
-            <a:avLst/>
-          </a:prstGeom>
-          <a:noFill/>
-          <a:ln/>
-        </p:spPr>
-        <p:txBody>
-          <a:bodyPr wrap="square" lIns="0" tIns="0" rIns="0" bIns="0" rtlCol="0" anchor="ctr"/>
-          <a:lstStyle/>
-          <a:p>
-            <a:pPr indent="0" marL="0">
-              <a:buNone/>
-            </a:pPr>
-            <a:r>
-              <a:rPr lang="en-US" sz="1000" i="1" dirty="0">
-                <a:solidFill>
-                  <a:srgbClr val="615C52"/>
-                </a:solidFill>
-                <a:latin typeface="Inter" pitchFamily="34" charset="0"/>
-                <a:ea typeface="Inter" pitchFamily="34" charset="-122"/>
-                <a:cs typeface="Inter" pitchFamily="34" charset="-120"/>
-              </a:rPr>
-              <a:t>▸ MCP is USB-C for tools: one protocol so any client can talk to any server.</a:t>
-            </a:r>
-            <a:endParaRPr lang="en-US" sz="1000" dirty="0"/>
           </a:p>
         </p:txBody>
       </p:sp>
@@ -9299,6 +8992,7 @@
         <a:solidFill>
           <a:srgbClr val="F0EEE6"/>
         </a:solidFill>
+        <a:effectLst/>
       </p:bgPr>
     </p:bg>
     <p:spTree>
@@ -9336,11 +9030,11 @@
           <a:bodyPr wrap="square" lIns="0" tIns="0" rIns="0" bIns="0" rtlCol="0" anchor="ctr"/>
           <a:lstStyle/>
           <a:p>
-            <a:pPr indent="0" marL="0">
-              <a:buNone/>
-            </a:pPr>
-            <a:r>
-              <a:rPr lang="en-US" sz="1100" b="1" spc="200" kern="0" dirty="0">
+            <a:pPr marL="0" indent="0">
+              <a:buNone/>
+            </a:pPr>
+            <a:r>
+              <a:rPr lang="en-US" sz="1100" b="1" kern="0" spc="200" dirty="0">
                 <a:solidFill>
                   <a:srgbClr val="D97757"/>
                 </a:solidFill>
@@ -9375,7 +9069,7 @@
           <a:bodyPr wrap="square" lIns="0" tIns="0" rIns="0" bIns="0" rtlCol="0" anchor="ctr"/>
           <a:lstStyle/>
           <a:p>
-            <a:pPr indent="0" marL="0">
+            <a:pPr marL="0" indent="0">
               <a:buNone/>
             </a:pPr>
             <a:r>
@@ -9395,14 +9089,14 @@
       </p:sp>
       <p:pic>
         <p:nvPicPr>
-          <p:cNvPr id="4" name="Image 0" descr="preencoded.png">    </p:cNvPr>
+          <p:cNvPr id="4" name="Image 0" descr="preencoded.png"/>
           <p:cNvPicPr>
             <a:picLocks noChangeAspect="1"/>
           </p:cNvPicPr>
           <p:nvPr/>
         </p:nvPicPr>
         <p:blipFill>
-          <a:blip r:embed="rId1"/>
+          <a:blip r:embed="rId2"/>
           <a:stretch>
             <a:fillRect/>
           </a:stretch>
@@ -9443,13 +9137,20 @@
             <a:prstDash val="solid"/>
           </a:ln>
           <a:effectLst>
-            <a:outerShdw sx="100000" sy="100000" kx="0" ky="0" algn="bl" rotWithShape="0" blurRad="88900" dist="38100" dir="5400000">
+            <a:outerShdw blurRad="88900" dist="38100" dir="5400000" algn="bl" rotWithShape="0">
               <a:srgbClr val="000000">
                 <a:alpha val="10000"/>
               </a:srgbClr>
             </a:outerShdw>
           </a:effectLst>
         </p:spPr>
+        <p:txBody>
+          <a:bodyPr/>
+          <a:lstStyle/>
+          <a:p>
+            <a:endParaRPr lang="en-US"/>
+          </a:p>
+        </p:txBody>
       </p:sp>
       <p:sp>
         <p:nvSpPr>
@@ -9470,17 +9171,24 @@
           </a:solidFill>
           <a:ln/>
         </p:spPr>
+        <p:txBody>
+          <a:bodyPr/>
+          <a:lstStyle/>
+          <a:p>
+            <a:endParaRPr lang="en-US"/>
+          </a:p>
+        </p:txBody>
       </p:sp>
       <p:pic>
         <p:nvPicPr>
-          <p:cNvPr id="7" name="Image 1" descr="preencoded.png">    </p:cNvPr>
+          <p:cNvPr id="7" name="Image 1" descr="preencoded.png"/>
           <p:cNvPicPr>
             <a:picLocks noChangeAspect="1"/>
           </p:cNvPicPr>
           <p:nvPr/>
         </p:nvPicPr>
         <p:blipFill>
-          <a:blip r:embed="rId2"/>
+          <a:blip r:embed="rId3"/>
           <a:stretch>
             <a:fillRect/>
           </a:stretch>
@@ -9516,7 +9224,7 @@
           <a:bodyPr wrap="square" lIns="0" tIns="0" rIns="0" bIns="0" rtlCol="0" anchor="ctr"/>
           <a:lstStyle/>
           <a:p>
-            <a:pPr algn="ctr" indent="0" marL="0">
+            <a:pPr marL="0" indent="0" algn="ctr">
               <a:buNone/>
             </a:pPr>
             <a:r>
@@ -9555,7 +9263,7 @@
           <a:bodyPr wrap="square" lIns="0" tIns="0" rIns="0" bIns="0" rtlCol="0" anchor="ctr"/>
           <a:lstStyle/>
           <a:p>
-            <a:pPr algn="ctr" indent="0" marL="0">
+            <a:pPr marL="0" indent="0" algn="ctr">
               <a:buNone/>
             </a:pPr>
             <a:r>
@@ -9594,7 +9302,7 @@
           <a:bodyPr wrap="square" lIns="0" tIns="0" rIns="0" bIns="0" rtlCol="0" anchor="ctr"/>
           <a:lstStyle/>
           <a:p>
-            <a:pPr algn="ctr" indent="0" marL="0">
+            <a:pPr marL="0" indent="0" algn="ctr">
               <a:buNone/>
             </a:pPr>
             <a:r>
@@ -9638,13 +9346,20 @@
             <a:prstDash val="solid"/>
           </a:ln>
           <a:effectLst>
-            <a:outerShdw sx="100000" sy="100000" kx="0" ky="0" algn="bl" rotWithShape="0" blurRad="88900" dist="38100" dir="5400000">
+            <a:outerShdw blurRad="88900" dist="38100" dir="5400000" algn="bl" rotWithShape="0">
               <a:srgbClr val="000000">
                 <a:alpha val="10000"/>
               </a:srgbClr>
             </a:outerShdw>
           </a:effectLst>
         </p:spPr>
+        <p:txBody>
+          <a:bodyPr/>
+          <a:lstStyle/>
+          <a:p>
+            <a:endParaRPr lang="en-US"/>
+          </a:p>
+        </p:txBody>
       </p:sp>
       <p:sp>
         <p:nvSpPr>
@@ -9665,17 +9380,24 @@
           </a:solidFill>
           <a:ln/>
         </p:spPr>
+        <p:txBody>
+          <a:bodyPr/>
+          <a:lstStyle/>
+          <a:p>
+            <a:endParaRPr lang="en-US"/>
+          </a:p>
+        </p:txBody>
       </p:sp>
       <p:pic>
         <p:nvPicPr>
-          <p:cNvPr id="13" name="Image 2" descr="preencoded.png">    </p:cNvPr>
+          <p:cNvPr id="13" name="Image 2" descr="preencoded.png"/>
           <p:cNvPicPr>
             <a:picLocks noChangeAspect="1"/>
           </p:cNvPicPr>
           <p:nvPr/>
         </p:nvPicPr>
         <p:blipFill>
-          <a:blip r:embed="rId3"/>
+          <a:blip r:embed="rId4"/>
           <a:stretch>
             <a:fillRect/>
           </a:stretch>
@@ -9711,7 +9433,7 @@
           <a:bodyPr wrap="square" lIns="0" tIns="0" rIns="0" bIns="0" rtlCol="0" anchor="ctr"/>
           <a:lstStyle/>
           <a:p>
-            <a:pPr algn="ctr" indent="0" marL="0">
+            <a:pPr marL="0" indent="0" algn="ctr">
               <a:buNone/>
             </a:pPr>
             <a:r>
@@ -9750,7 +9472,7 @@
           <a:bodyPr wrap="square" lIns="0" tIns="0" rIns="0" bIns="0" rtlCol="0" anchor="ctr"/>
           <a:lstStyle/>
           <a:p>
-            <a:pPr algn="ctr" indent="0" marL="0">
+            <a:pPr marL="0" indent="0" algn="ctr">
               <a:buNone/>
             </a:pPr>
             <a:r>
@@ -9789,7 +9511,7 @@
           <a:bodyPr wrap="square" lIns="0" tIns="0" rIns="0" bIns="0" rtlCol="0" anchor="ctr"/>
           <a:lstStyle/>
           <a:p>
-            <a:pPr algn="ctr" indent="0" marL="0">
+            <a:pPr marL="0" indent="0" algn="ctr">
               <a:buNone/>
             </a:pPr>
             <a:r>
@@ -9833,13 +9555,20 @@
             <a:prstDash val="solid"/>
           </a:ln>
           <a:effectLst>
-            <a:outerShdw sx="100000" sy="100000" kx="0" ky="0" algn="bl" rotWithShape="0" blurRad="88900" dist="38100" dir="5400000">
+            <a:outerShdw blurRad="88900" dist="38100" dir="5400000" algn="bl" rotWithShape="0">
               <a:srgbClr val="000000">
                 <a:alpha val="10000"/>
               </a:srgbClr>
             </a:outerShdw>
           </a:effectLst>
         </p:spPr>
+        <p:txBody>
+          <a:bodyPr/>
+          <a:lstStyle/>
+          <a:p>
+            <a:endParaRPr lang="en-US"/>
+          </a:p>
+        </p:txBody>
       </p:sp>
       <p:sp>
         <p:nvSpPr>
@@ -9860,17 +9589,24 @@
           </a:solidFill>
           <a:ln/>
         </p:spPr>
+        <p:txBody>
+          <a:bodyPr/>
+          <a:lstStyle/>
+          <a:p>
+            <a:endParaRPr lang="en-US"/>
+          </a:p>
+        </p:txBody>
       </p:sp>
       <p:pic>
         <p:nvPicPr>
-          <p:cNvPr id="19" name="Image 3" descr="preencoded.png">    </p:cNvPr>
+          <p:cNvPr id="19" name="Image 3" descr="preencoded.png"/>
           <p:cNvPicPr>
             <a:picLocks noChangeAspect="1"/>
           </p:cNvPicPr>
           <p:nvPr/>
         </p:nvPicPr>
         <p:blipFill>
-          <a:blip r:embed="rId4"/>
+          <a:blip r:embed="rId5"/>
           <a:stretch>
             <a:fillRect/>
           </a:stretch>
@@ -9906,7 +9642,7 @@
           <a:bodyPr wrap="square" lIns="0" tIns="0" rIns="0" bIns="0" rtlCol="0" anchor="ctr"/>
           <a:lstStyle/>
           <a:p>
-            <a:pPr algn="ctr" indent="0" marL="0">
+            <a:pPr marL="0" indent="0" algn="ctr">
               <a:buNone/>
             </a:pPr>
             <a:r>
@@ -9945,7 +9681,7 @@
           <a:bodyPr wrap="square" lIns="0" tIns="0" rIns="0" bIns="0" rtlCol="0" anchor="ctr"/>
           <a:lstStyle/>
           <a:p>
-            <a:pPr algn="ctr" indent="0" marL="0">
+            <a:pPr marL="0" indent="0" algn="ctr">
               <a:buNone/>
             </a:pPr>
             <a:r>
@@ -9984,7 +9720,7 @@
           <a:bodyPr wrap="square" lIns="0" tIns="0" rIns="0" bIns="0" rtlCol="0" anchor="ctr"/>
           <a:lstStyle/>
           <a:p>
-            <a:pPr algn="ctr" indent="0" marL="0">
+            <a:pPr marL="0" indent="0" algn="ctr">
               <a:buNone/>
             </a:pPr>
             <a:r>
@@ -10023,7 +9759,7 @@
           <a:bodyPr wrap="square" rtlCol="0" anchor="ctr"/>
           <a:lstStyle/>
           <a:p>
-            <a:pPr indent="0" marL="0">
+            <a:pPr marL="0" indent="0">
               <a:buNone/>
             </a:pPr>
             <a:r>
@@ -10062,7 +9798,7 @@
           <a:bodyPr wrap="square" rtlCol="0" anchor="ctr"/>
           <a:lstStyle/>
           <a:p>
-            <a:pPr algn="r" indent="0" marL="0">
+            <a:pPr marL="0" indent="0" algn="r">
               <a:buNone/>
             </a:pPr>
             <a:r>
@@ -10077,45 +9813,6 @@
               <a:t>Section 3  ·  9/12</a:t>
             </a:r>
             <a:endParaRPr lang="en-US" sz="900" dirty="0"/>
-          </a:p>
-        </p:txBody>
-      </p:sp>
-      <p:sp>
-        <p:nvSpPr>
-          <p:cNvPr id="25" name="Text 19"/>
-          <p:cNvSpPr/>
-          <p:nvPr/>
-        </p:nvSpPr>
-        <p:spPr>
-          <a:xfrm>
-            <a:off x="548640" y="4462272"/>
-            <a:ext cx="8046720" cy="274320"/>
-          </a:xfrm>
-          <a:prstGeom prst="rect">
-            <a:avLst/>
-          </a:prstGeom>
-          <a:noFill/>
-          <a:ln/>
-        </p:spPr>
-        <p:txBody>
-          <a:bodyPr wrap="square" lIns="0" tIns="0" rIns="0" bIns="0" rtlCol="0" anchor="ctr"/>
-          <a:lstStyle/>
-          <a:p>
-            <a:pPr indent="0" marL="0">
-              <a:buNone/>
-            </a:pPr>
-            <a:r>
-              <a:rPr lang="en-US" sz="1000" i="1" dirty="0">
-                <a:solidFill>
-                  <a:srgbClr val="615C52"/>
-                </a:solidFill>
-                <a:latin typeface="Inter" pitchFamily="34" charset="0"/>
-                <a:ea typeface="Inter" pitchFamily="34" charset="-122"/>
-                <a:cs typeface="Inter" pitchFamily="34" charset="-120"/>
-              </a:rPr>
-              <a:t>▸ Tools act, resources inform, prompts template — most servers lead with tools.</a:t>
-            </a:r>
-            <a:endParaRPr lang="en-US" sz="1000" dirty="0"/>
           </a:p>
         </p:txBody>
       </p:sp>

--- a/decks/Day 1/Section3-IDE-Integration-MCP.pptx
+++ b/decks/Day 1/Section3-IDE-Integration-MCP.pptx
@@ -4,6 +4,9 @@
   <p:sldMasterIdLst>
     <p:sldMasterId id="2147483648" r:id="rId1"/>
   </p:sldMasterIdLst>
+  <p:notesMasterIdLst>
+    <p:notesMasterId r:id="rId14"/>
+  </p:notesMasterIdLst>
   <p:sldIdLst>
     <p:sldId id="256" r:id="rId2"/>
     <p:sldId id="257" r:id="rId3"/>
@@ -118,6 +121,1139 @@
     </p:ext>
   </p:extLst>
 </p:presentation>
+</file>
+
+<file path=ppt/notesMasters/notesMaster1.xml><?xml version="1.0" encoding="utf-8"?>
+<p:notesMaster xmlns:a="http://schemas.openxmlformats.org/drawingml/2006/main" xmlns:r="http://schemas.openxmlformats.org/officeDocument/2006/relationships" xmlns:p="http://schemas.openxmlformats.org/presentationml/2006/main">
+  <p:cSld>
+    <p:bg>
+      <p:bgRef idx="1001">
+        <a:schemeClr val="bg1"/>
+      </p:bgRef>
+    </p:bg>
+    <p:spTree>
+      <p:nvGrpSpPr>
+        <p:cNvPr id="1" name=""/>
+        <p:cNvGrpSpPr/>
+        <p:nvPr/>
+      </p:nvGrpSpPr>
+      <p:grpSpPr>
+        <a:xfrm>
+          <a:off x="0" y="0"/>
+          <a:ext cx="0" cy="0"/>
+          <a:chOff x="0" y="0"/>
+          <a:chExt cx="0" cy="0"/>
+        </a:xfrm>
+      </p:grpSpPr>
+    </p:spTree>
+    <p:extLst>
+      <p:ext uri="{BB962C8B-B14F-4D97-AF65-F5344CB8AC3E}">
+        <p14:creationId xmlns:p14="http://schemas.microsoft.com/office/powerpoint/2010/main" val="81158484"/>
+      </p:ext>
+    </p:extLst>
+  </p:cSld>
+  <p:clrMap bg1="lt1" tx1="dk1" bg2="lt2" tx2="dk2" accent1="accent1" accent2="accent2" accent3="accent3" accent4="accent4" accent5="accent5" accent6="accent6" hlink="hlink" folHlink="folHlink"/>
+  <p:notesStyle>
+    <a:lvl1pPr marL="0" algn="l" defTabSz="914400" rtl="0" eaLnBrk="1" latinLnBrk="0" hangingPunct="1">
+      <a:defRPr sz="1200" kern="1200">
+        <a:solidFill>
+          <a:schemeClr val="tx1"/>
+        </a:solidFill>
+        <a:latin typeface="+mn-lt"/>
+        <a:ea typeface="+mn-ea"/>
+        <a:cs typeface="+mn-cs"/>
+      </a:defRPr>
+    </a:lvl1pPr>
+    <a:lvl2pPr marL="457200" algn="l" defTabSz="914400" rtl="0" eaLnBrk="1" latinLnBrk="0" hangingPunct="1">
+      <a:defRPr sz="1200" kern="1200">
+        <a:solidFill>
+          <a:schemeClr val="tx1"/>
+        </a:solidFill>
+        <a:latin typeface="+mn-lt"/>
+        <a:ea typeface="+mn-ea"/>
+        <a:cs typeface="+mn-cs"/>
+      </a:defRPr>
+    </a:lvl2pPr>
+    <a:lvl3pPr marL="914400" algn="l" defTabSz="914400" rtl="0" eaLnBrk="1" latinLnBrk="0" hangingPunct="1">
+      <a:defRPr sz="1200" kern="1200">
+        <a:solidFill>
+          <a:schemeClr val="tx1"/>
+        </a:solidFill>
+        <a:latin typeface="+mn-lt"/>
+        <a:ea typeface="+mn-ea"/>
+        <a:cs typeface="+mn-cs"/>
+      </a:defRPr>
+    </a:lvl3pPr>
+    <a:lvl4pPr marL="1371600" algn="l" defTabSz="914400" rtl="0" eaLnBrk="1" latinLnBrk="0" hangingPunct="1">
+      <a:defRPr sz="1200" kern="1200">
+        <a:solidFill>
+          <a:schemeClr val="tx1"/>
+        </a:solidFill>
+        <a:latin typeface="+mn-lt"/>
+        <a:ea typeface="+mn-ea"/>
+        <a:cs typeface="+mn-cs"/>
+      </a:defRPr>
+    </a:lvl4pPr>
+    <a:lvl5pPr marL="1828800" algn="l" defTabSz="914400" rtl="0" eaLnBrk="1" latinLnBrk="0" hangingPunct="1">
+      <a:defRPr sz="1200" kern="1200">
+        <a:solidFill>
+          <a:schemeClr val="tx1"/>
+        </a:solidFill>
+        <a:latin typeface="+mn-lt"/>
+        <a:ea typeface="+mn-ea"/>
+        <a:cs typeface="+mn-cs"/>
+      </a:defRPr>
+    </a:lvl5pPr>
+    <a:lvl6pPr marL="2286000" algn="l" defTabSz="914400" rtl="0" eaLnBrk="1" latinLnBrk="0" hangingPunct="1">
+      <a:defRPr sz="1200" kern="1200">
+        <a:solidFill>
+          <a:schemeClr val="tx1"/>
+        </a:solidFill>
+        <a:latin typeface="+mn-lt"/>
+        <a:ea typeface="+mn-ea"/>
+        <a:cs typeface="+mn-cs"/>
+      </a:defRPr>
+    </a:lvl6pPr>
+    <a:lvl7pPr marL="2743200" algn="l" defTabSz="914400" rtl="0" eaLnBrk="1" latinLnBrk="0" hangingPunct="1">
+      <a:defRPr sz="1200" kern="1200">
+        <a:solidFill>
+          <a:schemeClr val="tx1"/>
+        </a:solidFill>
+        <a:latin typeface="+mn-lt"/>
+        <a:ea typeface="+mn-ea"/>
+        <a:cs typeface="+mn-cs"/>
+      </a:defRPr>
+    </a:lvl7pPr>
+    <a:lvl8pPr marL="3200400" algn="l" defTabSz="914400" rtl="0" eaLnBrk="1" latinLnBrk="0" hangingPunct="1">
+      <a:defRPr sz="1200" kern="1200">
+        <a:solidFill>
+          <a:schemeClr val="tx1"/>
+        </a:solidFill>
+        <a:latin typeface="+mn-lt"/>
+        <a:ea typeface="+mn-ea"/>
+        <a:cs typeface="+mn-cs"/>
+      </a:defRPr>
+    </a:lvl8pPr>
+    <a:lvl9pPr marL="3657600" algn="l" defTabSz="914400" rtl="0" eaLnBrk="1" latinLnBrk="0" hangingPunct="1">
+      <a:defRPr sz="1200" kern="1200">
+        <a:solidFill>
+          <a:schemeClr val="tx1"/>
+        </a:solidFill>
+        <a:latin typeface="+mn-lt"/>
+        <a:ea typeface="+mn-ea"/>
+        <a:cs typeface="+mn-cs"/>
+      </a:defRPr>
+    </a:lvl9pPr>
+  </p:notesStyle>
+</p:notesMaster>
+</file>
+
+<file path=ppt/notesSlides/notesSlide1.xml><?xml version="1.0" encoding="utf-8"?>
+<p:notes xmlns:a="http://schemas.openxmlformats.org/drawingml/2006/main" xmlns:r="http://schemas.openxmlformats.org/officeDocument/2006/relationships" xmlns:p="http://schemas.openxmlformats.org/presentationml/2006/main">
+  <p:cSld>
+    <p:spTree>
+      <p:nvGrpSpPr>
+        <p:cNvPr id="1" name=""/>
+        <p:cNvGrpSpPr/>
+        <p:nvPr/>
+      </p:nvGrpSpPr>
+      <p:grpSpPr>
+        <a:xfrm>
+          <a:off x="0" y="0"/>
+          <a:ext cx="0" cy="0"/>
+          <a:chOff x="0" y="0"/>
+          <a:chExt cx="0" cy="0"/>
+        </a:xfrm>
+      </p:grpSpPr>
+      <p:sp>
+        <p:nvSpPr>
+          <p:cNvPr id="2" name="Slide Image Placeholder 1"/>
+          <p:cNvSpPr>
+            <a:spLocks noGrp="1" noRot="1" noChangeAspect="1"/>
+          </p:cNvSpPr>
+          <p:nvPr>
+            <p:ph type="sldImg"/>
+          </p:nvPr>
+        </p:nvSpPr>
+        <p:spPr/>
+      </p:sp>
+      <p:sp>
+        <p:nvSpPr>
+          <p:cNvPr id="3" name="Notes Placeholder 2"/>
+          <p:cNvSpPr>
+            <a:spLocks noGrp="1"/>
+          </p:cNvSpPr>
+          <p:nvPr>
+            <p:ph type="body" idx="1"/>
+          </p:nvPr>
+        </p:nvSpPr>
+        <p:spPr/>
+        <p:txBody>
+          <a:bodyPr/>
+          <a:lstStyle/>
+          <a:p>
+            <a:endParaRPr lang="en-US" dirty="0"/>
+          </a:p>
+        </p:txBody>
+      </p:sp>
+      <p:sp>
+        <p:nvSpPr>
+          <p:cNvPr id="4" name="Slide Number Placeholder 3"/>
+          <p:cNvSpPr>
+            <a:spLocks noGrp="1"/>
+          </p:cNvSpPr>
+          <p:nvPr>
+            <p:ph type="sldNum" sz="quarter" idx="10"/>
+          </p:nvPr>
+        </p:nvSpPr>
+        <p:spPr/>
+        <p:txBody>
+          <a:bodyPr/>
+          <a:lstStyle/>
+          <a:p>
+            <a:fld id="{F7021451-1387-4CA6-816F-3879F97B5CBC}" type="slidenum">
+              <a:rPr lang="en-US"/>
+              <a:t>1</a:t>
+            </a:fld>
+            <a:endParaRPr lang="en-US"/>
+          </a:p>
+        </p:txBody>
+      </p:sp>
+    </p:spTree>
+    <p:extLst>
+      <p:ext uri="{BB962C8B-B14F-4D97-AF65-F5344CB8AC3E}">
+        <p14:creationId xmlns:p14="http://schemas.microsoft.com/office/powerpoint/2010/main" val="1024086991"/>
+      </p:ext>
+    </p:extLst>
+  </p:cSld>
+  <p:clrMapOvr>
+    <a:masterClrMapping/>
+  </p:clrMapOvr>
+</p:notes>
+</file>
+
+<file path=ppt/notesSlides/notesSlide10.xml><?xml version="1.0" encoding="utf-8"?>
+<p:notes xmlns:a="http://schemas.openxmlformats.org/drawingml/2006/main" xmlns:r="http://schemas.openxmlformats.org/officeDocument/2006/relationships" xmlns:p="http://schemas.openxmlformats.org/presentationml/2006/main">
+  <p:cSld>
+    <p:spTree>
+      <p:nvGrpSpPr>
+        <p:cNvPr id="1" name=""/>
+        <p:cNvGrpSpPr/>
+        <p:nvPr/>
+      </p:nvGrpSpPr>
+      <p:grpSpPr>
+        <a:xfrm>
+          <a:off x="0" y="0"/>
+          <a:ext cx="0" cy="0"/>
+          <a:chOff x="0" y="0"/>
+          <a:chExt cx="0" cy="0"/>
+        </a:xfrm>
+      </p:grpSpPr>
+      <p:sp>
+        <p:nvSpPr>
+          <p:cNvPr id="2" name="Slide Image Placeholder 1"/>
+          <p:cNvSpPr>
+            <a:spLocks noGrp="1" noRot="1" noChangeAspect="1"/>
+          </p:cNvSpPr>
+          <p:nvPr>
+            <p:ph type="sldImg"/>
+          </p:nvPr>
+        </p:nvSpPr>
+        <p:spPr/>
+      </p:sp>
+      <p:sp>
+        <p:nvSpPr>
+          <p:cNvPr id="3" name="Notes Placeholder 2"/>
+          <p:cNvSpPr>
+            <a:spLocks noGrp="1"/>
+          </p:cNvSpPr>
+          <p:nvPr>
+            <p:ph type="body" idx="1"/>
+          </p:nvPr>
+        </p:nvSpPr>
+        <p:spPr/>
+        <p:txBody>
+          <a:bodyPr/>
+          <a:lstStyle/>
+          <a:p>
+            <a:endParaRPr lang="en-US" dirty="0"/>
+          </a:p>
+        </p:txBody>
+      </p:sp>
+      <p:sp>
+        <p:nvSpPr>
+          <p:cNvPr id="4" name="Slide Number Placeholder 3"/>
+          <p:cNvSpPr>
+            <a:spLocks noGrp="1"/>
+          </p:cNvSpPr>
+          <p:nvPr>
+            <p:ph type="sldNum" sz="quarter" idx="10"/>
+          </p:nvPr>
+        </p:nvSpPr>
+        <p:spPr/>
+        <p:txBody>
+          <a:bodyPr/>
+          <a:lstStyle/>
+          <a:p>
+            <a:fld id="{F7021451-1387-4CA6-816F-3879F97B5CBC}" type="slidenum">
+              <a:rPr lang="en-US"/>
+              <a:t>10</a:t>
+            </a:fld>
+            <a:endParaRPr lang="en-US"/>
+          </a:p>
+        </p:txBody>
+      </p:sp>
+    </p:spTree>
+    <p:extLst>
+      <p:ext uri="{BB962C8B-B14F-4D97-AF65-F5344CB8AC3E}">
+        <p14:creationId xmlns:p14="http://schemas.microsoft.com/office/powerpoint/2010/main" val="1024086991"/>
+      </p:ext>
+    </p:extLst>
+  </p:cSld>
+  <p:clrMapOvr>
+    <a:masterClrMapping/>
+  </p:clrMapOvr>
+</p:notes>
+</file>
+
+<file path=ppt/notesSlides/notesSlide11.xml><?xml version="1.0" encoding="utf-8"?>
+<p:notes xmlns:a="http://schemas.openxmlformats.org/drawingml/2006/main" xmlns:r="http://schemas.openxmlformats.org/officeDocument/2006/relationships" xmlns:p="http://schemas.openxmlformats.org/presentationml/2006/main">
+  <p:cSld>
+    <p:spTree>
+      <p:nvGrpSpPr>
+        <p:cNvPr id="1" name=""/>
+        <p:cNvGrpSpPr/>
+        <p:nvPr/>
+      </p:nvGrpSpPr>
+      <p:grpSpPr>
+        <a:xfrm>
+          <a:off x="0" y="0"/>
+          <a:ext cx="0" cy="0"/>
+          <a:chOff x="0" y="0"/>
+          <a:chExt cx="0" cy="0"/>
+        </a:xfrm>
+      </p:grpSpPr>
+      <p:sp>
+        <p:nvSpPr>
+          <p:cNvPr id="2" name="Slide Image Placeholder 1"/>
+          <p:cNvSpPr>
+            <a:spLocks noGrp="1" noRot="1" noChangeAspect="1"/>
+          </p:cNvSpPr>
+          <p:nvPr>
+            <p:ph type="sldImg"/>
+          </p:nvPr>
+        </p:nvSpPr>
+        <p:spPr/>
+      </p:sp>
+      <p:sp>
+        <p:nvSpPr>
+          <p:cNvPr id="3" name="Notes Placeholder 2"/>
+          <p:cNvSpPr>
+            <a:spLocks noGrp="1"/>
+          </p:cNvSpPr>
+          <p:nvPr>
+            <p:ph type="body" idx="1"/>
+          </p:nvPr>
+        </p:nvSpPr>
+        <p:spPr/>
+        <p:txBody>
+          <a:bodyPr/>
+          <a:lstStyle/>
+          <a:p>
+            <a:endParaRPr lang="en-US" dirty="0"/>
+          </a:p>
+        </p:txBody>
+      </p:sp>
+      <p:sp>
+        <p:nvSpPr>
+          <p:cNvPr id="4" name="Slide Number Placeholder 3"/>
+          <p:cNvSpPr>
+            <a:spLocks noGrp="1"/>
+          </p:cNvSpPr>
+          <p:nvPr>
+            <p:ph type="sldNum" sz="quarter" idx="10"/>
+          </p:nvPr>
+        </p:nvSpPr>
+        <p:spPr/>
+        <p:txBody>
+          <a:bodyPr/>
+          <a:lstStyle/>
+          <a:p>
+            <a:fld id="{F7021451-1387-4CA6-816F-3879F97B5CBC}" type="slidenum">
+              <a:rPr lang="en-US"/>
+              <a:t>11</a:t>
+            </a:fld>
+            <a:endParaRPr lang="en-US"/>
+          </a:p>
+        </p:txBody>
+      </p:sp>
+    </p:spTree>
+    <p:extLst>
+      <p:ext uri="{BB962C8B-B14F-4D97-AF65-F5344CB8AC3E}">
+        <p14:creationId xmlns:p14="http://schemas.microsoft.com/office/powerpoint/2010/main" val="1024086991"/>
+      </p:ext>
+    </p:extLst>
+  </p:cSld>
+  <p:clrMapOvr>
+    <a:masterClrMapping/>
+  </p:clrMapOvr>
+</p:notes>
+</file>
+
+<file path=ppt/notesSlides/notesSlide12.xml><?xml version="1.0" encoding="utf-8"?>
+<p:notes xmlns:a="http://schemas.openxmlformats.org/drawingml/2006/main" xmlns:r="http://schemas.openxmlformats.org/officeDocument/2006/relationships" xmlns:p="http://schemas.openxmlformats.org/presentationml/2006/main">
+  <p:cSld>
+    <p:spTree>
+      <p:nvGrpSpPr>
+        <p:cNvPr id="1" name=""/>
+        <p:cNvGrpSpPr/>
+        <p:nvPr/>
+      </p:nvGrpSpPr>
+      <p:grpSpPr>
+        <a:xfrm>
+          <a:off x="0" y="0"/>
+          <a:ext cx="0" cy="0"/>
+          <a:chOff x="0" y="0"/>
+          <a:chExt cx="0" cy="0"/>
+        </a:xfrm>
+      </p:grpSpPr>
+      <p:sp>
+        <p:nvSpPr>
+          <p:cNvPr id="2" name="Slide Image Placeholder 1"/>
+          <p:cNvSpPr>
+            <a:spLocks noGrp="1" noRot="1" noChangeAspect="1"/>
+          </p:cNvSpPr>
+          <p:nvPr>
+            <p:ph type="sldImg"/>
+          </p:nvPr>
+        </p:nvSpPr>
+        <p:spPr/>
+      </p:sp>
+      <p:sp>
+        <p:nvSpPr>
+          <p:cNvPr id="3" name="Notes Placeholder 2"/>
+          <p:cNvSpPr>
+            <a:spLocks noGrp="1"/>
+          </p:cNvSpPr>
+          <p:nvPr>
+            <p:ph type="body" idx="1"/>
+          </p:nvPr>
+        </p:nvSpPr>
+        <p:spPr/>
+        <p:txBody>
+          <a:bodyPr/>
+          <a:lstStyle/>
+          <a:p>
+            <a:endParaRPr lang="en-US" dirty="0"/>
+          </a:p>
+        </p:txBody>
+      </p:sp>
+      <p:sp>
+        <p:nvSpPr>
+          <p:cNvPr id="4" name="Slide Number Placeholder 3"/>
+          <p:cNvSpPr>
+            <a:spLocks noGrp="1"/>
+          </p:cNvSpPr>
+          <p:nvPr>
+            <p:ph type="sldNum" sz="quarter" idx="10"/>
+          </p:nvPr>
+        </p:nvSpPr>
+        <p:spPr/>
+        <p:txBody>
+          <a:bodyPr/>
+          <a:lstStyle/>
+          <a:p>
+            <a:fld id="{F7021451-1387-4CA6-816F-3879F97B5CBC}" type="slidenum">
+              <a:rPr lang="en-US"/>
+              <a:t>12</a:t>
+            </a:fld>
+            <a:endParaRPr lang="en-US"/>
+          </a:p>
+        </p:txBody>
+      </p:sp>
+    </p:spTree>
+    <p:extLst>
+      <p:ext uri="{BB962C8B-B14F-4D97-AF65-F5344CB8AC3E}">
+        <p14:creationId xmlns:p14="http://schemas.microsoft.com/office/powerpoint/2010/main" val="1024086991"/>
+      </p:ext>
+    </p:extLst>
+  </p:cSld>
+  <p:clrMapOvr>
+    <a:masterClrMapping/>
+  </p:clrMapOvr>
+</p:notes>
+</file>
+
+<file path=ppt/notesSlides/notesSlide2.xml><?xml version="1.0" encoding="utf-8"?>
+<p:notes xmlns:a="http://schemas.openxmlformats.org/drawingml/2006/main" xmlns:r="http://schemas.openxmlformats.org/officeDocument/2006/relationships" xmlns:p="http://schemas.openxmlformats.org/presentationml/2006/main">
+  <p:cSld>
+    <p:spTree>
+      <p:nvGrpSpPr>
+        <p:cNvPr id="1" name=""/>
+        <p:cNvGrpSpPr/>
+        <p:nvPr/>
+      </p:nvGrpSpPr>
+      <p:grpSpPr>
+        <a:xfrm>
+          <a:off x="0" y="0"/>
+          <a:ext cx="0" cy="0"/>
+          <a:chOff x="0" y="0"/>
+          <a:chExt cx="0" cy="0"/>
+        </a:xfrm>
+      </p:grpSpPr>
+      <p:sp>
+        <p:nvSpPr>
+          <p:cNvPr id="2" name="Slide Image Placeholder 1"/>
+          <p:cNvSpPr>
+            <a:spLocks noGrp="1" noRot="1" noChangeAspect="1"/>
+          </p:cNvSpPr>
+          <p:nvPr>
+            <p:ph type="sldImg"/>
+          </p:nvPr>
+        </p:nvSpPr>
+        <p:spPr/>
+      </p:sp>
+      <p:sp>
+        <p:nvSpPr>
+          <p:cNvPr id="3" name="Notes Placeholder 2"/>
+          <p:cNvSpPr>
+            <a:spLocks noGrp="1"/>
+          </p:cNvSpPr>
+          <p:nvPr>
+            <p:ph type="body" idx="1"/>
+          </p:nvPr>
+        </p:nvSpPr>
+        <p:spPr/>
+        <p:txBody>
+          <a:bodyPr/>
+          <a:lstStyle/>
+          <a:p>
+            <a:endParaRPr lang="en-US" dirty="0"/>
+          </a:p>
+        </p:txBody>
+      </p:sp>
+      <p:sp>
+        <p:nvSpPr>
+          <p:cNvPr id="4" name="Slide Number Placeholder 3"/>
+          <p:cNvSpPr>
+            <a:spLocks noGrp="1"/>
+          </p:cNvSpPr>
+          <p:nvPr>
+            <p:ph type="sldNum" sz="quarter" idx="10"/>
+          </p:nvPr>
+        </p:nvSpPr>
+        <p:spPr/>
+        <p:txBody>
+          <a:bodyPr/>
+          <a:lstStyle/>
+          <a:p>
+            <a:fld id="{F7021451-1387-4CA6-816F-3879F97B5CBC}" type="slidenum">
+              <a:rPr lang="en-US"/>
+              <a:t>2</a:t>
+            </a:fld>
+            <a:endParaRPr lang="en-US"/>
+          </a:p>
+        </p:txBody>
+      </p:sp>
+    </p:spTree>
+    <p:extLst>
+      <p:ext uri="{BB962C8B-B14F-4D97-AF65-F5344CB8AC3E}">
+        <p14:creationId xmlns:p14="http://schemas.microsoft.com/office/powerpoint/2010/main" val="1024086991"/>
+      </p:ext>
+    </p:extLst>
+  </p:cSld>
+  <p:clrMapOvr>
+    <a:masterClrMapping/>
+  </p:clrMapOvr>
+</p:notes>
+</file>
+
+<file path=ppt/notesSlides/notesSlide3.xml><?xml version="1.0" encoding="utf-8"?>
+<p:notes xmlns:a="http://schemas.openxmlformats.org/drawingml/2006/main" xmlns:r="http://schemas.openxmlformats.org/officeDocument/2006/relationships" xmlns:p="http://schemas.openxmlformats.org/presentationml/2006/main">
+  <p:cSld>
+    <p:spTree>
+      <p:nvGrpSpPr>
+        <p:cNvPr id="1" name=""/>
+        <p:cNvGrpSpPr/>
+        <p:nvPr/>
+      </p:nvGrpSpPr>
+      <p:grpSpPr>
+        <a:xfrm>
+          <a:off x="0" y="0"/>
+          <a:ext cx="0" cy="0"/>
+          <a:chOff x="0" y="0"/>
+          <a:chExt cx="0" cy="0"/>
+        </a:xfrm>
+      </p:grpSpPr>
+      <p:sp>
+        <p:nvSpPr>
+          <p:cNvPr id="2" name="Slide Image Placeholder 1"/>
+          <p:cNvSpPr>
+            <a:spLocks noGrp="1" noRot="1" noChangeAspect="1"/>
+          </p:cNvSpPr>
+          <p:nvPr>
+            <p:ph type="sldImg"/>
+          </p:nvPr>
+        </p:nvSpPr>
+        <p:spPr/>
+      </p:sp>
+      <p:sp>
+        <p:nvSpPr>
+          <p:cNvPr id="3" name="Notes Placeholder 2"/>
+          <p:cNvSpPr>
+            <a:spLocks noGrp="1"/>
+          </p:cNvSpPr>
+          <p:nvPr>
+            <p:ph type="body" idx="1"/>
+          </p:nvPr>
+        </p:nvSpPr>
+        <p:spPr/>
+        <p:txBody>
+          <a:bodyPr/>
+          <a:lstStyle/>
+          <a:p>
+            <a:endParaRPr lang="en-US" dirty="0"/>
+          </a:p>
+        </p:txBody>
+      </p:sp>
+      <p:sp>
+        <p:nvSpPr>
+          <p:cNvPr id="4" name="Slide Number Placeholder 3"/>
+          <p:cNvSpPr>
+            <a:spLocks noGrp="1"/>
+          </p:cNvSpPr>
+          <p:nvPr>
+            <p:ph type="sldNum" sz="quarter" idx="10"/>
+          </p:nvPr>
+        </p:nvSpPr>
+        <p:spPr/>
+        <p:txBody>
+          <a:bodyPr/>
+          <a:lstStyle/>
+          <a:p>
+            <a:fld id="{F7021451-1387-4CA6-816F-3879F97B5CBC}" type="slidenum">
+              <a:rPr lang="en-US"/>
+              <a:t>3</a:t>
+            </a:fld>
+            <a:endParaRPr lang="en-US"/>
+          </a:p>
+        </p:txBody>
+      </p:sp>
+    </p:spTree>
+    <p:extLst>
+      <p:ext uri="{BB962C8B-B14F-4D97-AF65-F5344CB8AC3E}">
+        <p14:creationId xmlns:p14="http://schemas.microsoft.com/office/powerpoint/2010/main" val="1024086991"/>
+      </p:ext>
+    </p:extLst>
+  </p:cSld>
+  <p:clrMapOvr>
+    <a:masterClrMapping/>
+  </p:clrMapOvr>
+</p:notes>
+</file>
+
+<file path=ppt/notesSlides/notesSlide4.xml><?xml version="1.0" encoding="utf-8"?>
+<p:notes xmlns:a="http://schemas.openxmlformats.org/drawingml/2006/main" xmlns:r="http://schemas.openxmlformats.org/officeDocument/2006/relationships" xmlns:p="http://schemas.openxmlformats.org/presentationml/2006/main">
+  <p:cSld>
+    <p:spTree>
+      <p:nvGrpSpPr>
+        <p:cNvPr id="1" name=""/>
+        <p:cNvGrpSpPr/>
+        <p:nvPr/>
+      </p:nvGrpSpPr>
+      <p:grpSpPr>
+        <a:xfrm>
+          <a:off x="0" y="0"/>
+          <a:ext cx="0" cy="0"/>
+          <a:chOff x="0" y="0"/>
+          <a:chExt cx="0" cy="0"/>
+        </a:xfrm>
+      </p:grpSpPr>
+      <p:sp>
+        <p:nvSpPr>
+          <p:cNvPr id="2" name="Slide Image Placeholder 1"/>
+          <p:cNvSpPr>
+            <a:spLocks noGrp="1" noRot="1" noChangeAspect="1"/>
+          </p:cNvSpPr>
+          <p:nvPr>
+            <p:ph type="sldImg"/>
+          </p:nvPr>
+        </p:nvSpPr>
+        <p:spPr/>
+      </p:sp>
+      <p:sp>
+        <p:nvSpPr>
+          <p:cNvPr id="3" name="Notes Placeholder 2"/>
+          <p:cNvSpPr>
+            <a:spLocks noGrp="1"/>
+          </p:cNvSpPr>
+          <p:nvPr>
+            <p:ph type="body" idx="1"/>
+          </p:nvPr>
+        </p:nvSpPr>
+        <p:spPr/>
+        <p:txBody>
+          <a:bodyPr/>
+          <a:lstStyle/>
+          <a:p>
+            <a:endParaRPr lang="en-US" dirty="0"/>
+          </a:p>
+        </p:txBody>
+      </p:sp>
+      <p:sp>
+        <p:nvSpPr>
+          <p:cNvPr id="4" name="Slide Number Placeholder 3"/>
+          <p:cNvSpPr>
+            <a:spLocks noGrp="1"/>
+          </p:cNvSpPr>
+          <p:nvPr>
+            <p:ph type="sldNum" sz="quarter" idx="10"/>
+          </p:nvPr>
+        </p:nvSpPr>
+        <p:spPr/>
+        <p:txBody>
+          <a:bodyPr/>
+          <a:lstStyle/>
+          <a:p>
+            <a:fld id="{F7021451-1387-4CA6-816F-3879F97B5CBC}" type="slidenum">
+              <a:rPr lang="en-US"/>
+              <a:t>4</a:t>
+            </a:fld>
+            <a:endParaRPr lang="en-US"/>
+          </a:p>
+        </p:txBody>
+      </p:sp>
+    </p:spTree>
+    <p:extLst>
+      <p:ext uri="{BB962C8B-B14F-4D97-AF65-F5344CB8AC3E}">
+        <p14:creationId xmlns:p14="http://schemas.microsoft.com/office/powerpoint/2010/main" val="1024086991"/>
+      </p:ext>
+    </p:extLst>
+  </p:cSld>
+  <p:clrMapOvr>
+    <a:masterClrMapping/>
+  </p:clrMapOvr>
+</p:notes>
+</file>
+
+<file path=ppt/notesSlides/notesSlide5.xml><?xml version="1.0" encoding="utf-8"?>
+<p:notes xmlns:a="http://schemas.openxmlformats.org/drawingml/2006/main" xmlns:r="http://schemas.openxmlformats.org/officeDocument/2006/relationships" xmlns:p="http://schemas.openxmlformats.org/presentationml/2006/main">
+  <p:cSld>
+    <p:spTree>
+      <p:nvGrpSpPr>
+        <p:cNvPr id="1" name=""/>
+        <p:cNvGrpSpPr/>
+        <p:nvPr/>
+      </p:nvGrpSpPr>
+      <p:grpSpPr>
+        <a:xfrm>
+          <a:off x="0" y="0"/>
+          <a:ext cx="0" cy="0"/>
+          <a:chOff x="0" y="0"/>
+          <a:chExt cx="0" cy="0"/>
+        </a:xfrm>
+      </p:grpSpPr>
+      <p:sp>
+        <p:nvSpPr>
+          <p:cNvPr id="2" name="Slide Image Placeholder 1"/>
+          <p:cNvSpPr>
+            <a:spLocks noGrp="1" noRot="1" noChangeAspect="1"/>
+          </p:cNvSpPr>
+          <p:nvPr>
+            <p:ph type="sldImg"/>
+          </p:nvPr>
+        </p:nvSpPr>
+        <p:spPr/>
+      </p:sp>
+      <p:sp>
+        <p:nvSpPr>
+          <p:cNvPr id="3" name="Notes Placeholder 2"/>
+          <p:cNvSpPr>
+            <a:spLocks noGrp="1"/>
+          </p:cNvSpPr>
+          <p:nvPr>
+            <p:ph type="body" idx="1"/>
+          </p:nvPr>
+        </p:nvSpPr>
+        <p:spPr/>
+        <p:txBody>
+          <a:bodyPr/>
+          <a:lstStyle/>
+          <a:p>
+            <a:endParaRPr lang="en-US" dirty="0"/>
+          </a:p>
+        </p:txBody>
+      </p:sp>
+      <p:sp>
+        <p:nvSpPr>
+          <p:cNvPr id="4" name="Slide Number Placeholder 3"/>
+          <p:cNvSpPr>
+            <a:spLocks noGrp="1"/>
+          </p:cNvSpPr>
+          <p:nvPr>
+            <p:ph type="sldNum" sz="quarter" idx="10"/>
+          </p:nvPr>
+        </p:nvSpPr>
+        <p:spPr/>
+        <p:txBody>
+          <a:bodyPr/>
+          <a:lstStyle/>
+          <a:p>
+            <a:fld id="{F7021451-1387-4CA6-816F-3879F97B5CBC}" type="slidenum">
+              <a:rPr lang="en-US"/>
+              <a:t>5</a:t>
+            </a:fld>
+            <a:endParaRPr lang="en-US"/>
+          </a:p>
+        </p:txBody>
+      </p:sp>
+    </p:spTree>
+    <p:extLst>
+      <p:ext uri="{BB962C8B-B14F-4D97-AF65-F5344CB8AC3E}">
+        <p14:creationId xmlns:p14="http://schemas.microsoft.com/office/powerpoint/2010/main" val="1024086991"/>
+      </p:ext>
+    </p:extLst>
+  </p:cSld>
+  <p:clrMapOvr>
+    <a:masterClrMapping/>
+  </p:clrMapOvr>
+</p:notes>
+</file>
+
+<file path=ppt/notesSlides/notesSlide6.xml><?xml version="1.0" encoding="utf-8"?>
+<p:notes xmlns:a="http://schemas.openxmlformats.org/drawingml/2006/main" xmlns:r="http://schemas.openxmlformats.org/officeDocument/2006/relationships" xmlns:p="http://schemas.openxmlformats.org/presentationml/2006/main">
+  <p:cSld>
+    <p:spTree>
+      <p:nvGrpSpPr>
+        <p:cNvPr id="1" name=""/>
+        <p:cNvGrpSpPr/>
+        <p:nvPr/>
+      </p:nvGrpSpPr>
+      <p:grpSpPr>
+        <a:xfrm>
+          <a:off x="0" y="0"/>
+          <a:ext cx="0" cy="0"/>
+          <a:chOff x="0" y="0"/>
+          <a:chExt cx="0" cy="0"/>
+        </a:xfrm>
+      </p:grpSpPr>
+      <p:sp>
+        <p:nvSpPr>
+          <p:cNvPr id="2" name="Slide Image Placeholder 1"/>
+          <p:cNvSpPr>
+            <a:spLocks noGrp="1" noRot="1" noChangeAspect="1"/>
+          </p:cNvSpPr>
+          <p:nvPr>
+            <p:ph type="sldImg"/>
+          </p:nvPr>
+        </p:nvSpPr>
+        <p:spPr/>
+      </p:sp>
+      <p:sp>
+        <p:nvSpPr>
+          <p:cNvPr id="3" name="Notes Placeholder 2"/>
+          <p:cNvSpPr>
+            <a:spLocks noGrp="1"/>
+          </p:cNvSpPr>
+          <p:nvPr>
+            <p:ph type="body" idx="1"/>
+          </p:nvPr>
+        </p:nvSpPr>
+        <p:spPr/>
+        <p:txBody>
+          <a:bodyPr/>
+          <a:lstStyle/>
+          <a:p>
+            <a:endParaRPr lang="en-US" dirty="0"/>
+          </a:p>
+        </p:txBody>
+      </p:sp>
+      <p:sp>
+        <p:nvSpPr>
+          <p:cNvPr id="4" name="Slide Number Placeholder 3"/>
+          <p:cNvSpPr>
+            <a:spLocks noGrp="1"/>
+          </p:cNvSpPr>
+          <p:nvPr>
+            <p:ph type="sldNum" sz="quarter" idx="10"/>
+          </p:nvPr>
+        </p:nvSpPr>
+        <p:spPr/>
+        <p:txBody>
+          <a:bodyPr/>
+          <a:lstStyle/>
+          <a:p>
+            <a:fld id="{F7021451-1387-4CA6-816F-3879F97B5CBC}" type="slidenum">
+              <a:rPr lang="en-US"/>
+              <a:t>6</a:t>
+            </a:fld>
+            <a:endParaRPr lang="en-US"/>
+          </a:p>
+        </p:txBody>
+      </p:sp>
+    </p:spTree>
+    <p:extLst>
+      <p:ext uri="{BB962C8B-B14F-4D97-AF65-F5344CB8AC3E}">
+        <p14:creationId xmlns:p14="http://schemas.microsoft.com/office/powerpoint/2010/main" val="1024086991"/>
+      </p:ext>
+    </p:extLst>
+  </p:cSld>
+  <p:clrMapOvr>
+    <a:masterClrMapping/>
+  </p:clrMapOvr>
+</p:notes>
+</file>
+
+<file path=ppt/notesSlides/notesSlide7.xml><?xml version="1.0" encoding="utf-8"?>
+<p:notes xmlns:a="http://schemas.openxmlformats.org/drawingml/2006/main" xmlns:r="http://schemas.openxmlformats.org/officeDocument/2006/relationships" xmlns:p="http://schemas.openxmlformats.org/presentationml/2006/main">
+  <p:cSld>
+    <p:spTree>
+      <p:nvGrpSpPr>
+        <p:cNvPr id="1" name=""/>
+        <p:cNvGrpSpPr/>
+        <p:nvPr/>
+      </p:nvGrpSpPr>
+      <p:grpSpPr>
+        <a:xfrm>
+          <a:off x="0" y="0"/>
+          <a:ext cx="0" cy="0"/>
+          <a:chOff x="0" y="0"/>
+          <a:chExt cx="0" cy="0"/>
+        </a:xfrm>
+      </p:grpSpPr>
+      <p:sp>
+        <p:nvSpPr>
+          <p:cNvPr id="2" name="Slide Image Placeholder 1"/>
+          <p:cNvSpPr>
+            <a:spLocks noGrp="1" noRot="1" noChangeAspect="1"/>
+          </p:cNvSpPr>
+          <p:nvPr>
+            <p:ph type="sldImg"/>
+          </p:nvPr>
+        </p:nvSpPr>
+        <p:spPr/>
+      </p:sp>
+      <p:sp>
+        <p:nvSpPr>
+          <p:cNvPr id="3" name="Notes Placeholder 2"/>
+          <p:cNvSpPr>
+            <a:spLocks noGrp="1"/>
+          </p:cNvSpPr>
+          <p:nvPr>
+            <p:ph type="body" idx="1"/>
+          </p:nvPr>
+        </p:nvSpPr>
+        <p:spPr/>
+        <p:txBody>
+          <a:bodyPr/>
+          <a:lstStyle/>
+          <a:p>
+            <a:endParaRPr lang="en-US" dirty="0"/>
+          </a:p>
+        </p:txBody>
+      </p:sp>
+      <p:sp>
+        <p:nvSpPr>
+          <p:cNvPr id="4" name="Slide Number Placeholder 3"/>
+          <p:cNvSpPr>
+            <a:spLocks noGrp="1"/>
+          </p:cNvSpPr>
+          <p:nvPr>
+            <p:ph type="sldNum" sz="quarter" idx="10"/>
+          </p:nvPr>
+        </p:nvSpPr>
+        <p:spPr/>
+        <p:txBody>
+          <a:bodyPr/>
+          <a:lstStyle/>
+          <a:p>
+            <a:fld id="{F7021451-1387-4CA6-816F-3879F97B5CBC}" type="slidenum">
+              <a:rPr lang="en-US"/>
+              <a:t>7</a:t>
+            </a:fld>
+            <a:endParaRPr lang="en-US"/>
+          </a:p>
+        </p:txBody>
+      </p:sp>
+    </p:spTree>
+    <p:extLst>
+      <p:ext uri="{BB962C8B-B14F-4D97-AF65-F5344CB8AC3E}">
+        <p14:creationId xmlns:p14="http://schemas.microsoft.com/office/powerpoint/2010/main" val="1024086991"/>
+      </p:ext>
+    </p:extLst>
+  </p:cSld>
+  <p:clrMapOvr>
+    <a:masterClrMapping/>
+  </p:clrMapOvr>
+</p:notes>
+</file>
+
+<file path=ppt/notesSlides/notesSlide8.xml><?xml version="1.0" encoding="utf-8"?>
+<p:notes xmlns:a="http://schemas.openxmlformats.org/drawingml/2006/main" xmlns:r="http://schemas.openxmlformats.org/officeDocument/2006/relationships" xmlns:p="http://schemas.openxmlformats.org/presentationml/2006/main">
+  <p:cSld>
+    <p:spTree>
+      <p:nvGrpSpPr>
+        <p:cNvPr id="1" name=""/>
+        <p:cNvGrpSpPr/>
+        <p:nvPr/>
+      </p:nvGrpSpPr>
+      <p:grpSpPr>
+        <a:xfrm>
+          <a:off x="0" y="0"/>
+          <a:ext cx="0" cy="0"/>
+          <a:chOff x="0" y="0"/>
+          <a:chExt cx="0" cy="0"/>
+        </a:xfrm>
+      </p:grpSpPr>
+      <p:sp>
+        <p:nvSpPr>
+          <p:cNvPr id="2" name="Slide Image Placeholder 1"/>
+          <p:cNvSpPr>
+            <a:spLocks noGrp="1" noRot="1" noChangeAspect="1"/>
+          </p:cNvSpPr>
+          <p:nvPr>
+            <p:ph type="sldImg"/>
+          </p:nvPr>
+        </p:nvSpPr>
+        <p:spPr/>
+      </p:sp>
+      <p:sp>
+        <p:nvSpPr>
+          <p:cNvPr id="3" name="Notes Placeholder 2"/>
+          <p:cNvSpPr>
+            <a:spLocks noGrp="1"/>
+          </p:cNvSpPr>
+          <p:nvPr>
+            <p:ph type="body" idx="1"/>
+          </p:nvPr>
+        </p:nvSpPr>
+        <p:spPr/>
+        <p:txBody>
+          <a:bodyPr/>
+          <a:lstStyle/>
+          <a:p>
+            <a:endParaRPr lang="en-US" dirty="0"/>
+          </a:p>
+        </p:txBody>
+      </p:sp>
+      <p:sp>
+        <p:nvSpPr>
+          <p:cNvPr id="4" name="Slide Number Placeholder 3"/>
+          <p:cNvSpPr>
+            <a:spLocks noGrp="1"/>
+          </p:cNvSpPr>
+          <p:nvPr>
+            <p:ph type="sldNum" sz="quarter" idx="10"/>
+          </p:nvPr>
+        </p:nvSpPr>
+        <p:spPr/>
+        <p:txBody>
+          <a:bodyPr/>
+          <a:lstStyle/>
+          <a:p>
+            <a:fld id="{F7021451-1387-4CA6-816F-3879F97B5CBC}" type="slidenum">
+              <a:rPr lang="en-US"/>
+              <a:t>8</a:t>
+            </a:fld>
+            <a:endParaRPr lang="en-US"/>
+          </a:p>
+        </p:txBody>
+      </p:sp>
+    </p:spTree>
+    <p:extLst>
+      <p:ext uri="{BB962C8B-B14F-4D97-AF65-F5344CB8AC3E}">
+        <p14:creationId xmlns:p14="http://schemas.microsoft.com/office/powerpoint/2010/main" val="1024086991"/>
+      </p:ext>
+    </p:extLst>
+  </p:cSld>
+  <p:clrMapOvr>
+    <a:masterClrMapping/>
+  </p:clrMapOvr>
+</p:notes>
+</file>
+
+<file path=ppt/notesSlides/notesSlide9.xml><?xml version="1.0" encoding="utf-8"?>
+<p:notes xmlns:a="http://schemas.openxmlformats.org/drawingml/2006/main" xmlns:r="http://schemas.openxmlformats.org/officeDocument/2006/relationships" xmlns:p="http://schemas.openxmlformats.org/presentationml/2006/main">
+  <p:cSld>
+    <p:spTree>
+      <p:nvGrpSpPr>
+        <p:cNvPr id="1" name=""/>
+        <p:cNvGrpSpPr/>
+        <p:nvPr/>
+      </p:nvGrpSpPr>
+      <p:grpSpPr>
+        <a:xfrm>
+          <a:off x="0" y="0"/>
+          <a:ext cx="0" cy="0"/>
+          <a:chOff x="0" y="0"/>
+          <a:chExt cx="0" cy="0"/>
+        </a:xfrm>
+      </p:grpSpPr>
+      <p:sp>
+        <p:nvSpPr>
+          <p:cNvPr id="2" name="Slide Image Placeholder 1"/>
+          <p:cNvSpPr>
+            <a:spLocks noGrp="1" noRot="1" noChangeAspect="1"/>
+          </p:cNvSpPr>
+          <p:nvPr>
+            <p:ph type="sldImg"/>
+          </p:nvPr>
+        </p:nvSpPr>
+        <p:spPr/>
+      </p:sp>
+      <p:sp>
+        <p:nvSpPr>
+          <p:cNvPr id="3" name="Notes Placeholder 2"/>
+          <p:cNvSpPr>
+            <a:spLocks noGrp="1"/>
+          </p:cNvSpPr>
+          <p:nvPr>
+            <p:ph type="body" idx="1"/>
+          </p:nvPr>
+        </p:nvSpPr>
+        <p:spPr/>
+        <p:txBody>
+          <a:bodyPr/>
+          <a:lstStyle/>
+          <a:p>
+            <a:endParaRPr lang="en-US" dirty="0"/>
+          </a:p>
+        </p:txBody>
+      </p:sp>
+      <p:sp>
+        <p:nvSpPr>
+          <p:cNvPr id="4" name="Slide Number Placeholder 3"/>
+          <p:cNvSpPr>
+            <a:spLocks noGrp="1"/>
+          </p:cNvSpPr>
+          <p:nvPr>
+            <p:ph type="sldNum" sz="quarter" idx="10"/>
+          </p:nvPr>
+        </p:nvSpPr>
+        <p:spPr/>
+        <p:txBody>
+          <a:bodyPr/>
+          <a:lstStyle/>
+          <a:p>
+            <a:fld id="{F7021451-1387-4CA6-816F-3879F97B5CBC}" type="slidenum">
+              <a:rPr lang="en-US"/>
+              <a:t>9</a:t>
+            </a:fld>
+            <a:endParaRPr lang="en-US"/>
+          </a:p>
+        </p:txBody>
+      </p:sp>
+    </p:spTree>
+    <p:extLst>
+      <p:ext uri="{BB962C8B-B14F-4D97-AF65-F5344CB8AC3E}">
+        <p14:creationId xmlns:p14="http://schemas.microsoft.com/office/powerpoint/2010/main" val="1024086991"/>
+      </p:ext>
+    </p:extLst>
+  </p:cSld>
+  <p:clrMapOvr>
+    <a:masterClrMapping/>
+  </p:clrMapOvr>
+</p:notes>
 </file>
 
 <file path=ppt/slideLayouts/slideLayout1.xml><?xml version="1.0" encoding="utf-8"?>
@@ -523,7 +1659,7 @@
           <p:nvPr/>
         </p:nvPicPr>
         <p:blipFill>
-          <a:blip r:embed="rId2"/>
+          <a:blip r:embed="rId3"/>
           <a:stretch>
             <a:fillRect/>
           </a:stretch>
@@ -705,6 +1841,45 @@
               <a:t>105 min  ·  40 lecture / demo  +  65 lab</a:t>
             </a:r>
             <a:endParaRPr lang="en-US" sz="1700" dirty="0"/>
+          </a:p>
+        </p:txBody>
+      </p:sp>
+      <p:sp>
+        <p:nvSpPr>
+          <p:cNvPr id="9" name="Text 6"/>
+          <p:cNvSpPr/>
+          <p:nvPr/>
+        </p:nvSpPr>
+        <p:spPr>
+          <a:xfrm>
+            <a:off x="640080" y="4462272"/>
+            <a:ext cx="8046720" cy="292608"/>
+          </a:xfrm>
+          <a:prstGeom prst="rect">
+            <a:avLst/>
+          </a:prstGeom>
+          <a:noFill/>
+          <a:ln/>
+        </p:spPr>
+        <p:txBody>
+          <a:bodyPr wrap="square" lIns="0" tIns="0" rIns="0" bIns="0" rtlCol="0" anchor="ctr"/>
+          <a:lstStyle/>
+          <a:p>
+            <a:pPr marL="0" indent="0">
+              <a:buNone/>
+            </a:pPr>
+            <a:r>
+              <a:rPr lang="en-US" sz="1000" i="1" dirty="0">
+                <a:solidFill>
+                  <a:srgbClr val="615C52"/>
+                </a:solidFill>
+                <a:latin typeface="Inter" pitchFamily="34" charset="0"/>
+                <a:ea typeface="Inter" pitchFamily="34" charset="-122"/>
+                <a:cs typeface="Inter" pitchFamily="34" charset="-120"/>
+              </a:rPr>
+              <a:t>dotnetclaude.com  ·  .NET AI with Claude Workshop</a:t>
+            </a:r>
+            <a:endParaRPr lang="en-US" sz="1000" dirty="0"/>
           </a:p>
         </p:txBody>
       </p:sp>
@@ -750,7 +1925,7 @@
           <p:nvPr/>
         </p:nvPicPr>
         <p:blipFill>
-          <a:blip r:embed="rId2"/>
+          <a:blip r:embed="rId3"/>
           <a:stretch>
             <a:fillRect/>
           </a:stretch>
@@ -974,7 +2149,7 @@
           <p:nvPr/>
         </p:nvPicPr>
         <p:blipFill>
-          <a:blip r:embed="rId3"/>
+          <a:blip r:embed="rId4"/>
           <a:stretch>
             <a:fillRect/>
           </a:stretch>
@@ -1064,7 +2239,7 @@
           <p:nvPr/>
         </p:nvPicPr>
         <p:blipFill>
-          <a:blip r:embed="rId3"/>
+          <a:blip r:embed="rId4"/>
           <a:stretch>
             <a:fillRect/>
           </a:stretch>
@@ -1154,7 +2329,7 @@
           <p:nvPr/>
         </p:nvPicPr>
         <p:blipFill>
-          <a:blip r:embed="rId3"/>
+          <a:blip r:embed="rId4"/>
           <a:stretch>
             <a:fillRect/>
           </a:stretch>
@@ -1485,7 +2660,7 @@
           <p:nvPr/>
         </p:nvPicPr>
         <p:blipFill>
-          <a:blip r:embed="rId2"/>
+          <a:blip r:embed="rId3"/>
           <a:stretch>
             <a:fillRect/>
           </a:stretch>
@@ -1577,7 +2752,7 @@
           <p:nvPr/>
         </p:nvPicPr>
         <p:blipFill>
-          <a:blip r:embed="rId3"/>
+          <a:blip r:embed="rId4"/>
           <a:stretch>
             <a:fillRect/>
           </a:stretch>
@@ -1786,7 +2961,7 @@
           <p:nvPr/>
         </p:nvPicPr>
         <p:blipFill>
-          <a:blip r:embed="rId4"/>
+          <a:blip r:embed="rId5"/>
           <a:stretch>
             <a:fillRect/>
           </a:stretch>
@@ -2117,7 +3292,7 @@
           <p:nvPr/>
         </p:nvPicPr>
         <p:blipFill>
-          <a:blip r:embed="rId2"/>
+          <a:blip r:embed="rId3"/>
           <a:stretch>
             <a:fillRect/>
           </a:stretch>
@@ -2177,7 +3352,7 @@
           <p:nvPr/>
         </p:nvPicPr>
         <p:blipFill>
-          <a:blip r:embed="rId3"/>
+          <a:blip r:embed="rId4"/>
           <a:stretch>
             <a:fillRect/>
           </a:stretch>
@@ -2814,7 +3989,7 @@
           <p:nvPr/>
         </p:nvPicPr>
         <p:blipFill>
-          <a:blip r:embed="rId4"/>
+          <a:blip r:embed="rId5"/>
           <a:stretch>
             <a:fillRect/>
           </a:stretch>
@@ -2877,7 +4052,7 @@
           <p:nvPr/>
         </p:nvPicPr>
         <p:blipFill>
-          <a:blip r:embed="rId4"/>
+          <a:blip r:embed="rId5"/>
           <a:stretch>
             <a:fillRect/>
           </a:stretch>
@@ -2940,7 +4115,7 @@
           <p:nvPr/>
         </p:nvPicPr>
         <p:blipFill>
-          <a:blip r:embed="rId4"/>
+          <a:blip r:embed="rId5"/>
           <a:stretch>
             <a:fillRect/>
           </a:stretch>
@@ -3271,7 +4446,7 @@
           <p:nvPr/>
         </p:nvPicPr>
         <p:blipFill>
-          <a:blip r:embed="rId2"/>
+          <a:blip r:embed="rId3"/>
           <a:stretch>
             <a:fillRect/>
           </a:stretch>
@@ -3322,7 +4497,7 @@
           <p:nvPr/>
         </p:nvPicPr>
         <p:blipFill>
-          <a:blip r:embed="rId3"/>
+          <a:blip r:embed="rId4"/>
           <a:stretch>
             <a:fillRect/>
           </a:stretch>
@@ -3412,7 +4587,7 @@
           <p:nvPr/>
         </p:nvPicPr>
         <p:blipFill>
-          <a:blip r:embed="rId3"/>
+          <a:blip r:embed="rId4"/>
           <a:stretch>
             <a:fillRect/>
           </a:stretch>
@@ -3502,7 +4677,7 @@
           <p:nvPr/>
         </p:nvPicPr>
         <p:blipFill>
-          <a:blip r:embed="rId3"/>
+          <a:blip r:embed="rId4"/>
           <a:stretch>
             <a:fillRect/>
           </a:stretch>
@@ -3592,7 +4767,7 @@
           <p:nvPr/>
         </p:nvPicPr>
         <p:blipFill>
-          <a:blip r:embed="rId3"/>
+          <a:blip r:embed="rId4"/>
           <a:stretch>
             <a:fillRect/>
           </a:stretch>
@@ -3682,7 +4857,7 @@
           <p:nvPr/>
         </p:nvPicPr>
         <p:blipFill>
-          <a:blip r:embed="rId3"/>
+          <a:blip r:embed="rId4"/>
           <a:stretch>
             <a:fillRect/>
           </a:stretch>
@@ -3772,7 +4947,7 @@
           <p:nvPr/>
         </p:nvPicPr>
         <p:blipFill>
-          <a:blip r:embed="rId3"/>
+          <a:blip r:embed="rId4"/>
           <a:stretch>
             <a:fillRect/>
           </a:stretch>
@@ -3862,7 +5037,7 @@
           <p:nvPr/>
         </p:nvPicPr>
         <p:blipFill>
-          <a:blip r:embed="rId3"/>
+          <a:blip r:embed="rId4"/>
           <a:stretch>
             <a:fillRect/>
           </a:stretch>
@@ -4114,7 +5289,7 @@
           <p:nvPr/>
         </p:nvPicPr>
         <p:blipFill>
-          <a:blip r:embed="rId2"/>
+          <a:blip r:embed="rId3"/>
           <a:stretch>
             <a:fillRect/>
           </a:stretch>
@@ -4206,7 +5381,7 @@
           <p:nvPr/>
         </p:nvPicPr>
         <p:blipFill>
-          <a:blip r:embed="rId3"/>
+          <a:blip r:embed="rId4"/>
           <a:stretch>
             <a:fillRect/>
           </a:stretch>
@@ -4337,7 +5512,7 @@
           <p:nvPr/>
         </p:nvPicPr>
         <p:blipFill>
-          <a:blip r:embed="rId4"/>
+          <a:blip r:embed="rId5"/>
           <a:stretch>
             <a:fillRect/>
           </a:stretch>
@@ -4468,7 +5643,7 @@
           <p:nvPr/>
         </p:nvPicPr>
         <p:blipFill>
-          <a:blip r:embed="rId5"/>
+          <a:blip r:embed="rId6"/>
           <a:stretch>
             <a:fillRect/>
           </a:stretch>
@@ -4953,7 +6128,7 @@
           <p:nvPr/>
         </p:nvPicPr>
         <p:blipFill>
-          <a:blip r:embed="rId2"/>
+          <a:blip r:embed="rId3"/>
           <a:stretch>
             <a:fillRect/>
           </a:stretch>
@@ -5113,7 +6288,7 @@
           <p:nvPr/>
         </p:nvPicPr>
         <p:blipFill>
-          <a:blip r:embed="rId3"/>
+          <a:blip r:embed="rId4"/>
           <a:stretch>
             <a:fillRect/>
           </a:stretch>
@@ -5242,7 +6417,7 @@
           <p:nvPr/>
         </p:nvPicPr>
         <p:blipFill>
-          <a:blip r:embed="rId4"/>
+          <a:blip r:embed="rId5"/>
           <a:stretch>
             <a:fillRect/>
           </a:stretch>
@@ -5371,7 +6546,7 @@
           <p:nvPr/>
         </p:nvPicPr>
         <p:blipFill>
-          <a:blip r:embed="rId5"/>
+          <a:blip r:embed="rId6"/>
           <a:stretch>
             <a:fillRect/>
           </a:stretch>
@@ -5662,7 +6837,7 @@
           <p:nvPr/>
         </p:nvPicPr>
         <p:blipFill>
-          <a:blip r:embed="rId2"/>
+          <a:blip r:embed="rId3"/>
           <a:stretch>
             <a:fillRect/>
           </a:stretch>
@@ -5749,174 +6924,6 @@
           <p:nvPr/>
         </p:nvPicPr>
         <p:blipFill>
-          <a:blip r:embed="rId3"/>
-          <a:stretch>
-            <a:fillRect/>
-          </a:stretch>
-        </p:blipFill>
-        <p:spPr>
-          <a:xfrm>
-            <a:off x="947318" y="1815998"/>
-            <a:ext cx="263347" cy="263347"/>
-          </a:xfrm>
-          <a:prstGeom prst="rect">
-            <a:avLst/>
-          </a:prstGeom>
-        </p:spPr>
-      </p:pic>
-      <p:sp>
-        <p:nvSpPr>
-          <p:cNvPr id="8" name="Text 4"/>
-          <p:cNvSpPr/>
-          <p:nvPr/>
-        </p:nvSpPr>
-        <p:spPr>
-          <a:xfrm>
-            <a:off x="1554480" y="1572768"/>
-            <a:ext cx="2743200" cy="365760"/>
-          </a:xfrm>
-          <a:prstGeom prst="rect">
-            <a:avLst/>
-          </a:prstGeom>
-          <a:noFill/>
-          <a:ln/>
-        </p:spPr>
-        <p:txBody>
-          <a:bodyPr wrap="square" lIns="0" tIns="0" rIns="0" bIns="0" rtlCol="0" anchor="ctr"/>
-          <a:lstStyle/>
-          <a:p>
-            <a:pPr marL="0" indent="0">
-              <a:buNone/>
-            </a:pPr>
-            <a:r>
-              <a:rPr lang="en-US" sz="2200" b="1" dirty="0">
-                <a:solidFill>
-                  <a:srgbClr val="141413"/>
-                </a:solidFill>
-                <a:latin typeface="Inter" pitchFamily="34" charset="0"/>
-                <a:ea typeface="Inter" pitchFamily="34" charset="-122"/>
-                <a:cs typeface="Inter" pitchFamily="34" charset="-120"/>
-              </a:rPr>
-              <a:t>Rider</a:t>
-            </a:r>
-            <a:endParaRPr lang="en-US" sz="2200" dirty="0"/>
-          </a:p>
-        </p:txBody>
-      </p:sp>
-      <p:sp>
-        <p:nvSpPr>
-          <p:cNvPr id="9" name="Text 5"/>
-          <p:cNvSpPr/>
-          <p:nvPr/>
-        </p:nvSpPr>
-        <p:spPr>
-          <a:xfrm>
-            <a:off x="1554480" y="1956816"/>
-            <a:ext cx="2743200" cy="640080"/>
-          </a:xfrm>
-          <a:prstGeom prst="rect">
-            <a:avLst/>
-          </a:prstGeom>
-          <a:noFill/>
-          <a:ln/>
-        </p:spPr>
-        <p:txBody>
-          <a:bodyPr wrap="square" lIns="0" tIns="0" rIns="0" bIns="0" rtlCol="0" anchor="t"/>
-          <a:lstStyle/>
-          <a:p>
-            <a:pPr marL="0" indent="0">
-              <a:buNone/>
-            </a:pPr>
-            <a:r>
-              <a:rPr lang="en-US" sz="1300" dirty="0">
-                <a:solidFill>
-                  <a:srgbClr val="141413"/>
-                </a:solidFill>
-                <a:latin typeface="Inter" pitchFamily="34" charset="0"/>
-                <a:ea typeface="Inter" pitchFamily="34" charset="-122"/>
-                <a:cs typeface="Inter" pitchFamily="34" charset="-120"/>
-              </a:rPr>
-              <a:t>Your .NET-native IDE — start here</a:t>
-            </a:r>
-            <a:endParaRPr lang="en-US" sz="1300" dirty="0"/>
-          </a:p>
-        </p:txBody>
-      </p:sp>
-      <p:sp>
-        <p:nvSpPr>
-          <p:cNvPr id="10" name="Text 6"/>
-          <p:cNvSpPr/>
-          <p:nvPr/>
-        </p:nvSpPr>
-        <p:spPr>
-          <a:xfrm>
-            <a:off x="822960" y="2487168"/>
-            <a:ext cx="3566160" cy="274320"/>
-          </a:xfrm>
-          <a:prstGeom prst="rect">
-            <a:avLst/>
-          </a:prstGeom>
-          <a:noFill/>
-          <a:ln/>
-        </p:spPr>
-        <p:txBody>
-          <a:bodyPr wrap="square" lIns="0" tIns="0" rIns="0" bIns="0" rtlCol="0" anchor="ctr"/>
-          <a:lstStyle/>
-          <a:p>
-            <a:pPr marL="0" indent="0">
-              <a:buNone/>
-            </a:pPr>
-            <a:r>
-              <a:rPr lang="en-US" sz="1200" i="1" dirty="0">
-                <a:solidFill>
-                  <a:srgbClr val="615C52"/>
-                </a:solidFill>
-                <a:latin typeface="Inter" pitchFamily="34" charset="0"/>
-                <a:ea typeface="Inter" pitchFamily="34" charset="-122"/>
-                <a:cs typeface="Inter" pitchFamily="34" charset="-120"/>
-              </a:rPr>
-              <a:t>Also: IntelliJ · PyCharm · WebStorm</a:t>
-            </a:r>
-            <a:endParaRPr lang="en-US" sz="1200" dirty="0"/>
-          </a:p>
-        </p:txBody>
-      </p:sp>
-      <p:sp>
-        <p:nvSpPr>
-          <p:cNvPr id="11" name="Shape 7"/>
-          <p:cNvSpPr/>
-          <p:nvPr/>
-        </p:nvSpPr>
-        <p:spPr>
-          <a:xfrm>
-            <a:off x="4800600" y="1481328"/>
-            <a:ext cx="420624" cy="420624"/>
-          </a:xfrm>
-          <a:prstGeom prst="ellipse">
-            <a:avLst/>
-          </a:prstGeom>
-          <a:solidFill>
-            <a:srgbClr val="D97757"/>
-          </a:solidFill>
-          <a:ln/>
-        </p:spPr>
-        <p:txBody>
-          <a:bodyPr/>
-          <a:lstStyle/>
-          <a:p>
-            <a:endParaRPr lang="en-US"/>
-          </a:p>
-        </p:txBody>
-      </p:sp>
-      <p:pic>
-        <p:nvPicPr>
-          <p:cNvPr id="12" name="Image 2" descr="preencoded.png"/>
-          <p:cNvPicPr>
-            <a:picLocks noChangeAspect="1"/>
-          </p:cNvPicPr>
-          <p:nvPr/>
-        </p:nvPicPr>
-        <p:blipFill>
           <a:blip r:embed="rId4"/>
           <a:stretch>
             <a:fillRect/>
@@ -5924,8 +6931,8 @@
         </p:blipFill>
         <p:spPr>
           <a:xfrm>
-            <a:off x="4909962" y="1590690"/>
-            <a:ext cx="201900" cy="201900"/>
+            <a:off x="947318" y="1815998"/>
+            <a:ext cx="263347" cy="263347"/>
           </a:xfrm>
           <a:prstGeom prst="rect">
             <a:avLst/>
@@ -5934,14 +6941,14 @@
       </p:pic>
       <p:sp>
         <p:nvSpPr>
-          <p:cNvPr id="13" name="Text 8"/>
-          <p:cNvSpPr/>
-          <p:nvPr/>
-        </p:nvSpPr>
-        <p:spPr>
-          <a:xfrm>
-            <a:off x="5367528" y="1444752"/>
-            <a:ext cx="3108960" cy="292608"/>
+          <p:cNvPr id="8" name="Text 4"/>
+          <p:cNvSpPr/>
+          <p:nvPr/>
+        </p:nvSpPr>
+        <p:spPr>
+          <a:xfrm>
+            <a:off x="1554480" y="1572768"/>
+            <a:ext cx="2743200" cy="365760"/>
           </a:xfrm>
           <a:prstGeom prst="rect">
             <a:avLst/>
@@ -5957,7 +6964,7 @@
               <a:buNone/>
             </a:pPr>
             <a:r>
-              <a:rPr lang="en-US" sz="1450" b="1" dirty="0">
+              <a:rPr lang="en-US" sz="2200" b="1" dirty="0">
                 <a:solidFill>
                   <a:srgbClr val="141413"/>
                 </a:solidFill>
@@ -5965,22 +6972,61 @@
                 <a:ea typeface="Inter" pitchFamily="34" charset="-122"/>
                 <a:cs typeface="Inter" pitchFamily="34" charset="-120"/>
               </a:rPr>
-              <a:t>Install from Marketplace</a:t>
-            </a:r>
-            <a:endParaRPr lang="en-US" sz="1450" dirty="0"/>
-          </a:p>
-        </p:txBody>
-      </p:sp>
-      <p:sp>
-        <p:nvSpPr>
-          <p:cNvPr id="14" name="Text 9"/>
-          <p:cNvSpPr/>
-          <p:nvPr/>
-        </p:nvSpPr>
-        <p:spPr>
-          <a:xfrm>
-            <a:off x="5367528" y="1728216"/>
-            <a:ext cx="3200400" cy="274320"/>
+              <a:t>Rider</a:t>
+            </a:r>
+            <a:endParaRPr lang="en-US" sz="2200" dirty="0"/>
+          </a:p>
+        </p:txBody>
+      </p:sp>
+      <p:sp>
+        <p:nvSpPr>
+          <p:cNvPr id="9" name="Text 5"/>
+          <p:cNvSpPr/>
+          <p:nvPr/>
+        </p:nvSpPr>
+        <p:spPr>
+          <a:xfrm>
+            <a:off x="1554480" y="1956816"/>
+            <a:ext cx="2743200" cy="640080"/>
+          </a:xfrm>
+          <a:prstGeom prst="rect">
+            <a:avLst/>
+          </a:prstGeom>
+          <a:noFill/>
+          <a:ln/>
+        </p:spPr>
+        <p:txBody>
+          <a:bodyPr wrap="square" lIns="0" tIns="0" rIns="0" bIns="0" rtlCol="0" anchor="t"/>
+          <a:lstStyle/>
+          <a:p>
+            <a:pPr marL="0" indent="0">
+              <a:buNone/>
+            </a:pPr>
+            <a:r>
+              <a:rPr lang="en-US" sz="1300" dirty="0">
+                <a:solidFill>
+                  <a:srgbClr val="141413"/>
+                </a:solidFill>
+                <a:latin typeface="Inter" pitchFamily="34" charset="0"/>
+                <a:ea typeface="Inter" pitchFamily="34" charset="-122"/>
+                <a:cs typeface="Inter" pitchFamily="34" charset="-120"/>
+              </a:rPr>
+              <a:t>Your .NET-native IDE — start here</a:t>
+            </a:r>
+            <a:endParaRPr lang="en-US" sz="1300" dirty="0"/>
+          </a:p>
+        </p:txBody>
+      </p:sp>
+      <p:sp>
+        <p:nvSpPr>
+          <p:cNvPr id="10" name="Text 6"/>
+          <p:cNvSpPr/>
+          <p:nvPr/>
+        </p:nvSpPr>
+        <p:spPr>
+          <a:xfrm>
+            <a:off x="822960" y="2487168"/>
+            <a:ext cx="3566160" cy="274320"/>
           </a:xfrm>
           <a:prstGeom prst="rect">
             <a:avLst/>
@@ -5996,7 +7042,7 @@
               <a:buNone/>
             </a:pPr>
             <a:r>
-              <a:rPr lang="en-US" sz="1200" dirty="0">
+              <a:rPr lang="en-US" sz="1200" i="1" dirty="0">
                 <a:solidFill>
                   <a:srgbClr val="615C52"/>
                 </a:solidFill>
@@ -6004,7 +7050,7 @@
                 <a:ea typeface="Inter" pitchFamily="34" charset="-122"/>
                 <a:cs typeface="Inter" pitchFamily="34" charset="-120"/>
               </a:rPr>
-              <a:t>Search “Claude Code”</a:t>
+              <a:t>Also: IntelliJ · PyCharm · WebStorm</a:t>
             </a:r>
             <a:endParaRPr lang="en-US" sz="1200" dirty="0"/>
           </a:p>
@@ -6012,13 +7058,13 @@
       </p:sp>
       <p:sp>
         <p:nvSpPr>
-          <p:cNvPr id="15" name="Shape 10"/>
-          <p:cNvSpPr/>
-          <p:nvPr/>
-        </p:nvSpPr>
-        <p:spPr>
-          <a:xfrm>
-            <a:off x="4800600" y="2075688"/>
+          <p:cNvPr id="11" name="Shape 7"/>
+          <p:cNvSpPr/>
+          <p:nvPr/>
+        </p:nvSpPr>
+        <p:spPr>
+          <a:xfrm>
+            <a:off x="4800600" y="1481328"/>
             <a:ext cx="420624" cy="420624"/>
           </a:xfrm>
           <a:prstGeom prst="ellipse">
@@ -6039,7 +7085,7 @@
       </p:sp>
       <p:pic>
         <p:nvPicPr>
-          <p:cNvPr id="16" name="Image 3" descr="preencoded.png"/>
+          <p:cNvPr id="12" name="Image 2" descr="preencoded.png"/>
           <p:cNvPicPr>
             <a:picLocks noChangeAspect="1"/>
           </p:cNvPicPr>
@@ -6053,6 +7099,135 @@
         </p:blipFill>
         <p:spPr>
           <a:xfrm>
+            <a:off x="4909962" y="1590690"/>
+            <a:ext cx="201900" cy="201900"/>
+          </a:xfrm>
+          <a:prstGeom prst="rect">
+            <a:avLst/>
+          </a:prstGeom>
+        </p:spPr>
+      </p:pic>
+      <p:sp>
+        <p:nvSpPr>
+          <p:cNvPr id="13" name="Text 8"/>
+          <p:cNvSpPr/>
+          <p:nvPr/>
+        </p:nvSpPr>
+        <p:spPr>
+          <a:xfrm>
+            <a:off x="5367528" y="1444752"/>
+            <a:ext cx="3108960" cy="292608"/>
+          </a:xfrm>
+          <a:prstGeom prst="rect">
+            <a:avLst/>
+          </a:prstGeom>
+          <a:noFill/>
+          <a:ln/>
+        </p:spPr>
+        <p:txBody>
+          <a:bodyPr wrap="square" lIns="0" tIns="0" rIns="0" bIns="0" rtlCol="0" anchor="ctr"/>
+          <a:lstStyle/>
+          <a:p>
+            <a:pPr marL="0" indent="0">
+              <a:buNone/>
+            </a:pPr>
+            <a:r>
+              <a:rPr lang="en-US" sz="1450" b="1" dirty="0">
+                <a:solidFill>
+                  <a:srgbClr val="141413"/>
+                </a:solidFill>
+                <a:latin typeface="Inter" pitchFamily="34" charset="0"/>
+                <a:ea typeface="Inter" pitchFamily="34" charset="-122"/>
+                <a:cs typeface="Inter" pitchFamily="34" charset="-120"/>
+              </a:rPr>
+              <a:t>Install from Marketplace</a:t>
+            </a:r>
+            <a:endParaRPr lang="en-US" sz="1450" dirty="0"/>
+          </a:p>
+        </p:txBody>
+      </p:sp>
+      <p:sp>
+        <p:nvSpPr>
+          <p:cNvPr id="14" name="Text 9"/>
+          <p:cNvSpPr/>
+          <p:nvPr/>
+        </p:nvSpPr>
+        <p:spPr>
+          <a:xfrm>
+            <a:off x="5367528" y="1728216"/>
+            <a:ext cx="3200400" cy="274320"/>
+          </a:xfrm>
+          <a:prstGeom prst="rect">
+            <a:avLst/>
+          </a:prstGeom>
+          <a:noFill/>
+          <a:ln/>
+        </p:spPr>
+        <p:txBody>
+          <a:bodyPr wrap="square" lIns="0" tIns="0" rIns="0" bIns="0" rtlCol="0" anchor="ctr"/>
+          <a:lstStyle/>
+          <a:p>
+            <a:pPr marL="0" indent="0">
+              <a:buNone/>
+            </a:pPr>
+            <a:r>
+              <a:rPr lang="en-US" sz="1200" dirty="0">
+                <a:solidFill>
+                  <a:srgbClr val="615C52"/>
+                </a:solidFill>
+                <a:latin typeface="Inter" pitchFamily="34" charset="0"/>
+                <a:ea typeface="Inter" pitchFamily="34" charset="-122"/>
+                <a:cs typeface="Inter" pitchFamily="34" charset="-120"/>
+              </a:rPr>
+              <a:t>Search “Claude Code”</a:t>
+            </a:r>
+            <a:endParaRPr lang="en-US" sz="1200" dirty="0"/>
+          </a:p>
+        </p:txBody>
+      </p:sp>
+      <p:sp>
+        <p:nvSpPr>
+          <p:cNvPr id="15" name="Shape 10"/>
+          <p:cNvSpPr/>
+          <p:nvPr/>
+        </p:nvSpPr>
+        <p:spPr>
+          <a:xfrm>
+            <a:off x="4800600" y="2075688"/>
+            <a:ext cx="420624" cy="420624"/>
+          </a:xfrm>
+          <a:prstGeom prst="ellipse">
+            <a:avLst/>
+          </a:prstGeom>
+          <a:solidFill>
+            <a:srgbClr val="D97757"/>
+          </a:solidFill>
+          <a:ln/>
+        </p:spPr>
+        <p:txBody>
+          <a:bodyPr/>
+          <a:lstStyle/>
+          <a:p>
+            <a:endParaRPr lang="en-US"/>
+          </a:p>
+        </p:txBody>
+      </p:sp>
+      <p:pic>
+        <p:nvPicPr>
+          <p:cNvPr id="16" name="Image 3" descr="preencoded.png"/>
+          <p:cNvPicPr>
+            <a:picLocks noChangeAspect="1"/>
+          </p:cNvPicPr>
+          <p:nvPr/>
+        </p:nvPicPr>
+        <p:blipFill>
+          <a:blip r:embed="rId6"/>
+          <a:stretch>
+            <a:fillRect/>
+          </a:stretch>
+        </p:blipFill>
+        <p:spPr>
+          <a:xfrm>
             <a:off x="4909962" y="2185050"/>
             <a:ext cx="201900" cy="201900"/>
           </a:xfrm>
@@ -6175,7 +7350,7 @@
           <p:nvPr/>
         </p:nvPicPr>
         <p:blipFill>
-          <a:blip r:embed="rId6"/>
+          <a:blip r:embed="rId7"/>
           <a:stretch>
             <a:fillRect/>
           </a:stretch>
@@ -6541,7 +7716,7 @@
                 <a:ea typeface="Georgia" pitchFamily="34" charset="-122"/>
                 <a:cs typeface="Georgia" pitchFamily="34" charset="-120"/>
               </a:rPr>
-              <a:t>Move work across surfaces</a:t>
+              <a:t>Pick up where you left off</a:t>
             </a:r>
             <a:endParaRPr lang="en-US" sz="2700" dirty="0"/>
           </a:p>
@@ -6556,7 +7731,7 @@
           <p:nvPr/>
         </p:nvPicPr>
         <p:blipFill>
-          <a:blip r:embed="rId2"/>
+          <a:blip r:embed="rId3"/>
           <a:stretch>
             <a:fillRect/>
           </a:stretch>
@@ -6641,7 +7816,7 @@
           <p:nvPr/>
         </p:nvPicPr>
         <p:blipFill>
-          <a:blip r:embed="rId3"/>
+          <a:blip r:embed="rId4"/>
           <a:stretch>
             <a:fillRect/>
           </a:stretch>
@@ -6804,7 +7979,7 @@
           <p:nvPr/>
         </p:nvPicPr>
         <p:blipFill>
-          <a:blip r:embed="rId4"/>
+          <a:blip r:embed="rId5"/>
           <a:stretch>
             <a:fillRect/>
           </a:stretch>
@@ -6967,7 +8142,7 @@
           <p:nvPr/>
         </p:nvPicPr>
         <p:blipFill>
-          <a:blip r:embed="rId5"/>
+          <a:blip r:embed="rId6"/>
           <a:stretch>
             <a:fillRect/>
           </a:stretch>
@@ -7015,7 +8190,7 @@
                 <a:ea typeface="Courier New" pitchFamily="34" charset="-122"/>
                 <a:cs typeface="Courier New" pitchFamily="34" charset="-120"/>
               </a:rPr>
-              <a:t>/desktop</a:t>
+              <a:t>/resume</a:t>
             </a:r>
             <a:endParaRPr lang="en-US" sz="1450" dirty="0"/>
           </a:p>
@@ -7054,7 +8229,7 @@
                 <a:ea typeface="Inter" pitchFamily="34" charset="-122"/>
                 <a:cs typeface="Inter" pitchFamily="34" charset="-120"/>
               </a:rPr>
-              <a:t>Hand off to the desktop app</a:t>
+              <a:t>In-session picker — reopen any past session</a:t>
             </a:r>
             <a:endParaRPr lang="en-US" sz="1300" dirty="0"/>
           </a:p>
@@ -7130,7 +8305,7 @@
           <p:nvPr/>
         </p:nvPicPr>
         <p:blipFill>
-          <a:blip r:embed="rId6"/>
+          <a:blip r:embed="rId7"/>
           <a:stretch>
             <a:fillRect/>
           </a:stretch>
@@ -7178,7 +8353,7 @@
                 <a:ea typeface="Courier New" pitchFamily="34" charset="-122"/>
                 <a:cs typeface="Courier New" pitchFamily="34" charset="-120"/>
               </a:rPr>
-              <a:t>/teleport</a:t>
+              <a:t>/rewind</a:t>
             </a:r>
             <a:endParaRPr lang="en-US" sz="1450" dirty="0"/>
           </a:p>
@@ -7217,7 +8392,7 @@
                 <a:ea typeface="Inter" pitchFamily="34" charset="-122"/>
                 <a:cs typeface="Inter" pitchFamily="34" charset="-120"/>
               </a:rPr>
-              <a:t>Move the session to another surface</a:t>
+              <a:t>Rewind the conversation and/or the code changes</a:t>
             </a:r>
             <a:endParaRPr lang="en-US" sz="1300" dirty="0"/>
           </a:p>
@@ -7293,7 +8468,7 @@
           <p:nvPr/>
         </p:nvPicPr>
         <p:blipFill>
-          <a:blip r:embed="rId7"/>
+          <a:blip r:embed="rId8"/>
           <a:stretch>
             <a:fillRect/>
           </a:stretch>
@@ -7380,7 +8555,7 @@
                 <a:ea typeface="Inter" pitchFamily="34" charset="-122"/>
                 <a:cs typeface="Inter" pitchFamily="34" charset="-120"/>
               </a:rPr>
-              <a:t>--plan or /plan for large or destructive ops</a:t>
+              <a:t>Shift+Tab to cycle in · claude --permission-mode plan</a:t>
             </a:r>
             <a:endParaRPr lang="en-US" sz="1300" dirty="0"/>
           </a:p>
@@ -7584,7 +8759,7 @@
           <p:nvPr/>
         </p:nvPicPr>
         <p:blipFill>
-          <a:blip r:embed="rId2"/>
+          <a:blip r:embed="rId3"/>
           <a:stretch>
             <a:fillRect/>
           </a:stretch>
@@ -7664,7 +8839,7 @@
           <p:nvPr/>
         </p:nvPicPr>
         <p:blipFill>
-          <a:blip r:embed="rId3"/>
+          <a:blip r:embed="rId4"/>
           <a:stretch>
             <a:fillRect/>
           </a:stretch>
@@ -7795,7 +8970,7 @@
           <p:nvPr/>
         </p:nvPicPr>
         <p:blipFill>
-          <a:blip r:embed="rId4"/>
+          <a:blip r:embed="rId5"/>
           <a:stretch>
             <a:fillRect/>
           </a:stretch>
@@ -7965,7 +9140,7 @@
           <p:nvPr/>
         </p:nvPicPr>
         <p:blipFill>
-          <a:blip r:embed="rId5"/>
+          <a:blip r:embed="rId6"/>
           <a:stretch>
             <a:fillRect/>
           </a:stretch>
@@ -8256,7 +9431,7 @@
           <p:nvPr/>
         </p:nvPicPr>
         <p:blipFill>
-          <a:blip r:embed="rId2"/>
+          <a:blip r:embed="rId3"/>
           <a:stretch>
             <a:fillRect/>
           </a:stretch>
@@ -8387,7 +9562,7 @@
           <p:nvPr/>
         </p:nvPicPr>
         <p:blipFill>
-          <a:blip r:embed="rId3"/>
+          <a:blip r:embed="rId4"/>
           <a:stretch>
             <a:fillRect/>
           </a:stretch>
@@ -8596,7 +9771,7 @@
           <p:nvPr/>
         </p:nvPicPr>
         <p:blipFill>
-          <a:blip r:embed="rId4"/>
+          <a:blip r:embed="rId5"/>
           <a:stretch>
             <a:fillRect/>
           </a:stretch>
@@ -8805,7 +9980,7 @@
           <p:nvPr/>
         </p:nvPicPr>
         <p:blipFill>
-          <a:blip r:embed="rId5"/>
+          <a:blip r:embed="rId6"/>
           <a:stretch>
             <a:fillRect/>
           </a:stretch>
@@ -9096,7 +10271,7 @@
           <p:nvPr/>
         </p:nvPicPr>
         <p:blipFill>
-          <a:blip r:embed="rId2"/>
+          <a:blip r:embed="rId3"/>
           <a:stretch>
             <a:fillRect/>
           </a:stretch>
@@ -9188,7 +10363,7 @@
           <p:nvPr/>
         </p:nvPicPr>
         <p:blipFill>
-          <a:blip r:embed="rId3"/>
+          <a:blip r:embed="rId4"/>
           <a:stretch>
             <a:fillRect/>
           </a:stretch>
@@ -9397,7 +10572,7 @@
           <p:nvPr/>
         </p:nvPicPr>
         <p:blipFill>
-          <a:blip r:embed="rId4"/>
+          <a:blip r:embed="rId5"/>
           <a:stretch>
             <a:fillRect/>
           </a:stretch>
@@ -9606,7 +10781,7 @@
           <p:nvPr/>
         </p:nvPicPr>
         <p:blipFill>
-          <a:blip r:embed="rId5"/>
+          <a:blip r:embed="rId6"/>
           <a:stretch>
             <a:fillRect/>
           </a:stretch>
@@ -10117,4 +11292,319 @@
     </a:ext>
   </a:extLst>
 </a:theme>
+</file>
+
+<file path=ppt/theme/theme2.xml><?xml version="1.0" encoding="utf-8"?>
+<a:theme xmlns:a="http://schemas.openxmlformats.org/drawingml/2006/main" name="Office Theme">
+  <a:themeElements>
+    <a:clrScheme name="Office">
+      <a:dk1>
+        <a:sysClr val="windowText" lastClr="000000"/>
+      </a:dk1>
+      <a:lt1>
+        <a:sysClr val="window" lastClr="FFFFFF"/>
+      </a:lt1>
+      <a:dk2>
+        <a:srgbClr val="0E2841"/>
+      </a:dk2>
+      <a:lt2>
+        <a:srgbClr val="E8E8E8"/>
+      </a:lt2>
+      <a:accent1>
+        <a:srgbClr val="156082"/>
+      </a:accent1>
+      <a:accent2>
+        <a:srgbClr val="E97132"/>
+      </a:accent2>
+      <a:accent3>
+        <a:srgbClr val="196B24"/>
+      </a:accent3>
+      <a:accent4>
+        <a:srgbClr val="0F9ED5"/>
+      </a:accent4>
+      <a:accent5>
+        <a:srgbClr val="A02B93"/>
+      </a:accent5>
+      <a:accent6>
+        <a:srgbClr val="4EA72E"/>
+      </a:accent6>
+      <a:hlink>
+        <a:srgbClr val="467886"/>
+      </a:hlink>
+      <a:folHlink>
+        <a:srgbClr val="96607D"/>
+      </a:folHlink>
+    </a:clrScheme>
+    <a:fontScheme name="Office">
+      <a:majorFont>
+        <a:latin typeface="Aptos Display" panose="02110004020202020204"/>
+        <a:ea typeface=""/>
+        <a:cs typeface=""/>
+        <a:font script="Jpan" typeface="游ゴシック Light"/>
+        <a:font script="Hang" typeface="맑은 고딕"/>
+        <a:font script="Hans" typeface="等线 Light"/>
+        <a:font script="Hant" typeface="新細明體"/>
+        <a:font script="Arab" typeface="Times New Roman"/>
+        <a:font script="Hebr" typeface="Times New Roman"/>
+        <a:font script="Thai" typeface="Angsana New"/>
+        <a:font script="Ethi" typeface="Nyala"/>
+        <a:font script="Beng" typeface="Vrinda"/>
+        <a:font script="Gujr" typeface="Shruti"/>
+        <a:font script="Khmr" typeface="MoolBoran"/>
+        <a:font script="Knda" typeface="Tunga"/>
+        <a:font script="Guru" typeface="Raavi"/>
+        <a:font script="Cans" typeface="Euphemia"/>
+        <a:font script="Cher" typeface="Plantagenet Cherokee"/>
+        <a:font script="Yiii" typeface="Microsoft Yi Baiti"/>
+        <a:font script="Tibt" typeface="Microsoft Himalaya"/>
+        <a:font script="Thaa" typeface="MV Boli"/>
+        <a:font script="Deva" typeface="Mangal"/>
+        <a:font script="Telu" typeface="Gautami"/>
+        <a:font script="Taml" typeface="Latha"/>
+        <a:font script="Syrc" typeface="Estrangelo Edessa"/>
+        <a:font script="Orya" typeface="Kalinga"/>
+        <a:font script="Mlym" typeface="Kartika"/>
+        <a:font script="Laoo" typeface="DokChampa"/>
+        <a:font script="Sinh" typeface="Iskoola Pota"/>
+        <a:font script="Mong" typeface="Mongolian Baiti"/>
+        <a:font script="Viet" typeface="Times New Roman"/>
+        <a:font script="Uigh" typeface="Microsoft Uighur"/>
+        <a:font script="Geor" typeface="Sylfaen"/>
+        <a:font script="Armn" typeface="Arial"/>
+        <a:font script="Bugi" typeface="Leelawadee UI"/>
+        <a:font script="Bopo" typeface="Microsoft JhengHei"/>
+        <a:font script="Java" typeface="Javanese Text"/>
+        <a:font script="Lisu" typeface="Segoe UI"/>
+        <a:font script="Mymr" typeface="Myanmar Text"/>
+        <a:font script="Nkoo" typeface="Ebrima"/>
+        <a:font script="Olck" typeface="Nirmala UI"/>
+        <a:font script="Osma" typeface="Ebrima"/>
+        <a:font script="Phag" typeface="Phagspa"/>
+        <a:font script="Syrn" typeface="Estrangelo Edessa"/>
+        <a:font script="Syrj" typeface="Estrangelo Edessa"/>
+        <a:font script="Syre" typeface="Estrangelo Edessa"/>
+        <a:font script="Sora" typeface="Nirmala UI"/>
+        <a:font script="Tale" typeface="Microsoft Tai Le"/>
+        <a:font script="Talu" typeface="Microsoft New Tai Lue"/>
+        <a:font script="Tfng" typeface="Ebrima"/>
+      </a:majorFont>
+      <a:minorFont>
+        <a:latin typeface="Aptos" panose="02110004020202020204"/>
+        <a:ea typeface=""/>
+        <a:cs typeface=""/>
+        <a:font script="Jpan" typeface="游ゴシック"/>
+        <a:font script="Hang" typeface="맑은 고딕"/>
+        <a:font script="Hans" typeface="等线"/>
+        <a:font script="Hant" typeface="新細明體"/>
+        <a:font script="Arab" typeface="Arial"/>
+        <a:font script="Hebr" typeface="Arial"/>
+        <a:font script="Thai" typeface="Cordia New"/>
+        <a:font script="Ethi" typeface="Nyala"/>
+        <a:font script="Beng" typeface="Vrinda"/>
+        <a:font script="Gujr" typeface="Shruti"/>
+        <a:font script="Khmr" typeface="DaunPenh"/>
+        <a:font script="Knda" typeface="Tunga"/>
+        <a:font script="Guru" typeface="Raavi"/>
+        <a:font script="Cans" typeface="Euphemia"/>
+        <a:font script="Cher" typeface="Plantagenet Cherokee"/>
+        <a:font script="Yiii" typeface="Microsoft Yi Baiti"/>
+        <a:font script="Tibt" typeface="Microsoft Himalaya"/>
+        <a:font script="Thaa" typeface="MV Boli"/>
+        <a:font script="Deva" typeface="Mangal"/>
+        <a:font script="Telu" typeface="Gautami"/>
+        <a:font script="Taml" typeface="Latha"/>
+        <a:font script="Syrc" typeface="Estrangelo Edessa"/>
+        <a:font script="Orya" typeface="Kalinga"/>
+        <a:font script="Mlym" typeface="Kartika"/>
+        <a:font script="Laoo" typeface="DokChampa"/>
+        <a:font script="Sinh" typeface="Iskoola Pota"/>
+        <a:font script="Mong" typeface="Mongolian Baiti"/>
+        <a:font script="Viet" typeface="Arial"/>
+        <a:font script="Uigh" typeface="Microsoft Uighur"/>
+        <a:font script="Geor" typeface="Sylfaen"/>
+        <a:font script="Armn" typeface="Arial"/>
+        <a:font script="Bugi" typeface="Leelawadee UI"/>
+        <a:font script="Bopo" typeface="Microsoft JhengHei"/>
+        <a:font script="Java" typeface="Javanese Text"/>
+        <a:font script="Lisu" typeface="Segoe UI"/>
+        <a:font script="Mymr" typeface="Myanmar Text"/>
+        <a:font script="Nkoo" typeface="Ebrima"/>
+        <a:font script="Olck" typeface="Nirmala UI"/>
+        <a:font script="Osma" typeface="Ebrima"/>
+        <a:font script="Phag" typeface="Phagspa"/>
+        <a:font script="Syrn" typeface="Estrangelo Edessa"/>
+        <a:font script="Syrj" typeface="Estrangelo Edessa"/>
+        <a:font script="Syre" typeface="Estrangelo Edessa"/>
+        <a:font script="Sora" typeface="Nirmala UI"/>
+        <a:font script="Tale" typeface="Microsoft Tai Le"/>
+        <a:font script="Talu" typeface="Microsoft New Tai Lue"/>
+        <a:font script="Tfng" typeface="Ebrima"/>
+      </a:minorFont>
+    </a:fontScheme>
+    <a:fmtScheme name="Office">
+      <a:fillStyleLst>
+        <a:solidFill>
+          <a:schemeClr val="phClr"/>
+        </a:solidFill>
+        <a:gradFill rotWithShape="1">
+          <a:gsLst>
+            <a:gs pos="0">
+              <a:schemeClr val="phClr">
+                <a:lumMod val="110000"/>
+                <a:satMod val="105000"/>
+                <a:tint val="67000"/>
+              </a:schemeClr>
+            </a:gs>
+            <a:gs pos="50000">
+              <a:schemeClr val="phClr">
+                <a:lumMod val="105000"/>
+                <a:satMod val="103000"/>
+                <a:tint val="73000"/>
+              </a:schemeClr>
+            </a:gs>
+            <a:gs pos="100000">
+              <a:schemeClr val="phClr">
+                <a:lumMod val="105000"/>
+                <a:satMod val="109000"/>
+                <a:tint val="81000"/>
+              </a:schemeClr>
+            </a:gs>
+          </a:gsLst>
+          <a:lin ang="5400000" scaled="0"/>
+        </a:gradFill>
+        <a:gradFill rotWithShape="1">
+          <a:gsLst>
+            <a:gs pos="0">
+              <a:schemeClr val="phClr">
+                <a:satMod val="103000"/>
+                <a:lumMod val="102000"/>
+                <a:tint val="94000"/>
+              </a:schemeClr>
+            </a:gs>
+            <a:gs pos="50000">
+              <a:schemeClr val="phClr">
+                <a:satMod val="110000"/>
+                <a:lumMod val="100000"/>
+                <a:shade val="100000"/>
+              </a:schemeClr>
+            </a:gs>
+            <a:gs pos="100000">
+              <a:schemeClr val="phClr">
+                <a:lumMod val="99000"/>
+                <a:satMod val="120000"/>
+                <a:shade val="78000"/>
+              </a:schemeClr>
+            </a:gs>
+          </a:gsLst>
+          <a:lin ang="5400000" scaled="0"/>
+        </a:gradFill>
+      </a:fillStyleLst>
+      <a:lnStyleLst>
+        <a:ln w="12700" cap="flat" cmpd="sng" algn="ctr">
+          <a:solidFill>
+            <a:schemeClr val="phClr"/>
+          </a:solidFill>
+          <a:prstDash val="solid"/>
+          <a:miter lim="800000"/>
+        </a:ln>
+        <a:ln w="19050" cap="flat" cmpd="sng" algn="ctr">
+          <a:solidFill>
+            <a:schemeClr val="phClr"/>
+          </a:solidFill>
+          <a:prstDash val="solid"/>
+          <a:miter lim="800000"/>
+        </a:ln>
+        <a:ln w="25400" cap="flat" cmpd="sng" algn="ctr">
+          <a:solidFill>
+            <a:schemeClr val="phClr"/>
+          </a:solidFill>
+          <a:prstDash val="solid"/>
+          <a:miter lim="800000"/>
+        </a:ln>
+      </a:lnStyleLst>
+      <a:effectStyleLst>
+        <a:effectStyle>
+          <a:effectLst/>
+        </a:effectStyle>
+        <a:effectStyle>
+          <a:effectLst/>
+        </a:effectStyle>
+        <a:effectStyle>
+          <a:effectLst>
+            <a:outerShdw blurRad="57150" dist="19050" dir="5400000" algn="ctr" rotWithShape="0">
+              <a:srgbClr val="000000">
+                <a:alpha val="63000"/>
+              </a:srgbClr>
+            </a:outerShdw>
+          </a:effectLst>
+        </a:effectStyle>
+      </a:effectStyleLst>
+      <a:bgFillStyleLst>
+        <a:solidFill>
+          <a:schemeClr val="phClr"/>
+        </a:solidFill>
+        <a:solidFill>
+          <a:schemeClr val="phClr">
+            <a:tint val="95000"/>
+            <a:satMod val="170000"/>
+          </a:schemeClr>
+        </a:solidFill>
+        <a:gradFill rotWithShape="1">
+          <a:gsLst>
+            <a:gs pos="0">
+              <a:schemeClr val="phClr">
+                <a:tint val="93000"/>
+                <a:satMod val="150000"/>
+                <a:shade val="98000"/>
+                <a:lumMod val="102000"/>
+              </a:schemeClr>
+            </a:gs>
+            <a:gs pos="50000">
+              <a:schemeClr val="phClr">
+                <a:tint val="98000"/>
+                <a:satMod val="130000"/>
+                <a:shade val="90000"/>
+                <a:lumMod val="103000"/>
+              </a:schemeClr>
+            </a:gs>
+            <a:gs pos="100000">
+              <a:schemeClr val="phClr">
+                <a:shade val="63000"/>
+                <a:satMod val="120000"/>
+              </a:schemeClr>
+            </a:gs>
+          </a:gsLst>
+          <a:lin ang="5400000" scaled="0"/>
+        </a:gradFill>
+      </a:bgFillStyleLst>
+    </a:fmtScheme>
+  </a:themeElements>
+  <a:objectDefaults>
+    <a:lnDef>
+      <a:spPr/>
+      <a:bodyPr/>
+      <a:lstStyle/>
+      <a:style>
+        <a:lnRef idx="2">
+          <a:schemeClr val="accent1"/>
+        </a:lnRef>
+        <a:fillRef idx="0">
+          <a:schemeClr val="accent1"/>
+        </a:fillRef>
+        <a:effectRef idx="1">
+          <a:schemeClr val="accent1"/>
+        </a:effectRef>
+        <a:fontRef idx="minor">
+          <a:schemeClr val="tx1"/>
+        </a:fontRef>
+      </a:style>
+    </a:lnDef>
+  </a:objectDefaults>
+  <a:extraClrSchemeLst/>
+  <a:extLst>
+    <a:ext uri="{05A4C25C-085E-4340-85A3-A5531E510DB2}">
+      <thm15:themeFamily xmlns:thm15="http://schemas.microsoft.com/office/thememl/2012/main" name="Office Theme" id="{2E142A2C-CD16-42D6-873A-C26D2A0506FA}" vid="{1BDDFF52-6CD6-40A5-AB3C-68EB2F1E4D0A}"/>
+    </a:ext>
+  </a:extLst>
+</a:theme>
 </file>
--- a/decks/Day 1/Section3-IDE-Integration-MCP.pptx
+++ b/decks/Day 1/Section3-IDE-Integration-MCP.pptx
@@ -1802,45 +1802,6 @@
           <a:lstStyle/>
           <a:p>
             <a:endParaRPr lang="en-US"/>
-          </a:p>
-        </p:txBody>
-      </p:sp>
-      <p:sp>
-        <p:nvSpPr>
-          <p:cNvPr id="8" name="Text 5"/>
-          <p:cNvSpPr/>
-          <p:nvPr/>
-        </p:nvSpPr>
-        <p:spPr>
-          <a:xfrm>
-            <a:off x="640080" y="3621024"/>
-            <a:ext cx="7315200" cy="365760"/>
-          </a:xfrm>
-          <a:prstGeom prst="rect">
-            <a:avLst/>
-          </a:prstGeom>
-          <a:noFill/>
-          <a:ln/>
-        </p:spPr>
-        <p:txBody>
-          <a:bodyPr wrap="square" lIns="0" tIns="0" rIns="0" bIns="0" rtlCol="0" anchor="ctr"/>
-          <a:lstStyle/>
-          <a:p>
-            <a:pPr marL="0" indent="0">
-              <a:buNone/>
-            </a:pPr>
-            <a:r>
-              <a:rPr lang="en-US" sz="1700" dirty="0">
-                <a:solidFill>
-                  <a:srgbClr val="615C52"/>
-                </a:solidFill>
-                <a:latin typeface="Inter" pitchFamily="34" charset="0"/>
-                <a:ea typeface="Inter" pitchFamily="34" charset="-122"/>
-                <a:cs typeface="Inter" pitchFamily="34" charset="-120"/>
-              </a:rPr>
-              <a:t>105 min  ·  40 lecture / demo  +  65 lab</a:t>
-            </a:r>
-            <a:endParaRPr lang="en-US" sz="1700" dirty="0"/>
           </a:p>
         </p:txBody>
       </p:sp>
